--- a/Slides/DSAI_Team_6_Milestone5.pptx
+++ b/Slides/DSAI_Team_6_Milestone5.pptx
@@ -5,25 +5,25 @@
     <p:sldMasterId id="2147483648" r:id="rId1"/>
   </p:sldMasterIdLst>
   <p:sldIdLst>
-    <p:sldId id="256" r:id="rId7"/>
-    <p:sldId id="257" r:id="rId8"/>
-    <p:sldId id="258" r:id="rId9"/>
-    <p:sldId id="259" r:id="rId10"/>
-    <p:sldId id="260" r:id="rId11"/>
-    <p:sldId id="261" r:id="rId12"/>
-    <p:sldId id="262" r:id="rId13"/>
-    <p:sldId id="263" r:id="rId14"/>
-    <p:sldId id="264" r:id="rId15"/>
-    <p:sldId id="265" r:id="rId16"/>
-    <p:sldId id="266" r:id="rId17"/>
-    <p:sldId id="267" r:id="rId18"/>
-    <p:sldId id="268" r:id="rId19"/>
-    <p:sldId id="269" r:id="rId20"/>
-    <p:sldId id="270" r:id="rId21"/>
-    <p:sldId id="271" r:id="rId22"/>
-    <p:sldId id="272" r:id="rId23"/>
+    <p:sldId id="256" r:id="rId2"/>
+    <p:sldId id="257" r:id="rId3"/>
+    <p:sldId id="258" r:id="rId4"/>
+    <p:sldId id="259" r:id="rId5"/>
+    <p:sldId id="260" r:id="rId6"/>
+    <p:sldId id="261" r:id="rId7"/>
+    <p:sldId id="262" r:id="rId8"/>
+    <p:sldId id="263" r:id="rId9"/>
+    <p:sldId id="264" r:id="rId10"/>
+    <p:sldId id="265" r:id="rId11"/>
+    <p:sldId id="266" r:id="rId12"/>
+    <p:sldId id="267" r:id="rId13"/>
+    <p:sldId id="268" r:id="rId14"/>
+    <p:sldId id="269" r:id="rId15"/>
+    <p:sldId id="270" r:id="rId16"/>
+    <p:sldId id="271" r:id="rId17"/>
+    <p:sldId id="272" r:id="rId18"/>
   </p:sldIdLst>
-  <p:sldSz cx="12191695" cy="6858000" type="screen4x3"/>
+  <p:sldSz cx="12192000" cy="6858000"/>
   <p:notesSz cx="6858000" cy="9144000"/>
   <p:defaultTextStyle>
     <a:defPPr>
@@ -120,6 +120,22 @@
       </a:defRPr>
     </a:lvl9pPr>
   </p:defaultTextStyle>
+  <p:extLst>
+    <p:ext uri="{EFAFB233-063F-42B5-8137-9DF3F51BA10A}">
+      <p15:sldGuideLst xmlns:p15="http://schemas.microsoft.com/office/powerpoint/2012/main">
+        <p15:guide id="1" orient="horz" pos="2160">
+          <p15:clr>
+            <a:srgbClr val="A4A3A4"/>
+          </p15:clr>
+        </p15:guide>
+        <p15:guide id="2" pos="2880">
+          <p15:clr>
+            <a:srgbClr val="A4A3A4"/>
+          </p15:clr>
+        </p15:guide>
+      </p15:sldGuideLst>
+    </p:ext>
+  </p:extLst>
 </p:presentation>
 </file>
 
@@ -161,10 +177,9 @@
           <a:lstStyle/>
           <a:p>
             <a:r>
-              <a:rPr lang="en-US" smtClean="0"/>
+              <a:rPr lang="en-US"/>
               <a:t>Click to edit Master title style</a:t>
             </a:r>
-            <a:endParaRPr lang="en-US"/>
           </a:p>
         </p:txBody>
       </p:sp>
@@ -280,10 +295,9 @@
           </a:lstStyle>
           <a:p>
             <a:r>
-              <a:rPr lang="en-US" smtClean="0"/>
+              <a:rPr lang="en-US"/>
               <a:t>Click to edit Master subtitle style</a:t>
             </a:r>
-            <a:endParaRPr lang="en-US"/>
           </a:p>
         </p:txBody>
       </p:sp>
@@ -304,7 +318,7 @@
           <a:p>
             <a:fld id="{5BCAD085-E8A6-8845-BD4E-CB4CCA059FC4}" type="datetimeFigureOut">
               <a:rPr lang="en-US" smtClean="0"/>
-              <a:t>1/27/13</a:t>
+              <a:t>07-Aug-26</a:t>
             </a:fld>
             <a:endParaRPr lang="en-US"/>
           </a:p>
@@ -398,10 +412,9 @@
           <a:lstStyle/>
           <a:p>
             <a:r>
-              <a:rPr lang="en-US" smtClean="0"/>
+              <a:rPr lang="en-US"/>
               <a:t>Click to edit Master title style</a:t>
             </a:r>
-            <a:endParaRPr lang="en-US"/>
           </a:p>
         </p:txBody>
       </p:sp>
@@ -422,38 +435,37 @@
           <a:p>
             <a:pPr lvl="0"/>
             <a:r>
-              <a:rPr lang="en-US" smtClean="0"/>
+              <a:rPr lang="en-US"/>
               <a:t>Click to edit Master text styles</a:t>
             </a:r>
           </a:p>
           <a:p>
             <a:pPr lvl="1"/>
             <a:r>
-              <a:rPr lang="en-US" smtClean="0"/>
+              <a:rPr lang="en-US"/>
               <a:t>Second level</a:t>
             </a:r>
           </a:p>
           <a:p>
             <a:pPr lvl="2"/>
             <a:r>
-              <a:rPr lang="en-US" smtClean="0"/>
+              <a:rPr lang="en-US"/>
               <a:t>Third level</a:t>
             </a:r>
           </a:p>
           <a:p>
             <a:pPr lvl="3"/>
             <a:r>
-              <a:rPr lang="en-US" smtClean="0"/>
+              <a:rPr lang="en-US"/>
               <a:t>Fourth level</a:t>
             </a:r>
           </a:p>
           <a:p>
             <a:pPr lvl="4"/>
             <a:r>
-              <a:rPr lang="en-US" smtClean="0"/>
+              <a:rPr lang="en-US"/>
               <a:t>Fifth level</a:t>
             </a:r>
-            <a:endParaRPr lang="en-US"/>
           </a:p>
         </p:txBody>
       </p:sp>
@@ -474,7 +486,7 @@
           <a:p>
             <a:fld id="{5BCAD085-E8A6-8845-BD4E-CB4CCA059FC4}" type="datetimeFigureOut">
               <a:rPr lang="en-US" smtClean="0"/>
-              <a:t>1/27/13</a:t>
+              <a:t>07-Aug-26</a:t>
             </a:fld>
             <a:endParaRPr lang="en-US"/>
           </a:p>
@@ -573,10 +585,9 @@
           <a:lstStyle/>
           <a:p>
             <a:r>
-              <a:rPr lang="en-US" smtClean="0"/>
+              <a:rPr lang="en-US"/>
               <a:t>Click to edit Master title style</a:t>
             </a:r>
-            <a:endParaRPr lang="en-US"/>
           </a:p>
         </p:txBody>
       </p:sp>
@@ -602,38 +613,37 @@
           <a:p>
             <a:pPr lvl="0"/>
             <a:r>
-              <a:rPr lang="en-US" smtClean="0"/>
+              <a:rPr lang="en-US"/>
               <a:t>Click to edit Master text styles</a:t>
             </a:r>
           </a:p>
           <a:p>
             <a:pPr lvl="1"/>
             <a:r>
-              <a:rPr lang="en-US" smtClean="0"/>
+              <a:rPr lang="en-US"/>
               <a:t>Second level</a:t>
             </a:r>
           </a:p>
           <a:p>
             <a:pPr lvl="2"/>
             <a:r>
-              <a:rPr lang="en-US" smtClean="0"/>
+              <a:rPr lang="en-US"/>
               <a:t>Third level</a:t>
             </a:r>
           </a:p>
           <a:p>
             <a:pPr lvl="3"/>
             <a:r>
-              <a:rPr lang="en-US" smtClean="0"/>
+              <a:rPr lang="en-US"/>
               <a:t>Fourth level</a:t>
             </a:r>
           </a:p>
           <a:p>
             <a:pPr lvl="4"/>
             <a:r>
-              <a:rPr lang="en-US" smtClean="0"/>
+              <a:rPr lang="en-US"/>
               <a:t>Fifth level</a:t>
             </a:r>
-            <a:endParaRPr lang="en-US"/>
           </a:p>
         </p:txBody>
       </p:sp>
@@ -654,7 +664,7 @@
           <a:p>
             <a:fld id="{5BCAD085-E8A6-8845-BD4E-CB4CCA059FC4}" type="datetimeFigureOut">
               <a:rPr lang="en-US" smtClean="0"/>
-              <a:t>1/27/13</a:t>
+              <a:t>07-Aug-26</a:t>
             </a:fld>
             <a:endParaRPr lang="en-US"/>
           </a:p>
@@ -748,10 +758,9 @@
           <a:lstStyle/>
           <a:p>
             <a:r>
-              <a:rPr lang="en-US" smtClean="0"/>
+              <a:rPr lang="en-US"/>
               <a:t>Click to edit Master title style</a:t>
             </a:r>
-            <a:endParaRPr lang="en-US"/>
           </a:p>
         </p:txBody>
       </p:sp>
@@ -772,38 +781,37 @@
           <a:p>
             <a:pPr lvl="0"/>
             <a:r>
-              <a:rPr lang="en-US" smtClean="0"/>
+              <a:rPr lang="en-US"/>
               <a:t>Click to edit Master text styles</a:t>
             </a:r>
           </a:p>
           <a:p>
             <a:pPr lvl="1"/>
             <a:r>
-              <a:rPr lang="en-US" smtClean="0"/>
+              <a:rPr lang="en-US"/>
               <a:t>Second level</a:t>
             </a:r>
           </a:p>
           <a:p>
             <a:pPr lvl="2"/>
             <a:r>
-              <a:rPr lang="en-US" smtClean="0"/>
+              <a:rPr lang="en-US"/>
               <a:t>Third level</a:t>
             </a:r>
           </a:p>
           <a:p>
             <a:pPr lvl="3"/>
             <a:r>
-              <a:rPr lang="en-US" smtClean="0"/>
+              <a:rPr lang="en-US"/>
               <a:t>Fourth level</a:t>
             </a:r>
           </a:p>
           <a:p>
             <a:pPr lvl="4"/>
             <a:r>
-              <a:rPr lang="en-US" smtClean="0"/>
+              <a:rPr lang="en-US"/>
               <a:t>Fifth level</a:t>
             </a:r>
-            <a:endParaRPr lang="en-US"/>
           </a:p>
         </p:txBody>
       </p:sp>
@@ -824,7 +832,7 @@
           <a:p>
             <a:fld id="{5BCAD085-E8A6-8845-BD4E-CB4CCA059FC4}" type="datetimeFigureOut">
               <a:rPr lang="en-US" smtClean="0"/>
-              <a:t>1/27/13</a:t>
+              <a:t>07-Aug-26</a:t>
             </a:fld>
             <a:endParaRPr lang="en-US"/>
           </a:p>
@@ -927,10 +935,9 @@
           </a:lstStyle>
           <a:p>
             <a:r>
-              <a:rPr lang="en-US" smtClean="0"/>
+              <a:rPr lang="en-US"/>
               <a:t>Click to edit Master title style</a:t>
             </a:r>
-            <a:endParaRPr lang="en-US"/>
           </a:p>
         </p:txBody>
       </p:sp>
@@ -1047,7 +1054,7 @@
           <a:p>
             <a:pPr lvl="0"/>
             <a:r>
-              <a:rPr lang="en-US" smtClean="0"/>
+              <a:rPr lang="en-US"/>
               <a:t>Click to edit Master text styles</a:t>
             </a:r>
           </a:p>
@@ -1070,7 +1077,7 @@
           <a:p>
             <a:fld id="{5BCAD085-E8A6-8845-BD4E-CB4CCA059FC4}" type="datetimeFigureOut">
               <a:rPr lang="en-US" smtClean="0"/>
-              <a:t>1/27/13</a:t>
+              <a:t>07-Aug-26</a:t>
             </a:fld>
             <a:endParaRPr lang="en-US"/>
           </a:p>
@@ -1164,10 +1171,9 @@
           <a:lstStyle/>
           <a:p>
             <a:r>
-              <a:rPr lang="en-US" smtClean="0"/>
+              <a:rPr lang="en-US"/>
               <a:t>Click to edit Master title style</a:t>
             </a:r>
-            <a:endParaRPr lang="en-US"/>
           </a:p>
         </p:txBody>
       </p:sp>
@@ -1221,38 +1227,37 @@
           <a:p>
             <a:pPr lvl="0"/>
             <a:r>
-              <a:rPr lang="en-US" smtClean="0"/>
+              <a:rPr lang="en-US"/>
               <a:t>Click to edit Master text styles</a:t>
             </a:r>
           </a:p>
           <a:p>
             <a:pPr lvl="1"/>
             <a:r>
-              <a:rPr lang="en-US" smtClean="0"/>
+              <a:rPr lang="en-US"/>
               <a:t>Second level</a:t>
             </a:r>
           </a:p>
           <a:p>
             <a:pPr lvl="2"/>
             <a:r>
-              <a:rPr lang="en-US" smtClean="0"/>
+              <a:rPr lang="en-US"/>
               <a:t>Third level</a:t>
             </a:r>
           </a:p>
           <a:p>
             <a:pPr lvl="3"/>
             <a:r>
-              <a:rPr lang="en-US" smtClean="0"/>
+              <a:rPr lang="en-US"/>
               <a:t>Fourth level</a:t>
             </a:r>
           </a:p>
           <a:p>
             <a:pPr lvl="4"/>
             <a:r>
-              <a:rPr lang="en-US" smtClean="0"/>
+              <a:rPr lang="en-US"/>
               <a:t>Fifth level</a:t>
             </a:r>
-            <a:endParaRPr lang="en-US"/>
           </a:p>
         </p:txBody>
       </p:sp>
@@ -1306,38 +1311,37 @@
           <a:p>
             <a:pPr lvl="0"/>
             <a:r>
-              <a:rPr lang="en-US" smtClean="0"/>
+              <a:rPr lang="en-US"/>
               <a:t>Click to edit Master text styles</a:t>
             </a:r>
           </a:p>
           <a:p>
             <a:pPr lvl="1"/>
             <a:r>
-              <a:rPr lang="en-US" smtClean="0"/>
+              <a:rPr lang="en-US"/>
               <a:t>Second level</a:t>
             </a:r>
           </a:p>
           <a:p>
             <a:pPr lvl="2"/>
             <a:r>
-              <a:rPr lang="en-US" smtClean="0"/>
+              <a:rPr lang="en-US"/>
               <a:t>Third level</a:t>
             </a:r>
           </a:p>
           <a:p>
             <a:pPr lvl="3"/>
             <a:r>
-              <a:rPr lang="en-US" smtClean="0"/>
+              <a:rPr lang="en-US"/>
               <a:t>Fourth level</a:t>
             </a:r>
           </a:p>
           <a:p>
             <a:pPr lvl="4"/>
             <a:r>
-              <a:rPr lang="en-US" smtClean="0"/>
+              <a:rPr lang="en-US"/>
               <a:t>Fifth level</a:t>
             </a:r>
-            <a:endParaRPr lang="en-US"/>
           </a:p>
         </p:txBody>
       </p:sp>
@@ -1358,7 +1362,7 @@
           <a:p>
             <a:fld id="{5BCAD085-E8A6-8845-BD4E-CB4CCA059FC4}" type="datetimeFigureOut">
               <a:rPr lang="en-US" smtClean="0"/>
-              <a:t>1/27/13</a:t>
+              <a:t>07-Aug-26</a:t>
             </a:fld>
             <a:endParaRPr lang="en-US"/>
           </a:p>
@@ -1456,10 +1460,9 @@
           </a:lstStyle>
           <a:p>
             <a:r>
-              <a:rPr lang="en-US" smtClean="0"/>
+              <a:rPr lang="en-US"/>
               <a:t>Click to edit Master title style</a:t>
             </a:r>
-            <a:endParaRPr lang="en-US"/>
           </a:p>
         </p:txBody>
       </p:sp>
@@ -1522,7 +1525,7 @@
           <a:p>
             <a:pPr lvl="0"/>
             <a:r>
-              <a:rPr lang="en-US" smtClean="0"/>
+              <a:rPr lang="en-US"/>
               <a:t>Click to edit Master text styles</a:t>
             </a:r>
           </a:p>
@@ -1578,38 +1581,37 @@
           <a:p>
             <a:pPr lvl="0"/>
             <a:r>
-              <a:rPr lang="en-US" smtClean="0"/>
+              <a:rPr lang="en-US"/>
               <a:t>Click to edit Master text styles</a:t>
             </a:r>
           </a:p>
           <a:p>
             <a:pPr lvl="1"/>
             <a:r>
-              <a:rPr lang="en-US" smtClean="0"/>
+              <a:rPr lang="en-US"/>
               <a:t>Second level</a:t>
             </a:r>
           </a:p>
           <a:p>
             <a:pPr lvl="2"/>
             <a:r>
-              <a:rPr lang="en-US" smtClean="0"/>
+              <a:rPr lang="en-US"/>
               <a:t>Third level</a:t>
             </a:r>
           </a:p>
           <a:p>
             <a:pPr lvl="3"/>
             <a:r>
-              <a:rPr lang="en-US" smtClean="0"/>
+              <a:rPr lang="en-US"/>
               <a:t>Fourth level</a:t>
             </a:r>
           </a:p>
           <a:p>
             <a:pPr lvl="4"/>
             <a:r>
-              <a:rPr lang="en-US" smtClean="0"/>
+              <a:rPr lang="en-US"/>
               <a:t>Fifth level</a:t>
             </a:r>
-            <a:endParaRPr lang="en-US"/>
           </a:p>
         </p:txBody>
       </p:sp>
@@ -1672,7 +1674,7 @@
           <a:p>
             <a:pPr lvl="0"/>
             <a:r>
-              <a:rPr lang="en-US" smtClean="0"/>
+              <a:rPr lang="en-US"/>
               <a:t>Click to edit Master text styles</a:t>
             </a:r>
           </a:p>
@@ -1728,38 +1730,37 @@
           <a:p>
             <a:pPr lvl="0"/>
             <a:r>
-              <a:rPr lang="en-US" smtClean="0"/>
+              <a:rPr lang="en-US"/>
               <a:t>Click to edit Master text styles</a:t>
             </a:r>
           </a:p>
           <a:p>
             <a:pPr lvl="1"/>
             <a:r>
-              <a:rPr lang="en-US" smtClean="0"/>
+              <a:rPr lang="en-US"/>
               <a:t>Second level</a:t>
             </a:r>
           </a:p>
           <a:p>
             <a:pPr lvl="2"/>
             <a:r>
-              <a:rPr lang="en-US" smtClean="0"/>
+              <a:rPr lang="en-US"/>
               <a:t>Third level</a:t>
             </a:r>
           </a:p>
           <a:p>
             <a:pPr lvl="3"/>
             <a:r>
-              <a:rPr lang="en-US" smtClean="0"/>
+              <a:rPr lang="en-US"/>
               <a:t>Fourth level</a:t>
             </a:r>
           </a:p>
           <a:p>
             <a:pPr lvl="4"/>
             <a:r>
-              <a:rPr lang="en-US" smtClean="0"/>
+              <a:rPr lang="en-US"/>
               <a:t>Fifth level</a:t>
             </a:r>
-            <a:endParaRPr lang="en-US"/>
           </a:p>
         </p:txBody>
       </p:sp>
@@ -1780,7 +1781,7 @@
           <a:p>
             <a:fld id="{5BCAD085-E8A6-8845-BD4E-CB4CCA059FC4}" type="datetimeFigureOut">
               <a:rPr lang="en-US" smtClean="0"/>
-              <a:t>1/27/13</a:t>
+              <a:t>07-Aug-26</a:t>
             </a:fld>
             <a:endParaRPr lang="en-US"/>
           </a:p>
@@ -1874,10 +1875,9 @@
           <a:lstStyle/>
           <a:p>
             <a:r>
-              <a:rPr lang="en-US" smtClean="0"/>
+              <a:rPr lang="en-US"/>
               <a:t>Click to edit Master title style</a:t>
             </a:r>
-            <a:endParaRPr lang="en-US"/>
           </a:p>
         </p:txBody>
       </p:sp>
@@ -1898,7 +1898,7 @@
           <a:p>
             <a:fld id="{5BCAD085-E8A6-8845-BD4E-CB4CCA059FC4}" type="datetimeFigureOut">
               <a:rPr lang="en-US" smtClean="0"/>
-              <a:t>1/27/13</a:t>
+              <a:t>07-Aug-26</a:t>
             </a:fld>
             <a:endParaRPr lang="en-US"/>
           </a:p>
@@ -1993,7 +1993,7 @@
           <a:p>
             <a:fld id="{5BCAD085-E8A6-8845-BD4E-CB4CCA059FC4}" type="datetimeFigureOut">
               <a:rPr lang="en-US" smtClean="0"/>
-              <a:t>1/27/13</a:t>
+              <a:t>07-Aug-26</a:t>
             </a:fld>
             <a:endParaRPr lang="en-US"/>
           </a:p>
@@ -2096,10 +2096,9 @@
           </a:lstStyle>
           <a:p>
             <a:r>
-              <a:rPr lang="en-US" smtClean="0"/>
+              <a:rPr lang="en-US"/>
               <a:t>Click to edit Master title style</a:t>
             </a:r>
-            <a:endParaRPr lang="en-US"/>
           </a:p>
         </p:txBody>
       </p:sp>
@@ -2153,38 +2152,37 @@
           <a:p>
             <a:pPr lvl="0"/>
             <a:r>
-              <a:rPr lang="en-US" smtClean="0"/>
+              <a:rPr lang="en-US"/>
               <a:t>Click to edit Master text styles</a:t>
             </a:r>
           </a:p>
           <a:p>
             <a:pPr lvl="1"/>
             <a:r>
-              <a:rPr lang="en-US" smtClean="0"/>
+              <a:rPr lang="en-US"/>
               <a:t>Second level</a:t>
             </a:r>
           </a:p>
           <a:p>
             <a:pPr lvl="2"/>
             <a:r>
-              <a:rPr lang="en-US" smtClean="0"/>
+              <a:rPr lang="en-US"/>
               <a:t>Third level</a:t>
             </a:r>
           </a:p>
           <a:p>
             <a:pPr lvl="3"/>
             <a:r>
-              <a:rPr lang="en-US" smtClean="0"/>
+              <a:rPr lang="en-US"/>
               <a:t>Fourth level</a:t>
             </a:r>
           </a:p>
           <a:p>
             <a:pPr lvl="4"/>
             <a:r>
-              <a:rPr lang="en-US" smtClean="0"/>
+              <a:rPr lang="en-US"/>
               <a:t>Fifth level</a:t>
             </a:r>
-            <a:endParaRPr lang="en-US"/>
           </a:p>
         </p:txBody>
       </p:sp>
@@ -2247,7 +2245,7 @@
           <a:p>
             <a:pPr lvl="0"/>
             <a:r>
-              <a:rPr lang="en-US" smtClean="0"/>
+              <a:rPr lang="en-US"/>
               <a:t>Click to edit Master text styles</a:t>
             </a:r>
           </a:p>
@@ -2270,7 +2268,7 @@
           <a:p>
             <a:fld id="{5BCAD085-E8A6-8845-BD4E-CB4CCA059FC4}" type="datetimeFigureOut">
               <a:rPr lang="en-US" smtClean="0"/>
-              <a:t>1/27/13</a:t>
+              <a:t>07-Aug-26</a:t>
             </a:fld>
             <a:endParaRPr lang="en-US"/>
           </a:p>
@@ -2373,10 +2371,9 @@
           </a:lstStyle>
           <a:p>
             <a:r>
-              <a:rPr lang="en-US" smtClean="0"/>
+              <a:rPr lang="en-US"/>
               <a:t>Click to edit Master title style</a:t>
             </a:r>
-            <a:endParaRPr lang="en-US"/>
           </a:p>
         </p:txBody>
       </p:sp>
@@ -2500,7 +2497,7 @@
           <a:p>
             <a:pPr lvl="0"/>
             <a:r>
-              <a:rPr lang="en-US" smtClean="0"/>
+              <a:rPr lang="en-US"/>
               <a:t>Click to edit Master text styles</a:t>
             </a:r>
           </a:p>
@@ -2523,7 +2520,7 @@
           <a:p>
             <a:fld id="{5BCAD085-E8A6-8845-BD4E-CB4CCA059FC4}" type="datetimeFigureOut">
               <a:rPr lang="en-US" smtClean="0"/>
-              <a:t>1/27/13</a:t>
+              <a:t>07-Aug-26</a:t>
             </a:fld>
             <a:endParaRPr lang="en-US"/>
           </a:p>
@@ -2632,10 +2629,9 @@
           <a:lstStyle/>
           <a:p>
             <a:r>
-              <a:rPr lang="en-US" smtClean="0"/>
+              <a:rPr lang="en-US"/>
               <a:t>Click to edit Master title style</a:t>
             </a:r>
-            <a:endParaRPr lang="en-US"/>
           </a:p>
         </p:txBody>
       </p:sp>
@@ -2666,38 +2662,37 @@
           <a:p>
             <a:pPr lvl="0"/>
             <a:r>
-              <a:rPr lang="en-US" smtClean="0"/>
+              <a:rPr lang="en-US"/>
               <a:t>Click to edit Master text styles</a:t>
             </a:r>
           </a:p>
           <a:p>
             <a:pPr lvl="1"/>
             <a:r>
-              <a:rPr lang="en-US" smtClean="0"/>
+              <a:rPr lang="en-US"/>
               <a:t>Second level</a:t>
             </a:r>
           </a:p>
           <a:p>
             <a:pPr lvl="2"/>
             <a:r>
-              <a:rPr lang="en-US" smtClean="0"/>
+              <a:rPr lang="en-US"/>
               <a:t>Third level</a:t>
             </a:r>
           </a:p>
           <a:p>
             <a:pPr lvl="3"/>
             <a:r>
-              <a:rPr lang="en-US" smtClean="0"/>
+              <a:rPr lang="en-US"/>
               <a:t>Fourth level</a:t>
             </a:r>
           </a:p>
           <a:p>
             <a:pPr lvl="4"/>
             <a:r>
-              <a:rPr lang="en-US" smtClean="0"/>
+              <a:rPr lang="en-US"/>
               <a:t>Fifth level</a:t>
             </a:r>
-            <a:endParaRPr lang="en-US"/>
           </a:p>
         </p:txBody>
       </p:sp>
@@ -2736,7 +2731,7 @@
           <a:p>
             <a:fld id="{5BCAD085-E8A6-8845-BD4E-CB4CCA059FC4}" type="datetimeFigureOut">
               <a:rPr lang="en-US" smtClean="0"/>
-              <a:t>1/27/13</a:t>
+              <a:t>07-Aug-26</a:t>
             </a:fld>
             <a:endParaRPr lang="en-US"/>
           </a:p>
@@ -3095,7 +3090,7 @@
 </file>
 
 <file path=ppt/slides/slide1.xml><?xml version="1.0" encoding="utf-8"?>
-<p:sld xmlns:a="http://schemas.openxmlformats.org/drawingml/2006/main" xmlns:p="http://schemas.openxmlformats.org/presentationml/2006/main" xmlns:r="http://schemas.openxmlformats.org/officeDocument/2006/relationships">
+<p:sld xmlns:a="http://schemas.openxmlformats.org/drawingml/2006/main" xmlns:r="http://schemas.openxmlformats.org/officeDocument/2006/relationships" xmlns:p="http://schemas.openxmlformats.org/presentationml/2006/main">
   <p:cSld>
     <p:spTree>
       <p:nvGrpSpPr>
@@ -3103,7 +3098,14 @@
         <p:cNvGrpSpPr/>
         <p:nvPr/>
       </p:nvGrpSpPr>
-      <p:grpSpPr/>
+      <p:grpSpPr>
+        <a:xfrm>
+          <a:off x="0" y="0"/>
+          <a:ext cx="0" cy="0"/>
+          <a:chOff x="0" y="0"/>
+          <a:chExt cx="0" cy="0"/>
+        </a:xfrm>
+      </p:grpSpPr>
       <p:sp>
         <p:nvSpPr>
           <p:cNvPr id="2" name="Rectangle 1"/>
@@ -3144,6 +3146,7 @@
           <a:lstStyle/>
           <a:p>
             <a:pPr algn="ctr"/>
+            <a:endParaRPr/>
           </a:p>
         </p:txBody>
       </p:sp>
@@ -3187,49 +3190,7 @@
           <a:lstStyle/>
           <a:p>
             <a:pPr algn="ctr"/>
-          </a:p>
-        </p:txBody>
-      </p:sp>
-      <p:sp>
-        <p:nvSpPr>
-          <p:cNvPr id="4" name="Rectangle 3"/>
-          <p:cNvSpPr/>
-          <p:nvPr/>
-        </p:nvSpPr>
-        <p:spPr>
-          <a:xfrm>
-            <a:off x="7498079" y="822960"/>
-            <a:ext cx="4389120" cy="5303520"/>
-          </a:xfrm>
-          <a:prstGeom prst="rect">
-            <a:avLst/>
-          </a:prstGeom>
-          <a:solidFill>
-            <a:srgbClr val="141B45"/>
-          </a:solidFill>
-          <a:ln>
-            <a:noFill/>
-          </a:ln>
-        </p:spPr>
-        <p:style>
-          <a:lnRef idx="1">
-            <a:schemeClr val="accent1"/>
-          </a:lnRef>
-          <a:fillRef idx="3">
-            <a:schemeClr val="accent1"/>
-          </a:fillRef>
-          <a:effectRef idx="2">
-            <a:schemeClr val="accent1"/>
-          </a:effectRef>
-          <a:fontRef idx="minor">
-            <a:schemeClr val="lt1"/>
-          </a:fontRef>
-        </p:style>
-        <p:txBody>
-          <a:bodyPr rtlCol="0" anchor="ctr"/>
-          <a:lstStyle/>
-          <a:p>
-            <a:pPr algn="ctr"/>
+            <a:endParaRPr/>
           </a:p>
         </p:txBody>
       </p:sp>
@@ -3467,159 +3428,6 @@
                 <a:latin typeface="Arial"/>
               </a:rPr>
               <a:t>Shubhashish Biswas — 21f1001460</a:t>
-            </a:r>
-          </a:p>
-        </p:txBody>
-      </p:sp>
-      <p:sp>
-        <p:nvSpPr>
-          <p:cNvPr id="10" name="TextBox 9"/>
-          <p:cNvSpPr txBox="1"/>
-          <p:nvPr/>
-        </p:nvSpPr>
-        <p:spPr>
-          <a:xfrm>
-            <a:off x="7680960" y="1005840"/>
-            <a:ext cx="3657600" cy="365760"/>
-          </a:xfrm>
-          <a:prstGeom prst="rect">
-            <a:avLst/>
-          </a:prstGeom>
-          <a:noFill/>
-          <a:ln>
-            <a:noFill/>
-          </a:ln>
-        </p:spPr>
-        <p:txBody>
-          <a:bodyPr wrap="square">
-            <a:spAutoFit/>
-          </a:bodyPr>
-          <a:lstStyle/>
-          <a:p>
-            <a:pPr algn="l"/>
-            <a:r>
-              <a:rPr sz="1100" b="1" i="0">
-                <a:solidFill>
-                  <a:srgbClr val="C9A227"/>
-                </a:solidFill>
-                <a:latin typeface="Arial"/>
-              </a:rPr>
-              <a:t>Key Result</a:t>
-            </a:r>
-          </a:p>
-        </p:txBody>
-      </p:sp>
-      <p:sp>
-        <p:nvSpPr>
-          <p:cNvPr id="11" name="TextBox 10"/>
-          <p:cNvSpPr txBox="1"/>
-          <p:nvPr/>
-        </p:nvSpPr>
-        <p:spPr>
-          <a:xfrm>
-            <a:off x="7680960" y="1371600"/>
-            <a:ext cx="4023360" cy="1280160"/>
-          </a:xfrm>
-          <a:prstGeom prst="rect">
-            <a:avLst/>
-          </a:prstGeom>
-          <a:noFill/>
-          <a:ln>
-            <a:noFill/>
-          </a:ln>
-        </p:spPr>
-        <p:txBody>
-          <a:bodyPr wrap="square">
-            <a:spAutoFit/>
-          </a:bodyPr>
-          <a:lstStyle/>
-          <a:p>
-            <a:pPr algn="l"/>
-            <a:r>
-              <a:rPr sz="7200" b="1" i="0">
-                <a:solidFill>
-                  <a:srgbClr val="FFFFFF"/>
-                </a:solidFill>
-                <a:latin typeface="Arial"/>
-              </a:rPr>
-              <a:t>88%</a:t>
-            </a:r>
-          </a:p>
-        </p:txBody>
-      </p:sp>
-      <p:sp>
-        <p:nvSpPr>
-          <p:cNvPr id="12" name="TextBox 11"/>
-          <p:cNvSpPr txBox="1"/>
-          <p:nvPr/>
-        </p:nvSpPr>
-        <p:spPr>
-          <a:xfrm>
-            <a:off x="7680960" y="2697480"/>
-            <a:ext cx="3840480" cy="548640"/>
-          </a:xfrm>
-          <a:prstGeom prst="rect">
-            <a:avLst/>
-          </a:prstGeom>
-          <a:noFill/>
-          <a:ln>
-            <a:noFill/>
-          </a:ln>
-        </p:spPr>
-        <p:txBody>
-          <a:bodyPr wrap="square">
-            <a:spAutoFit/>
-          </a:bodyPr>
-          <a:lstStyle/>
-          <a:p>
-            <a:pPr algn="l"/>
-            <a:r>
-              <a:rPr sz="1200" b="0" i="0">
-                <a:solidFill>
-                  <a:srgbClr val="CADCFC"/>
-                </a:solidFill>
-                <a:latin typeface="Arial"/>
-              </a:rPr>
-              <a:t>Recall@7 with metadata-only
-retrieval + reranking</a:t>
-            </a:r>
-          </a:p>
-        </p:txBody>
-      </p:sp>
-      <p:sp>
-        <p:nvSpPr>
-          <p:cNvPr id="13" name="TextBox 12"/>
-          <p:cNvSpPr txBox="1"/>
-          <p:nvPr/>
-        </p:nvSpPr>
-        <p:spPr>
-          <a:xfrm>
-            <a:off x="7680960" y="3383280"/>
-            <a:ext cx="3840480" cy="411480"/>
-          </a:xfrm>
-          <a:prstGeom prst="rect">
-            <a:avLst/>
-          </a:prstGeom>
-          <a:noFill/>
-          <a:ln>
-            <a:noFill/>
-          </a:ln>
-        </p:spPr>
-        <p:txBody>
-          <a:bodyPr wrap="square">
-            <a:spAutoFit/>
-          </a:bodyPr>
-          <a:lstStyle/>
-          <a:p>
-            <a:pPr algn="l"/>
-            <a:r>
-              <a:rPr sz="1300" b="1" i="0">
-                <a:solidFill>
-                  <a:srgbClr val="FFFFFF"/>
-                </a:solidFill>
-                <a:latin typeface="Arial"/>
-              </a:rPr>
-              <a:t>3.173 s average latency</a:t>
             </a:r>
           </a:p>
         </p:txBody>
@@ -3633,7 +3441,7 @@
 </file>
 
 <file path=ppt/slides/slide10.xml><?xml version="1.0" encoding="utf-8"?>
-<p:sld xmlns:a="http://schemas.openxmlformats.org/drawingml/2006/main" xmlns:p="http://schemas.openxmlformats.org/presentationml/2006/main" xmlns:r="http://schemas.openxmlformats.org/officeDocument/2006/relationships">
+<p:sld xmlns:a="http://schemas.openxmlformats.org/drawingml/2006/main" xmlns:r="http://schemas.openxmlformats.org/officeDocument/2006/relationships" xmlns:p="http://schemas.openxmlformats.org/presentationml/2006/main">
   <p:cSld>
     <p:spTree>
       <p:nvGrpSpPr>
@@ -3641,7 +3449,14 @@
         <p:cNvGrpSpPr/>
         <p:nvPr/>
       </p:nvGrpSpPr>
-      <p:grpSpPr/>
+      <p:grpSpPr>
+        <a:xfrm>
+          <a:off x="0" y="0"/>
+          <a:ext cx="0" cy="0"/>
+          <a:chOff x="0" y="0"/>
+          <a:chExt cx="0" cy="0"/>
+        </a:xfrm>
+      </p:grpSpPr>
       <p:sp>
         <p:nvSpPr>
           <p:cNvPr id="2" name="Rectangle 1"/>
@@ -3682,6 +3497,7 @@
           <a:lstStyle/>
           <a:p>
             <a:pPr algn="ctr"/>
+            <a:endParaRPr/>
           </a:p>
         </p:txBody>
       </p:sp>
@@ -3725,6 +3541,7 @@
           <a:lstStyle/>
           <a:p>
             <a:pPr algn="ctr"/>
+            <a:endParaRPr/>
           </a:p>
         </p:txBody>
       </p:sp>
@@ -3768,6 +3585,7 @@
           <a:lstStyle/>
           <a:p>
             <a:pPr algn="ctr"/>
+            <a:endParaRPr/>
           </a:p>
         </p:txBody>
       </p:sp>
@@ -3987,6 +3805,7 @@
           <a:lstStyle/>
           <a:p>
             <a:pPr algn="ctr"/>
+            <a:endParaRPr/>
           </a:p>
         </p:txBody>
       </p:sp>
@@ -4106,6 +3925,7 @@
           <a:lstStyle/>
           <a:p>
             <a:pPr algn="ctr"/>
+            <a:endParaRPr/>
           </a:p>
         </p:txBody>
       </p:sp>
@@ -4149,6 +3969,7 @@
           <a:lstStyle/>
           <a:p>
             <a:pPr algn="ctr"/>
+            <a:endParaRPr/>
           </a:p>
         </p:txBody>
       </p:sp>
@@ -4268,6 +4089,7 @@
           <a:lstStyle/>
           <a:p>
             <a:pPr algn="ctr"/>
+            <a:endParaRPr/>
           </a:p>
         </p:txBody>
       </p:sp>
@@ -4311,6 +4133,7 @@
           <a:lstStyle/>
           <a:p>
             <a:pPr algn="ctr"/>
+            <a:endParaRPr/>
           </a:p>
         </p:txBody>
       </p:sp>
@@ -4399,7 +4222,7 @@
 </file>
 
 <file path=ppt/slides/slide11.xml><?xml version="1.0" encoding="utf-8"?>
-<p:sld xmlns:a="http://schemas.openxmlformats.org/drawingml/2006/main" xmlns:p="http://schemas.openxmlformats.org/presentationml/2006/main" xmlns:r="http://schemas.openxmlformats.org/officeDocument/2006/relationships">
+<p:sld xmlns:a="http://schemas.openxmlformats.org/drawingml/2006/main" xmlns:r="http://schemas.openxmlformats.org/officeDocument/2006/relationships" xmlns:p="http://schemas.openxmlformats.org/presentationml/2006/main">
   <p:cSld>
     <p:spTree>
       <p:nvGrpSpPr>
@@ -4407,7 +4230,14 @@
         <p:cNvGrpSpPr/>
         <p:nvPr/>
       </p:nvGrpSpPr>
-      <p:grpSpPr/>
+      <p:grpSpPr>
+        <a:xfrm>
+          <a:off x="0" y="0"/>
+          <a:ext cx="0" cy="0"/>
+          <a:chOff x="0" y="0"/>
+          <a:chExt cx="0" cy="0"/>
+        </a:xfrm>
+      </p:grpSpPr>
       <p:sp>
         <p:nvSpPr>
           <p:cNvPr id="2" name="Rectangle 1"/>
@@ -4448,6 +4278,7 @@
           <a:lstStyle/>
           <a:p>
             <a:pPr algn="ctr"/>
+            <a:endParaRPr/>
           </a:p>
         </p:txBody>
       </p:sp>
@@ -4491,6 +4322,7 @@
           <a:lstStyle/>
           <a:p>
             <a:pPr algn="ctr"/>
+            <a:endParaRPr/>
           </a:p>
         </p:txBody>
       </p:sp>
@@ -4534,6 +4366,7 @@
           <a:lstStyle/>
           <a:p>
             <a:pPr algn="ctr"/>
+            <a:endParaRPr/>
           </a:p>
         </p:txBody>
       </p:sp>
@@ -4753,6 +4586,7 @@
           <a:lstStyle/>
           <a:p>
             <a:pPr algn="ctr"/>
+            <a:endParaRPr/>
           </a:p>
         </p:txBody>
       </p:sp>
@@ -4872,6 +4706,7 @@
           <a:lstStyle/>
           <a:p>
             <a:pPr algn="ctr"/>
+            <a:endParaRPr/>
           </a:p>
         </p:txBody>
       </p:sp>
@@ -4991,6 +4826,7 @@
           <a:lstStyle/>
           <a:p>
             <a:pPr algn="ctr"/>
+            <a:endParaRPr/>
           </a:p>
         </p:txBody>
       </p:sp>
@@ -5034,6 +4870,7 @@
           <a:lstStyle/>
           <a:p>
             <a:pPr algn="ctr"/>
+            <a:endParaRPr/>
           </a:p>
         </p:txBody>
       </p:sp>
@@ -5122,7 +4959,7 @@
 </file>
 
 <file path=ppt/slides/slide12.xml><?xml version="1.0" encoding="utf-8"?>
-<p:sld xmlns:a="http://schemas.openxmlformats.org/drawingml/2006/main" xmlns:p="http://schemas.openxmlformats.org/presentationml/2006/main" xmlns:r="http://schemas.openxmlformats.org/officeDocument/2006/relationships">
+<p:sld xmlns:a="http://schemas.openxmlformats.org/drawingml/2006/main" xmlns:r="http://schemas.openxmlformats.org/officeDocument/2006/relationships" xmlns:p="http://schemas.openxmlformats.org/presentationml/2006/main">
   <p:cSld>
     <p:spTree>
       <p:nvGrpSpPr>
@@ -5130,7 +4967,14 @@
         <p:cNvGrpSpPr/>
         <p:nvPr/>
       </p:nvGrpSpPr>
-      <p:grpSpPr/>
+      <p:grpSpPr>
+        <a:xfrm>
+          <a:off x="0" y="0"/>
+          <a:ext cx="0" cy="0"/>
+          <a:chOff x="0" y="0"/>
+          <a:chExt cx="0" cy="0"/>
+        </a:xfrm>
+      </p:grpSpPr>
       <p:sp>
         <p:nvSpPr>
           <p:cNvPr id="2" name="Rectangle 1"/>
@@ -5171,6 +5015,7 @@
           <a:lstStyle/>
           <a:p>
             <a:pPr algn="ctr"/>
+            <a:endParaRPr/>
           </a:p>
         </p:txBody>
       </p:sp>
@@ -5214,6 +5059,7 @@
           <a:lstStyle/>
           <a:p>
             <a:pPr algn="ctr"/>
+            <a:endParaRPr/>
           </a:p>
         </p:txBody>
       </p:sp>
@@ -5257,6 +5103,7 @@
           <a:lstStyle/>
           <a:p>
             <a:pPr algn="ctr"/>
+            <a:endParaRPr/>
           </a:p>
         </p:txBody>
       </p:sp>
@@ -5431,13 +5278,25 @@
                 <a:tableStyleId>{5C22544A-7EE6-4342-B048-85BDC9FD1C3A}</a:tableStyleId>
               </a:tblPr>
               <a:tblGrid>
-                <a:gridCol w="2743200"/>
-                <a:gridCol w="3474720"/>
+                <a:gridCol w="2743200">
+                  <a:extLst>
+                    <a:ext uri="{9D8B030D-6E8A-4147-A177-3AD203B41FA5}">
+                      <a16:colId xmlns:a16="http://schemas.microsoft.com/office/drawing/2014/main" val="20000"/>
+                    </a:ext>
+                  </a:extLst>
+                </a:gridCol>
+                <a:gridCol w="3474720">
+                  <a:extLst>
+                    <a:ext uri="{9D8B030D-6E8A-4147-A177-3AD203B41FA5}">
+                      <a16:colId xmlns:a16="http://schemas.microsoft.com/office/drawing/2014/main" val="20001"/>
+                    </a:ext>
+                  </a:extLst>
+                </a:gridCol>
               </a:tblGrid>
               <a:tr h="365760">
                 <a:tc>
                   <a:txBody>
-                    <a:bodyPr wrap="square"/>
+                    <a:bodyPr/>
                     <a:lstStyle/>
                     <a:p>
                       <a:pPr algn="l"/>
@@ -5456,23 +5315,11 @@
                     <a:solidFill>
                       <a:srgbClr val="141B45"/>
                     </a:solidFill>
-                    <a:lnL w="0" cap="flat" cmpd="sng">
-                      <a:noFill/>
-                    </a:lnL>
-                    <a:lnR w="0" cap="flat" cmpd="sng">
-                      <a:noFill/>
-                    </a:lnR>
-                    <a:lnT w="0" cap="flat" cmpd="sng">
-                      <a:noFill/>
-                    </a:lnT>
-                    <a:lnB w="0" cap="flat" cmpd="sng">
-                      <a:noFill/>
-                    </a:lnB>
                   </a:tcPr>
                 </a:tc>
                 <a:tc>
                   <a:txBody>
-                    <a:bodyPr wrap="square"/>
+                    <a:bodyPr/>
                     <a:lstStyle/>
                     <a:p>
                       <a:pPr algn="l"/>
@@ -5491,25 +5338,18 @@
                     <a:solidFill>
                       <a:srgbClr val="141B45"/>
                     </a:solidFill>
-                    <a:lnL w="0" cap="flat" cmpd="sng">
-                      <a:noFill/>
-                    </a:lnL>
-                    <a:lnR w="0" cap="flat" cmpd="sng">
-                      <a:noFill/>
-                    </a:lnR>
-                    <a:lnT w="0" cap="flat" cmpd="sng">
-                      <a:noFill/>
-                    </a:lnT>
-                    <a:lnB w="0" cap="flat" cmpd="sng">
-                      <a:noFill/>
-                    </a:lnB>
                   </a:tcPr>
                 </a:tc>
+                <a:extLst>
+                  <a:ext uri="{0D108BD9-81ED-4DB2-BD59-A6C34878D82A}">
+                    <a16:rowId xmlns:a16="http://schemas.microsoft.com/office/drawing/2014/main" val="10000"/>
+                  </a:ext>
+                </a:extLst>
               </a:tr>
               <a:tr h="365760">
                 <a:tc>
                   <a:txBody>
-                    <a:bodyPr wrap="square"/>
+                    <a:bodyPr/>
                     <a:lstStyle/>
                     <a:p>
                       <a:pPr algn="l"/>
@@ -5528,23 +5368,11 @@
                     <a:solidFill>
                       <a:srgbClr val="FFFFFF"/>
                     </a:solidFill>
-                    <a:lnL w="0" cap="flat" cmpd="sng">
-                      <a:noFill/>
-                    </a:lnL>
-                    <a:lnR w="0" cap="flat" cmpd="sng">
-                      <a:noFill/>
-                    </a:lnR>
-                    <a:lnT w="0" cap="flat" cmpd="sng">
-                      <a:noFill/>
-                    </a:lnT>
-                    <a:lnB w="0" cap="flat" cmpd="sng">
-                      <a:noFill/>
-                    </a:lnB>
                   </a:tcPr>
                 </a:tc>
                 <a:tc>
                   <a:txBody>
-                    <a:bodyPr wrap="square"/>
+                    <a:bodyPr/>
                     <a:lstStyle/>
                     <a:p>
                       <a:pPr algn="l"/>
@@ -5563,25 +5391,18 @@
                     <a:solidFill>
                       <a:srgbClr val="FFFFFF"/>
                     </a:solidFill>
-                    <a:lnL w="0" cap="flat" cmpd="sng">
-                      <a:noFill/>
-                    </a:lnL>
-                    <a:lnR w="0" cap="flat" cmpd="sng">
-                      <a:noFill/>
-                    </a:lnR>
-                    <a:lnT w="0" cap="flat" cmpd="sng">
-                      <a:noFill/>
-                    </a:lnT>
-                    <a:lnB w="0" cap="flat" cmpd="sng">
-                      <a:noFill/>
-                    </a:lnB>
                   </a:tcPr>
                 </a:tc>
+                <a:extLst>
+                  <a:ext uri="{0D108BD9-81ED-4DB2-BD59-A6C34878D82A}">
+                    <a16:rowId xmlns:a16="http://schemas.microsoft.com/office/drawing/2014/main" val="10001"/>
+                  </a:ext>
+                </a:extLst>
               </a:tr>
               <a:tr h="365760">
                 <a:tc>
                   <a:txBody>
-                    <a:bodyPr wrap="square"/>
+                    <a:bodyPr/>
                     <a:lstStyle/>
                     <a:p>
                       <a:pPr algn="l"/>
@@ -5600,23 +5421,11 @@
                     <a:solidFill>
                       <a:srgbClr val="E8EDF9"/>
                     </a:solidFill>
-                    <a:lnL w="0" cap="flat" cmpd="sng">
-                      <a:noFill/>
-                    </a:lnL>
-                    <a:lnR w="0" cap="flat" cmpd="sng">
-                      <a:noFill/>
-                    </a:lnR>
-                    <a:lnT w="0" cap="flat" cmpd="sng">
-                      <a:noFill/>
-                    </a:lnT>
-                    <a:lnB w="0" cap="flat" cmpd="sng">
-                      <a:noFill/>
-                    </a:lnB>
                   </a:tcPr>
                 </a:tc>
                 <a:tc>
                   <a:txBody>
-                    <a:bodyPr wrap="square"/>
+                    <a:bodyPr/>
                     <a:lstStyle/>
                     <a:p>
                       <a:pPr algn="l"/>
@@ -5635,25 +5444,18 @@
                     <a:solidFill>
                       <a:srgbClr val="E8EDF9"/>
                     </a:solidFill>
-                    <a:lnL w="0" cap="flat" cmpd="sng">
-                      <a:noFill/>
-                    </a:lnL>
-                    <a:lnR w="0" cap="flat" cmpd="sng">
-                      <a:noFill/>
-                    </a:lnR>
-                    <a:lnT w="0" cap="flat" cmpd="sng">
-                      <a:noFill/>
-                    </a:lnT>
-                    <a:lnB w="0" cap="flat" cmpd="sng">
-                      <a:noFill/>
-                    </a:lnB>
                   </a:tcPr>
                 </a:tc>
+                <a:extLst>
+                  <a:ext uri="{0D108BD9-81ED-4DB2-BD59-A6C34878D82A}">
+                    <a16:rowId xmlns:a16="http://schemas.microsoft.com/office/drawing/2014/main" val="10002"/>
+                  </a:ext>
+                </a:extLst>
               </a:tr>
               <a:tr h="365760">
                 <a:tc>
                   <a:txBody>
-                    <a:bodyPr wrap="square"/>
+                    <a:bodyPr/>
                     <a:lstStyle/>
                     <a:p>
                       <a:pPr algn="l"/>
@@ -5672,23 +5474,11 @@
                     <a:solidFill>
                       <a:srgbClr val="FFFFFF"/>
                     </a:solidFill>
-                    <a:lnL w="0" cap="flat" cmpd="sng">
-                      <a:noFill/>
-                    </a:lnL>
-                    <a:lnR w="0" cap="flat" cmpd="sng">
-                      <a:noFill/>
-                    </a:lnR>
-                    <a:lnT w="0" cap="flat" cmpd="sng">
-                      <a:noFill/>
-                    </a:lnT>
-                    <a:lnB w="0" cap="flat" cmpd="sng">
-                      <a:noFill/>
-                    </a:lnB>
                   </a:tcPr>
                 </a:tc>
                 <a:tc>
                   <a:txBody>
-                    <a:bodyPr wrap="square"/>
+                    <a:bodyPr/>
                     <a:lstStyle/>
                     <a:p>
                       <a:pPr algn="l"/>
@@ -5707,25 +5497,18 @@
                     <a:solidFill>
                       <a:srgbClr val="FFFFFF"/>
                     </a:solidFill>
-                    <a:lnL w="0" cap="flat" cmpd="sng">
-                      <a:noFill/>
-                    </a:lnL>
-                    <a:lnR w="0" cap="flat" cmpd="sng">
-                      <a:noFill/>
-                    </a:lnR>
-                    <a:lnT w="0" cap="flat" cmpd="sng">
-                      <a:noFill/>
-                    </a:lnT>
-                    <a:lnB w="0" cap="flat" cmpd="sng">
-                      <a:noFill/>
-                    </a:lnB>
                   </a:tcPr>
                 </a:tc>
+                <a:extLst>
+                  <a:ext uri="{0D108BD9-81ED-4DB2-BD59-A6C34878D82A}">
+                    <a16:rowId xmlns:a16="http://schemas.microsoft.com/office/drawing/2014/main" val="10003"/>
+                  </a:ext>
+                </a:extLst>
               </a:tr>
               <a:tr h="365760">
                 <a:tc>
                   <a:txBody>
-                    <a:bodyPr wrap="square"/>
+                    <a:bodyPr/>
                     <a:lstStyle/>
                     <a:p>
                       <a:pPr algn="l"/>
@@ -5744,23 +5527,11 @@
                     <a:solidFill>
                       <a:srgbClr val="E8EDF9"/>
                     </a:solidFill>
-                    <a:lnL w="0" cap="flat" cmpd="sng">
-                      <a:noFill/>
-                    </a:lnL>
-                    <a:lnR w="0" cap="flat" cmpd="sng">
-                      <a:noFill/>
-                    </a:lnR>
-                    <a:lnT w="0" cap="flat" cmpd="sng">
-                      <a:noFill/>
-                    </a:lnT>
-                    <a:lnB w="0" cap="flat" cmpd="sng">
-                      <a:noFill/>
-                    </a:lnB>
                   </a:tcPr>
                 </a:tc>
                 <a:tc>
                   <a:txBody>
-                    <a:bodyPr wrap="square"/>
+                    <a:bodyPr/>
                     <a:lstStyle/>
                     <a:p>
                       <a:pPr algn="l"/>
@@ -5779,25 +5550,18 @@
                     <a:solidFill>
                       <a:srgbClr val="E8EDF9"/>
                     </a:solidFill>
-                    <a:lnL w="0" cap="flat" cmpd="sng">
-                      <a:noFill/>
-                    </a:lnL>
-                    <a:lnR w="0" cap="flat" cmpd="sng">
-                      <a:noFill/>
-                    </a:lnR>
-                    <a:lnT w="0" cap="flat" cmpd="sng">
-                      <a:noFill/>
-                    </a:lnT>
-                    <a:lnB w="0" cap="flat" cmpd="sng">
-                      <a:noFill/>
-                    </a:lnB>
                   </a:tcPr>
                 </a:tc>
+                <a:extLst>
+                  <a:ext uri="{0D108BD9-81ED-4DB2-BD59-A6C34878D82A}">
+                    <a16:rowId xmlns:a16="http://schemas.microsoft.com/office/drawing/2014/main" val="10004"/>
+                  </a:ext>
+                </a:extLst>
               </a:tr>
               <a:tr h="365760">
                 <a:tc>
                   <a:txBody>
-                    <a:bodyPr wrap="square"/>
+                    <a:bodyPr/>
                     <a:lstStyle/>
                     <a:p>
                       <a:pPr algn="l"/>
@@ -5816,23 +5580,11 @@
                     <a:solidFill>
                       <a:srgbClr val="FFFFFF"/>
                     </a:solidFill>
-                    <a:lnL w="0" cap="flat" cmpd="sng">
-                      <a:noFill/>
-                    </a:lnL>
-                    <a:lnR w="0" cap="flat" cmpd="sng">
-                      <a:noFill/>
-                    </a:lnR>
-                    <a:lnT w="0" cap="flat" cmpd="sng">
-                      <a:noFill/>
-                    </a:lnT>
-                    <a:lnB w="0" cap="flat" cmpd="sng">
-                      <a:noFill/>
-                    </a:lnB>
                   </a:tcPr>
                 </a:tc>
                 <a:tc>
                   <a:txBody>
-                    <a:bodyPr wrap="square"/>
+                    <a:bodyPr/>
                     <a:lstStyle/>
                     <a:p>
                       <a:pPr algn="l"/>
@@ -5851,25 +5603,18 @@
                     <a:solidFill>
                       <a:srgbClr val="FFFFFF"/>
                     </a:solidFill>
-                    <a:lnL w="0" cap="flat" cmpd="sng">
-                      <a:noFill/>
-                    </a:lnL>
-                    <a:lnR w="0" cap="flat" cmpd="sng">
-                      <a:noFill/>
-                    </a:lnR>
-                    <a:lnT w="0" cap="flat" cmpd="sng">
-                      <a:noFill/>
-                    </a:lnT>
-                    <a:lnB w="0" cap="flat" cmpd="sng">
-                      <a:noFill/>
-                    </a:lnB>
                   </a:tcPr>
                 </a:tc>
+                <a:extLst>
+                  <a:ext uri="{0D108BD9-81ED-4DB2-BD59-A6C34878D82A}">
+                    <a16:rowId xmlns:a16="http://schemas.microsoft.com/office/drawing/2014/main" val="10005"/>
+                  </a:ext>
+                </a:extLst>
               </a:tr>
               <a:tr h="365760">
                 <a:tc>
                   <a:txBody>
-                    <a:bodyPr wrap="square"/>
+                    <a:bodyPr/>
                     <a:lstStyle/>
                     <a:p>
                       <a:pPr algn="l"/>
@@ -5888,23 +5633,11 @@
                     <a:solidFill>
                       <a:srgbClr val="E8EDF9"/>
                     </a:solidFill>
-                    <a:lnL w="0" cap="flat" cmpd="sng">
-                      <a:noFill/>
-                    </a:lnL>
-                    <a:lnR w="0" cap="flat" cmpd="sng">
-                      <a:noFill/>
-                    </a:lnR>
-                    <a:lnT w="0" cap="flat" cmpd="sng">
-                      <a:noFill/>
-                    </a:lnT>
-                    <a:lnB w="0" cap="flat" cmpd="sng">
-                      <a:noFill/>
-                    </a:lnB>
                   </a:tcPr>
                 </a:tc>
                 <a:tc>
                   <a:txBody>
-                    <a:bodyPr wrap="square"/>
+                    <a:bodyPr/>
                     <a:lstStyle/>
                     <a:p>
                       <a:pPr algn="l"/>
@@ -5923,20 +5656,13 @@
                     <a:solidFill>
                       <a:srgbClr val="E8EDF9"/>
                     </a:solidFill>
-                    <a:lnL w="0" cap="flat" cmpd="sng">
-                      <a:noFill/>
-                    </a:lnL>
-                    <a:lnR w="0" cap="flat" cmpd="sng">
-                      <a:noFill/>
-                    </a:lnR>
-                    <a:lnT w="0" cap="flat" cmpd="sng">
-                      <a:noFill/>
-                    </a:lnT>
-                    <a:lnB w="0" cap="flat" cmpd="sng">
-                      <a:noFill/>
-                    </a:lnB>
                   </a:tcPr>
                 </a:tc>
+                <a:extLst>
+                  <a:ext uri="{0D108BD9-81ED-4DB2-BD59-A6C34878D82A}">
+                    <a16:rowId xmlns:a16="http://schemas.microsoft.com/office/drawing/2014/main" val="10006"/>
+                  </a:ext>
+                </a:extLst>
               </a:tr>
             </a:tbl>
           </a:graphicData>
@@ -5982,6 +5708,7 @@
           <a:lstStyle/>
           <a:p>
             <a:pPr algn="ctr"/>
+            <a:endParaRPr/>
           </a:p>
         </p:txBody>
       </p:sp>
@@ -6025,6 +5752,7 @@
           <a:lstStyle/>
           <a:p>
             <a:pPr algn="ctr"/>
+            <a:endParaRPr/>
           </a:p>
         </p:txBody>
       </p:sp>
@@ -6144,6 +5872,7 @@
           <a:lstStyle/>
           <a:p>
             <a:pPr algn="ctr"/>
+            <a:endParaRPr/>
           </a:p>
         </p:txBody>
       </p:sp>
@@ -6187,6 +5916,7 @@
           <a:lstStyle/>
           <a:p>
             <a:pPr algn="ctr"/>
+            <a:endParaRPr/>
           </a:p>
         </p:txBody>
       </p:sp>
@@ -6306,6 +6036,7 @@
           <a:lstStyle/>
           <a:p>
             <a:pPr algn="ctr"/>
+            <a:endParaRPr/>
           </a:p>
         </p:txBody>
       </p:sp>
@@ -6349,6 +6080,7 @@
           <a:lstStyle/>
           <a:p>
             <a:pPr algn="ctr"/>
+            <a:endParaRPr/>
           </a:p>
         </p:txBody>
       </p:sp>
@@ -6468,6 +6200,7 @@
           <a:lstStyle/>
           <a:p>
             <a:pPr algn="ctr"/>
+            <a:endParaRPr/>
           </a:p>
         </p:txBody>
       </p:sp>
@@ -6511,6 +6244,7 @@
           <a:lstStyle/>
           <a:p>
             <a:pPr algn="ctr"/>
+            <a:endParaRPr/>
           </a:p>
         </p:txBody>
       </p:sp>
@@ -6599,7 +6333,7 @@
 </file>
 
 <file path=ppt/slides/slide13.xml><?xml version="1.0" encoding="utf-8"?>
-<p:sld xmlns:a="http://schemas.openxmlformats.org/drawingml/2006/main" xmlns:p="http://schemas.openxmlformats.org/presentationml/2006/main" xmlns:r="http://schemas.openxmlformats.org/officeDocument/2006/relationships">
+<p:sld xmlns:a="http://schemas.openxmlformats.org/drawingml/2006/main" xmlns:r="http://schemas.openxmlformats.org/officeDocument/2006/relationships" xmlns:p="http://schemas.openxmlformats.org/presentationml/2006/main">
   <p:cSld>
     <p:spTree>
       <p:nvGrpSpPr>
@@ -6607,7 +6341,14 @@
         <p:cNvGrpSpPr/>
         <p:nvPr/>
       </p:nvGrpSpPr>
-      <p:grpSpPr/>
+      <p:grpSpPr>
+        <a:xfrm>
+          <a:off x="0" y="0"/>
+          <a:ext cx="0" cy="0"/>
+          <a:chOff x="0" y="0"/>
+          <a:chExt cx="0" cy="0"/>
+        </a:xfrm>
+      </p:grpSpPr>
       <p:sp>
         <p:nvSpPr>
           <p:cNvPr id="2" name="Rectangle 1"/>
@@ -6648,6 +6389,7 @@
           <a:lstStyle/>
           <a:p>
             <a:pPr algn="ctr"/>
+            <a:endParaRPr/>
           </a:p>
         </p:txBody>
       </p:sp>
@@ -6691,6 +6433,7 @@
           <a:lstStyle/>
           <a:p>
             <a:pPr algn="ctr"/>
+            <a:endParaRPr/>
           </a:p>
         </p:txBody>
       </p:sp>
@@ -6734,6 +6477,7 @@
           <a:lstStyle/>
           <a:p>
             <a:pPr algn="ctr"/>
+            <a:endParaRPr/>
           </a:p>
         </p:txBody>
       </p:sp>
@@ -6953,6 +6697,7 @@
           <a:lstStyle/>
           <a:p>
             <a:pPr algn="ctr"/>
+            <a:endParaRPr/>
           </a:p>
         </p:txBody>
       </p:sp>
@@ -6996,6 +6741,7 @@
           <a:lstStyle/>
           <a:p>
             <a:pPr algn="ctr"/>
+            <a:endParaRPr/>
           </a:p>
         </p:txBody>
       </p:sp>
@@ -7115,6 +6861,7 @@
           <a:lstStyle/>
           <a:p>
             <a:pPr algn="ctr"/>
+            <a:endParaRPr/>
           </a:p>
         </p:txBody>
       </p:sp>
@@ -7158,6 +6905,7 @@
           <a:lstStyle/>
           <a:p>
             <a:pPr algn="ctr"/>
+            <a:endParaRPr/>
           </a:p>
         </p:txBody>
       </p:sp>
@@ -7277,6 +7025,7 @@
           <a:lstStyle/>
           <a:p>
             <a:pPr algn="ctr"/>
+            <a:endParaRPr/>
           </a:p>
         </p:txBody>
       </p:sp>
@@ -7320,6 +7069,7 @@
           <a:lstStyle/>
           <a:p>
             <a:pPr algn="ctr"/>
+            <a:endParaRPr/>
           </a:p>
         </p:txBody>
       </p:sp>
@@ -7439,6 +7189,7 @@
           <a:lstStyle/>
           <a:p>
             <a:pPr algn="ctr"/>
+            <a:endParaRPr/>
           </a:p>
         </p:txBody>
       </p:sp>
@@ -7482,6 +7233,7 @@
           <a:lstStyle/>
           <a:p>
             <a:pPr algn="ctr"/>
+            <a:endParaRPr/>
           </a:p>
         </p:txBody>
       </p:sp>
@@ -7570,7 +7322,7 @@
 </file>
 
 <file path=ppt/slides/slide14.xml><?xml version="1.0" encoding="utf-8"?>
-<p:sld xmlns:a="http://schemas.openxmlformats.org/drawingml/2006/main" xmlns:p="http://schemas.openxmlformats.org/presentationml/2006/main" xmlns:r="http://schemas.openxmlformats.org/officeDocument/2006/relationships">
+<p:sld xmlns:a="http://schemas.openxmlformats.org/drawingml/2006/main" xmlns:r="http://schemas.openxmlformats.org/officeDocument/2006/relationships" xmlns:p="http://schemas.openxmlformats.org/presentationml/2006/main">
   <p:cSld>
     <p:spTree>
       <p:nvGrpSpPr>
@@ -7578,7 +7330,14 @@
         <p:cNvGrpSpPr/>
         <p:nvPr/>
       </p:nvGrpSpPr>
-      <p:grpSpPr/>
+      <p:grpSpPr>
+        <a:xfrm>
+          <a:off x="0" y="0"/>
+          <a:ext cx="0" cy="0"/>
+          <a:chOff x="0" y="0"/>
+          <a:chExt cx="0" cy="0"/>
+        </a:xfrm>
+      </p:grpSpPr>
       <p:sp>
         <p:nvSpPr>
           <p:cNvPr id="2" name="Rectangle 1"/>
@@ -7619,6 +7378,7 @@
           <a:lstStyle/>
           <a:p>
             <a:pPr algn="ctr"/>
+            <a:endParaRPr/>
           </a:p>
         </p:txBody>
       </p:sp>
@@ -7662,6 +7422,7 @@
           <a:lstStyle/>
           <a:p>
             <a:pPr algn="ctr"/>
+            <a:endParaRPr/>
           </a:p>
         </p:txBody>
       </p:sp>
@@ -7705,6 +7466,7 @@
           <a:lstStyle/>
           <a:p>
             <a:pPr algn="ctr"/>
+            <a:endParaRPr/>
           </a:p>
         </p:txBody>
       </p:sp>
@@ -7900,6 +7662,7 @@
           <a:lstStyle/>
           <a:p>
             <a:pPr algn="ctr"/>
+            <a:endParaRPr/>
           </a:p>
         </p:txBody>
       </p:sp>
@@ -7943,6 +7706,7 @@
           <a:lstStyle/>
           <a:p>
             <a:pPr algn="ctr"/>
+            <a:endParaRPr/>
           </a:p>
         </p:txBody>
       </p:sp>
@@ -7986,6 +7750,7 @@
           <a:lstStyle/>
           <a:p>
             <a:pPr algn="ctr"/>
+            <a:endParaRPr/>
           </a:p>
         </p:txBody>
       </p:sp>
@@ -8067,6 +7832,7 @@
           <a:lstStyle/>
           <a:p>
             <a:pPr algn="ctr"/>
+            <a:endParaRPr/>
           </a:p>
         </p:txBody>
       </p:sp>
@@ -8188,6 +7954,7 @@
           <a:lstStyle/>
           <a:p>
             <a:pPr algn="ctr"/>
+            <a:endParaRPr/>
           </a:p>
         </p:txBody>
       </p:sp>
@@ -8231,6 +7998,7 @@
           <a:lstStyle/>
           <a:p>
             <a:pPr algn="ctr"/>
+            <a:endParaRPr/>
           </a:p>
         </p:txBody>
       </p:sp>
@@ -8274,6 +8042,7 @@
           <a:lstStyle/>
           <a:p>
             <a:pPr algn="ctr"/>
+            <a:endParaRPr/>
           </a:p>
         </p:txBody>
       </p:sp>
@@ -8355,6 +8124,7 @@
           <a:lstStyle/>
           <a:p>
             <a:pPr algn="ctr"/>
+            <a:endParaRPr/>
           </a:p>
         </p:txBody>
       </p:sp>
@@ -8476,6 +8246,7 @@
           <a:lstStyle/>
           <a:p>
             <a:pPr algn="ctr"/>
+            <a:endParaRPr/>
           </a:p>
         </p:txBody>
       </p:sp>
@@ -8519,6 +8290,7 @@
           <a:lstStyle/>
           <a:p>
             <a:pPr algn="ctr"/>
+            <a:endParaRPr/>
           </a:p>
         </p:txBody>
       </p:sp>
@@ -8562,6 +8334,7 @@
           <a:lstStyle/>
           <a:p>
             <a:pPr algn="ctr"/>
+            <a:endParaRPr/>
           </a:p>
         </p:txBody>
       </p:sp>
@@ -8643,6 +8416,7 @@
           <a:lstStyle/>
           <a:p>
             <a:pPr algn="ctr"/>
+            <a:endParaRPr/>
           </a:p>
         </p:txBody>
       </p:sp>
@@ -8764,6 +8538,7 @@
           <a:lstStyle/>
           <a:p>
             <a:pPr algn="ctr"/>
+            <a:endParaRPr/>
           </a:p>
         </p:txBody>
       </p:sp>
@@ -8807,6 +8582,7 @@
           <a:lstStyle/>
           <a:p>
             <a:pPr algn="ctr"/>
+            <a:endParaRPr/>
           </a:p>
         </p:txBody>
       </p:sp>
@@ -8850,6 +8626,7 @@
           <a:lstStyle/>
           <a:p>
             <a:pPr algn="ctr"/>
+            <a:endParaRPr/>
           </a:p>
         </p:txBody>
       </p:sp>
@@ -8931,6 +8708,7 @@
           <a:lstStyle/>
           <a:p>
             <a:pPr algn="ctr"/>
+            <a:endParaRPr/>
           </a:p>
         </p:txBody>
       </p:sp>
@@ -9021,7 +8799,7 @@
 </file>
 
 <file path=ppt/slides/slide15.xml><?xml version="1.0" encoding="utf-8"?>
-<p:sld xmlns:a="http://schemas.openxmlformats.org/drawingml/2006/main" xmlns:p="http://schemas.openxmlformats.org/presentationml/2006/main" xmlns:r="http://schemas.openxmlformats.org/officeDocument/2006/relationships">
+<p:sld xmlns:a="http://schemas.openxmlformats.org/drawingml/2006/main" xmlns:r="http://schemas.openxmlformats.org/officeDocument/2006/relationships" xmlns:p="http://schemas.openxmlformats.org/presentationml/2006/main">
   <p:cSld>
     <p:spTree>
       <p:nvGrpSpPr>
@@ -9029,7 +8807,14 @@
         <p:cNvGrpSpPr/>
         <p:nvPr/>
       </p:nvGrpSpPr>
-      <p:grpSpPr/>
+      <p:grpSpPr>
+        <a:xfrm>
+          <a:off x="0" y="0"/>
+          <a:ext cx="0" cy="0"/>
+          <a:chOff x="0" y="0"/>
+          <a:chExt cx="0" cy="0"/>
+        </a:xfrm>
+      </p:grpSpPr>
       <p:sp>
         <p:nvSpPr>
           <p:cNvPr id="2" name="Rectangle 1"/>
@@ -9070,6 +8855,7 @@
           <a:lstStyle/>
           <a:p>
             <a:pPr algn="ctr"/>
+            <a:endParaRPr/>
           </a:p>
         </p:txBody>
       </p:sp>
@@ -9113,6 +8899,7 @@
           <a:lstStyle/>
           <a:p>
             <a:pPr algn="ctr"/>
+            <a:endParaRPr/>
           </a:p>
         </p:txBody>
       </p:sp>
@@ -9156,6 +8943,7 @@
           <a:lstStyle/>
           <a:p>
             <a:pPr algn="ctr"/>
+            <a:endParaRPr/>
           </a:p>
         </p:txBody>
       </p:sp>
@@ -9351,6 +9139,7 @@
           <a:lstStyle/>
           <a:p>
             <a:pPr algn="ctr"/>
+            <a:endParaRPr/>
           </a:p>
         </p:txBody>
       </p:sp>
@@ -9394,6 +9183,7 @@
           <a:lstStyle/>
           <a:p>
             <a:pPr algn="ctr"/>
+            <a:endParaRPr/>
           </a:p>
         </p:txBody>
       </p:sp>
@@ -9475,6 +9265,7 @@
           <a:lstStyle/>
           <a:p>
             <a:pPr algn="ctr"/>
+            <a:endParaRPr/>
           </a:p>
         </p:txBody>
       </p:sp>
@@ -9594,6 +9385,7 @@
           <a:lstStyle/>
           <a:p>
             <a:pPr algn="ctr"/>
+            <a:endParaRPr/>
           </a:p>
         </p:txBody>
       </p:sp>
@@ -9637,6 +9429,7 @@
           <a:lstStyle/>
           <a:p>
             <a:pPr algn="ctr"/>
+            <a:endParaRPr/>
           </a:p>
         </p:txBody>
       </p:sp>
@@ -9718,6 +9511,7 @@
           <a:lstStyle/>
           <a:p>
             <a:pPr algn="ctr"/>
+            <a:endParaRPr/>
           </a:p>
         </p:txBody>
       </p:sp>
@@ -9837,6 +9631,7 @@
           <a:lstStyle/>
           <a:p>
             <a:pPr algn="ctr"/>
+            <a:endParaRPr/>
           </a:p>
         </p:txBody>
       </p:sp>
@@ -9880,6 +9675,7 @@
           <a:lstStyle/>
           <a:p>
             <a:pPr algn="ctr"/>
+            <a:endParaRPr/>
           </a:p>
         </p:txBody>
       </p:sp>
@@ -9961,6 +9757,7 @@
           <a:lstStyle/>
           <a:p>
             <a:pPr algn="ctr"/>
+            <a:endParaRPr/>
           </a:p>
         </p:txBody>
       </p:sp>
@@ -10080,6 +9877,7 @@
           <a:lstStyle/>
           <a:p>
             <a:pPr algn="ctr"/>
+            <a:endParaRPr/>
           </a:p>
         </p:txBody>
       </p:sp>
@@ -10123,6 +9921,7 @@
           <a:lstStyle/>
           <a:p>
             <a:pPr algn="ctr"/>
+            <a:endParaRPr/>
           </a:p>
         </p:txBody>
       </p:sp>
@@ -10204,6 +10003,7 @@
           <a:lstStyle/>
           <a:p>
             <a:pPr algn="ctr"/>
+            <a:endParaRPr/>
           </a:p>
         </p:txBody>
       </p:sp>
@@ -10323,6 +10123,7 @@
           <a:lstStyle/>
           <a:p>
             <a:pPr algn="ctr"/>
+            <a:endParaRPr/>
           </a:p>
         </p:txBody>
       </p:sp>
@@ -10366,6 +10167,7 @@
           <a:lstStyle/>
           <a:p>
             <a:pPr algn="ctr"/>
+            <a:endParaRPr/>
           </a:p>
         </p:txBody>
       </p:sp>
@@ -10447,6 +10249,7 @@
           <a:lstStyle/>
           <a:p>
             <a:pPr algn="ctr"/>
+            <a:endParaRPr/>
           </a:p>
         </p:txBody>
       </p:sp>
@@ -10535,7 +10338,7 @@
 </file>
 
 <file path=ppt/slides/slide16.xml><?xml version="1.0" encoding="utf-8"?>
-<p:sld xmlns:a="http://schemas.openxmlformats.org/drawingml/2006/main" xmlns:p="http://schemas.openxmlformats.org/presentationml/2006/main" xmlns:r="http://schemas.openxmlformats.org/officeDocument/2006/relationships">
+<p:sld xmlns:a="http://schemas.openxmlformats.org/drawingml/2006/main" xmlns:r="http://schemas.openxmlformats.org/officeDocument/2006/relationships" xmlns:p="http://schemas.openxmlformats.org/presentationml/2006/main">
   <p:cSld>
     <p:spTree>
       <p:nvGrpSpPr>
@@ -10543,7 +10346,14 @@
         <p:cNvGrpSpPr/>
         <p:nvPr/>
       </p:nvGrpSpPr>
-      <p:grpSpPr/>
+      <p:grpSpPr>
+        <a:xfrm>
+          <a:off x="0" y="0"/>
+          <a:ext cx="0" cy="0"/>
+          <a:chOff x="0" y="0"/>
+          <a:chExt cx="0" cy="0"/>
+        </a:xfrm>
+      </p:grpSpPr>
       <p:sp>
         <p:nvSpPr>
           <p:cNvPr id="2" name="Rectangle 1"/>
@@ -10584,6 +10394,7 @@
           <a:lstStyle/>
           <a:p>
             <a:pPr algn="ctr"/>
+            <a:endParaRPr/>
           </a:p>
         </p:txBody>
       </p:sp>
@@ -10627,6 +10438,7 @@
           <a:lstStyle/>
           <a:p>
             <a:pPr algn="ctr"/>
+            <a:endParaRPr/>
           </a:p>
         </p:txBody>
       </p:sp>
@@ -10670,6 +10482,7 @@
           <a:lstStyle/>
           <a:p>
             <a:pPr algn="ctr"/>
+            <a:endParaRPr/>
           </a:p>
         </p:txBody>
       </p:sp>
@@ -10865,6 +10678,7 @@
           <a:lstStyle/>
           <a:p>
             <a:pPr algn="ctr"/>
+            <a:endParaRPr/>
           </a:p>
         </p:txBody>
       </p:sp>
@@ -10908,6 +10722,7 @@
           <a:lstStyle/>
           <a:p>
             <a:pPr algn="ctr"/>
+            <a:endParaRPr/>
           </a:p>
         </p:txBody>
       </p:sp>
@@ -11027,6 +10842,7 @@
           <a:lstStyle/>
           <a:p>
             <a:pPr algn="ctr"/>
+            <a:endParaRPr/>
           </a:p>
         </p:txBody>
       </p:sp>
@@ -11070,6 +10886,7 @@
           <a:lstStyle/>
           <a:p>
             <a:pPr algn="ctr"/>
+            <a:endParaRPr/>
           </a:p>
         </p:txBody>
       </p:sp>
@@ -11189,6 +11006,7 @@
           <a:lstStyle/>
           <a:p>
             <a:pPr algn="ctr"/>
+            <a:endParaRPr/>
           </a:p>
         </p:txBody>
       </p:sp>
@@ -11232,6 +11050,7 @@
           <a:lstStyle/>
           <a:p>
             <a:pPr algn="ctr"/>
+            <a:endParaRPr/>
           </a:p>
         </p:txBody>
       </p:sp>
@@ -11351,6 +11170,7 @@
           <a:lstStyle/>
           <a:p>
             <a:pPr algn="ctr"/>
+            <a:endParaRPr/>
           </a:p>
         </p:txBody>
       </p:sp>
@@ -11394,6 +11214,7 @@
           <a:lstStyle/>
           <a:p>
             <a:pPr algn="ctr"/>
+            <a:endParaRPr/>
           </a:p>
         </p:txBody>
       </p:sp>
@@ -11513,6 +11334,7 @@
           <a:lstStyle/>
           <a:p>
             <a:pPr algn="ctr"/>
+            <a:endParaRPr/>
           </a:p>
         </p:txBody>
       </p:sp>
@@ -11556,6 +11378,7 @@
           <a:lstStyle/>
           <a:p>
             <a:pPr algn="ctr"/>
+            <a:endParaRPr/>
           </a:p>
         </p:txBody>
       </p:sp>
@@ -11644,7 +11467,7 @@
 </file>
 
 <file path=ppt/slides/slide17.xml><?xml version="1.0" encoding="utf-8"?>
-<p:sld xmlns:a="http://schemas.openxmlformats.org/drawingml/2006/main" xmlns:p="http://schemas.openxmlformats.org/presentationml/2006/main" xmlns:r="http://schemas.openxmlformats.org/officeDocument/2006/relationships">
+<p:sld xmlns:a="http://schemas.openxmlformats.org/drawingml/2006/main" xmlns:r="http://schemas.openxmlformats.org/officeDocument/2006/relationships" xmlns:p="http://schemas.openxmlformats.org/presentationml/2006/main">
   <p:cSld>
     <p:spTree>
       <p:nvGrpSpPr>
@@ -11652,7 +11475,14 @@
         <p:cNvGrpSpPr/>
         <p:nvPr/>
       </p:nvGrpSpPr>
-      <p:grpSpPr/>
+      <p:grpSpPr>
+        <a:xfrm>
+          <a:off x="0" y="0"/>
+          <a:ext cx="0" cy="0"/>
+          <a:chOff x="0" y="0"/>
+          <a:chExt cx="0" cy="0"/>
+        </a:xfrm>
+      </p:grpSpPr>
       <p:sp>
         <p:nvSpPr>
           <p:cNvPr id="2" name="Rectangle 1"/>
@@ -11693,6 +11523,7 @@
           <a:lstStyle/>
           <a:p>
             <a:pPr algn="ctr"/>
+            <a:endParaRPr/>
           </a:p>
         </p:txBody>
       </p:sp>
@@ -11736,6 +11567,7 @@
           <a:lstStyle/>
           <a:p>
             <a:pPr algn="ctr"/>
+            <a:endParaRPr/>
           </a:p>
         </p:txBody>
       </p:sp>
@@ -11779,6 +11611,7 @@
           <a:lstStyle/>
           <a:p>
             <a:pPr algn="ctr"/>
+            <a:endParaRPr/>
           </a:p>
         </p:txBody>
       </p:sp>
@@ -11974,6 +11807,7 @@
           <a:lstStyle/>
           <a:p>
             <a:pPr algn="ctr"/>
+            <a:endParaRPr/>
           </a:p>
         </p:txBody>
       </p:sp>
@@ -12017,6 +11851,7 @@
           <a:lstStyle/>
           <a:p>
             <a:pPr algn="ctr"/>
+            <a:endParaRPr/>
           </a:p>
         </p:txBody>
       </p:sp>
@@ -12220,6 +12055,7 @@
           <a:lstStyle/>
           <a:p>
             <a:pPr algn="ctr"/>
+            <a:endParaRPr/>
           </a:p>
         </p:txBody>
       </p:sp>
@@ -12375,6 +12211,7 @@
           <a:lstStyle/>
           <a:p>
             <a:pPr algn="ctr"/>
+            <a:endParaRPr/>
           </a:p>
         </p:txBody>
       </p:sp>
@@ -12418,6 +12255,7 @@
           <a:lstStyle/>
           <a:p>
             <a:pPr algn="ctr"/>
+            <a:endParaRPr/>
           </a:p>
         </p:txBody>
       </p:sp>
@@ -12537,6 +12375,7 @@
           <a:lstStyle/>
           <a:p>
             <a:pPr algn="ctr"/>
+            <a:endParaRPr/>
           </a:p>
         </p:txBody>
       </p:sp>
@@ -12587,7 +12426,7 @@
 </file>
 
 <file path=ppt/slides/slide2.xml><?xml version="1.0" encoding="utf-8"?>
-<p:sld xmlns:a="http://schemas.openxmlformats.org/drawingml/2006/main" xmlns:p="http://schemas.openxmlformats.org/presentationml/2006/main" xmlns:r="http://schemas.openxmlformats.org/officeDocument/2006/relationships">
+<p:sld xmlns:a="http://schemas.openxmlformats.org/drawingml/2006/main" xmlns:r="http://schemas.openxmlformats.org/officeDocument/2006/relationships" xmlns:p="http://schemas.openxmlformats.org/presentationml/2006/main">
   <p:cSld>
     <p:spTree>
       <p:nvGrpSpPr>
@@ -12595,7 +12434,14 @@
         <p:cNvGrpSpPr/>
         <p:nvPr/>
       </p:nvGrpSpPr>
-      <p:grpSpPr/>
+      <p:grpSpPr>
+        <a:xfrm>
+          <a:off x="0" y="0"/>
+          <a:ext cx="0" cy="0"/>
+          <a:chOff x="0" y="0"/>
+          <a:chExt cx="0" cy="0"/>
+        </a:xfrm>
+      </p:grpSpPr>
       <p:sp>
         <p:nvSpPr>
           <p:cNvPr id="2" name="Rectangle 1"/>
@@ -12636,6 +12482,7 @@
           <a:lstStyle/>
           <a:p>
             <a:pPr algn="ctr"/>
+            <a:endParaRPr/>
           </a:p>
         </p:txBody>
       </p:sp>
@@ -12679,6 +12526,7 @@
           <a:lstStyle/>
           <a:p>
             <a:pPr algn="ctr"/>
+            <a:endParaRPr/>
           </a:p>
         </p:txBody>
       </p:sp>
@@ -12722,6 +12570,7 @@
           <a:lstStyle/>
           <a:p>
             <a:pPr algn="ctr"/>
+            <a:endParaRPr/>
           </a:p>
         </p:txBody>
       </p:sp>
@@ -12917,6 +12766,7 @@
           <a:lstStyle/>
           <a:p>
             <a:pPr algn="ctr"/>
+            <a:endParaRPr/>
           </a:p>
         </p:txBody>
       </p:sp>
@@ -12960,6 +12810,7 @@
           <a:lstStyle/>
           <a:p>
             <a:pPr algn="ctr"/>
+            <a:endParaRPr/>
           </a:p>
         </p:txBody>
       </p:sp>
@@ -13109,6 +12960,7 @@
           <a:lstStyle/>
           <a:p>
             <a:pPr algn="ctr"/>
+            <a:endParaRPr/>
           </a:p>
         </p:txBody>
       </p:sp>
@@ -13152,6 +13004,7 @@
           <a:lstStyle/>
           <a:p>
             <a:pPr algn="ctr"/>
+            <a:endParaRPr/>
           </a:p>
         </p:txBody>
       </p:sp>
@@ -13271,6 +13124,7 @@
           <a:lstStyle/>
           <a:p>
             <a:pPr algn="ctr"/>
+            <a:endParaRPr/>
           </a:p>
         </p:txBody>
       </p:sp>
@@ -13314,6 +13168,7 @@
           <a:lstStyle/>
           <a:p>
             <a:pPr algn="ctr"/>
+            <a:endParaRPr/>
           </a:p>
         </p:txBody>
       </p:sp>
@@ -13433,6 +13288,7 @@
           <a:lstStyle/>
           <a:p>
             <a:pPr algn="ctr"/>
+            <a:endParaRPr/>
           </a:p>
         </p:txBody>
       </p:sp>
@@ -13476,6 +13332,7 @@
           <a:lstStyle/>
           <a:p>
             <a:pPr algn="ctr"/>
+            <a:endParaRPr/>
           </a:p>
         </p:txBody>
       </p:sp>
@@ -13595,6 +13452,7 @@
           <a:lstStyle/>
           <a:p>
             <a:pPr algn="ctr"/>
+            <a:endParaRPr/>
           </a:p>
         </p:txBody>
       </p:sp>
@@ -13638,6 +13496,7 @@
           <a:lstStyle/>
           <a:p>
             <a:pPr algn="ctr"/>
+            <a:endParaRPr/>
           </a:p>
         </p:txBody>
       </p:sp>
@@ -13726,7 +13585,7 @@
 </file>
 
 <file path=ppt/slides/slide3.xml><?xml version="1.0" encoding="utf-8"?>
-<p:sld xmlns:a="http://schemas.openxmlformats.org/drawingml/2006/main" xmlns:p="http://schemas.openxmlformats.org/presentationml/2006/main" xmlns:r="http://schemas.openxmlformats.org/officeDocument/2006/relationships">
+<p:sld xmlns:a="http://schemas.openxmlformats.org/drawingml/2006/main" xmlns:r="http://schemas.openxmlformats.org/officeDocument/2006/relationships" xmlns:p="http://schemas.openxmlformats.org/presentationml/2006/main">
   <p:cSld>
     <p:spTree>
       <p:nvGrpSpPr>
@@ -13734,7 +13593,14 @@
         <p:cNvGrpSpPr/>
         <p:nvPr/>
       </p:nvGrpSpPr>
-      <p:grpSpPr/>
+      <p:grpSpPr>
+        <a:xfrm>
+          <a:off x="0" y="0"/>
+          <a:ext cx="0" cy="0"/>
+          <a:chOff x="0" y="0"/>
+          <a:chExt cx="0" cy="0"/>
+        </a:xfrm>
+      </p:grpSpPr>
       <p:sp>
         <p:nvSpPr>
           <p:cNvPr id="2" name="Rectangle 1"/>
@@ -13775,6 +13641,7 @@
           <a:lstStyle/>
           <a:p>
             <a:pPr algn="ctr"/>
+            <a:endParaRPr/>
           </a:p>
         </p:txBody>
       </p:sp>
@@ -13818,6 +13685,7 @@
           <a:lstStyle/>
           <a:p>
             <a:pPr algn="ctr"/>
+            <a:endParaRPr/>
           </a:p>
         </p:txBody>
       </p:sp>
@@ -13861,6 +13729,7 @@
           <a:lstStyle/>
           <a:p>
             <a:pPr algn="ctr"/>
+            <a:endParaRPr/>
           </a:p>
         </p:txBody>
       </p:sp>
@@ -14056,6 +13925,7 @@
           <a:lstStyle/>
           <a:p>
             <a:pPr algn="ctr"/>
+            <a:endParaRPr/>
           </a:p>
         </p:txBody>
       </p:sp>
@@ -14099,6 +13969,7 @@
           <a:lstStyle/>
           <a:p>
             <a:pPr algn="ctr"/>
+            <a:endParaRPr/>
           </a:p>
         </p:txBody>
       </p:sp>
@@ -14218,6 +14089,7 @@
           <a:lstStyle/>
           <a:p>
             <a:pPr algn="ctr"/>
+            <a:endParaRPr/>
           </a:p>
         </p:txBody>
       </p:sp>
@@ -14261,6 +14133,7 @@
           <a:lstStyle/>
           <a:p>
             <a:pPr algn="ctr"/>
+            <a:endParaRPr/>
           </a:p>
         </p:txBody>
       </p:sp>
@@ -14380,6 +14253,7 @@
           <a:lstStyle/>
           <a:p>
             <a:pPr algn="ctr"/>
+            <a:endParaRPr/>
           </a:p>
         </p:txBody>
       </p:sp>
@@ -14423,6 +14297,7 @@
           <a:lstStyle/>
           <a:p>
             <a:pPr algn="ctr"/>
+            <a:endParaRPr/>
           </a:p>
         </p:txBody>
       </p:sp>
@@ -14542,6 +14417,7 @@
           <a:lstStyle/>
           <a:p>
             <a:pPr algn="ctr"/>
+            <a:endParaRPr/>
           </a:p>
         </p:txBody>
       </p:sp>
@@ -14585,6 +14461,7 @@
           <a:lstStyle/>
           <a:p>
             <a:pPr algn="ctr"/>
+            <a:endParaRPr/>
           </a:p>
         </p:txBody>
       </p:sp>
@@ -14704,6 +14581,7 @@
           <a:lstStyle/>
           <a:p>
             <a:pPr algn="ctr"/>
+            <a:endParaRPr/>
           </a:p>
         </p:txBody>
       </p:sp>
@@ -14747,6 +14625,7 @@
           <a:lstStyle/>
           <a:p>
             <a:pPr algn="ctr"/>
+            <a:endParaRPr/>
           </a:p>
         </p:txBody>
       </p:sp>
@@ -14866,6 +14745,7 @@
           <a:lstStyle/>
           <a:p>
             <a:pPr algn="ctr"/>
+            <a:endParaRPr/>
           </a:p>
         </p:txBody>
       </p:sp>
@@ -14909,6 +14789,7 @@
           <a:lstStyle/>
           <a:p>
             <a:pPr algn="ctr"/>
+            <a:endParaRPr/>
           </a:p>
         </p:txBody>
       </p:sp>
@@ -15045,17 +14926,53 @@
                 <a:tableStyleId>{5C22544A-7EE6-4342-B048-85BDC9FD1C3A}</a:tableStyleId>
               </a:tblPr>
               <a:tblGrid>
-                <a:gridCol w="1828800"/>
-                <a:gridCol w="822960"/>
-                <a:gridCol w="685800"/>
-                <a:gridCol w="685800"/>
-                <a:gridCol w="685800"/>
-                <a:gridCol w="960120"/>
+                <a:gridCol w="1828800">
+                  <a:extLst>
+                    <a:ext uri="{9D8B030D-6E8A-4147-A177-3AD203B41FA5}">
+                      <a16:colId xmlns:a16="http://schemas.microsoft.com/office/drawing/2014/main" val="20000"/>
+                    </a:ext>
+                  </a:extLst>
+                </a:gridCol>
+                <a:gridCol w="822960">
+                  <a:extLst>
+                    <a:ext uri="{9D8B030D-6E8A-4147-A177-3AD203B41FA5}">
+                      <a16:colId xmlns:a16="http://schemas.microsoft.com/office/drawing/2014/main" val="20001"/>
+                    </a:ext>
+                  </a:extLst>
+                </a:gridCol>
+                <a:gridCol w="685800">
+                  <a:extLst>
+                    <a:ext uri="{9D8B030D-6E8A-4147-A177-3AD203B41FA5}">
+                      <a16:colId xmlns:a16="http://schemas.microsoft.com/office/drawing/2014/main" val="20002"/>
+                    </a:ext>
+                  </a:extLst>
+                </a:gridCol>
+                <a:gridCol w="685800">
+                  <a:extLst>
+                    <a:ext uri="{9D8B030D-6E8A-4147-A177-3AD203B41FA5}">
+                      <a16:colId xmlns:a16="http://schemas.microsoft.com/office/drawing/2014/main" val="20003"/>
+                    </a:ext>
+                  </a:extLst>
+                </a:gridCol>
+                <a:gridCol w="685800">
+                  <a:extLst>
+                    <a:ext uri="{9D8B030D-6E8A-4147-A177-3AD203B41FA5}">
+                      <a16:colId xmlns:a16="http://schemas.microsoft.com/office/drawing/2014/main" val="20004"/>
+                    </a:ext>
+                  </a:extLst>
+                </a:gridCol>
+                <a:gridCol w="960120">
+                  <a:extLst>
+                    <a:ext uri="{9D8B030D-6E8A-4147-A177-3AD203B41FA5}">
+                      <a16:colId xmlns:a16="http://schemas.microsoft.com/office/drawing/2014/main" val="20005"/>
+                    </a:ext>
+                  </a:extLst>
+                </a:gridCol>
               </a:tblGrid>
               <a:tr h="365760">
                 <a:tc>
                   <a:txBody>
-                    <a:bodyPr wrap="square"/>
+                    <a:bodyPr/>
                     <a:lstStyle/>
                     <a:p>
                       <a:pPr algn="l"/>
@@ -15074,23 +14991,11 @@
                     <a:solidFill>
                       <a:srgbClr val="141B45"/>
                     </a:solidFill>
-                    <a:lnL w="0" cap="flat" cmpd="sng">
-                      <a:noFill/>
-                    </a:lnL>
-                    <a:lnR w="0" cap="flat" cmpd="sng">
-                      <a:noFill/>
-                    </a:lnR>
-                    <a:lnT w="0" cap="flat" cmpd="sng">
-                      <a:noFill/>
-                    </a:lnT>
-                    <a:lnB w="0" cap="flat" cmpd="sng">
-                      <a:noFill/>
-                    </a:lnB>
                   </a:tcPr>
                 </a:tc>
                 <a:tc>
                   <a:txBody>
-                    <a:bodyPr wrap="square"/>
+                    <a:bodyPr/>
                     <a:lstStyle/>
                     <a:p>
                       <a:pPr algn="l"/>
@@ -15109,23 +15014,11 @@
                     <a:solidFill>
                       <a:srgbClr val="141B45"/>
                     </a:solidFill>
-                    <a:lnL w="0" cap="flat" cmpd="sng">
-                      <a:noFill/>
-                    </a:lnL>
-                    <a:lnR w="0" cap="flat" cmpd="sng">
-                      <a:noFill/>
-                    </a:lnR>
-                    <a:lnT w="0" cap="flat" cmpd="sng">
-                      <a:noFill/>
-                    </a:lnT>
-                    <a:lnB w="0" cap="flat" cmpd="sng">
-                      <a:noFill/>
-                    </a:lnB>
                   </a:tcPr>
                 </a:tc>
                 <a:tc>
                   <a:txBody>
-                    <a:bodyPr wrap="square"/>
+                    <a:bodyPr/>
                     <a:lstStyle/>
                     <a:p>
                       <a:pPr algn="l"/>
@@ -15144,23 +15037,11 @@
                     <a:solidFill>
                       <a:srgbClr val="141B45"/>
                     </a:solidFill>
-                    <a:lnL w="0" cap="flat" cmpd="sng">
-                      <a:noFill/>
-                    </a:lnL>
-                    <a:lnR w="0" cap="flat" cmpd="sng">
-                      <a:noFill/>
-                    </a:lnR>
-                    <a:lnT w="0" cap="flat" cmpd="sng">
-                      <a:noFill/>
-                    </a:lnT>
-                    <a:lnB w="0" cap="flat" cmpd="sng">
-                      <a:noFill/>
-                    </a:lnB>
                   </a:tcPr>
                 </a:tc>
                 <a:tc>
                   <a:txBody>
-                    <a:bodyPr wrap="square"/>
+                    <a:bodyPr/>
                     <a:lstStyle/>
                     <a:p>
                       <a:pPr algn="l"/>
@@ -15179,23 +15060,11 @@
                     <a:solidFill>
                       <a:srgbClr val="141B45"/>
                     </a:solidFill>
-                    <a:lnL w="0" cap="flat" cmpd="sng">
-                      <a:noFill/>
-                    </a:lnL>
-                    <a:lnR w="0" cap="flat" cmpd="sng">
-                      <a:noFill/>
-                    </a:lnR>
-                    <a:lnT w="0" cap="flat" cmpd="sng">
-                      <a:noFill/>
-                    </a:lnT>
-                    <a:lnB w="0" cap="flat" cmpd="sng">
-                      <a:noFill/>
-                    </a:lnB>
                   </a:tcPr>
                 </a:tc>
                 <a:tc>
                   <a:txBody>
-                    <a:bodyPr wrap="square"/>
+                    <a:bodyPr/>
                     <a:lstStyle/>
                     <a:p>
                       <a:pPr algn="l"/>
@@ -15214,23 +15083,11 @@
                     <a:solidFill>
                       <a:srgbClr val="141B45"/>
                     </a:solidFill>
-                    <a:lnL w="0" cap="flat" cmpd="sng">
-                      <a:noFill/>
-                    </a:lnL>
-                    <a:lnR w="0" cap="flat" cmpd="sng">
-                      <a:noFill/>
-                    </a:lnR>
-                    <a:lnT w="0" cap="flat" cmpd="sng">
-                      <a:noFill/>
-                    </a:lnT>
-                    <a:lnB w="0" cap="flat" cmpd="sng">
-                      <a:noFill/>
-                    </a:lnB>
                   </a:tcPr>
                 </a:tc>
                 <a:tc>
                   <a:txBody>
-                    <a:bodyPr wrap="square"/>
+                    <a:bodyPr/>
                     <a:lstStyle/>
                     <a:p>
                       <a:pPr algn="l"/>
@@ -15249,25 +15106,18 @@
                     <a:solidFill>
                       <a:srgbClr val="141B45"/>
                     </a:solidFill>
-                    <a:lnL w="0" cap="flat" cmpd="sng">
-                      <a:noFill/>
-                    </a:lnL>
-                    <a:lnR w="0" cap="flat" cmpd="sng">
-                      <a:noFill/>
-                    </a:lnR>
-                    <a:lnT w="0" cap="flat" cmpd="sng">
-                      <a:noFill/>
-                    </a:lnT>
-                    <a:lnB w="0" cap="flat" cmpd="sng">
-                      <a:noFill/>
-                    </a:lnB>
                   </a:tcPr>
                 </a:tc>
+                <a:extLst>
+                  <a:ext uri="{0D108BD9-81ED-4DB2-BD59-A6C34878D82A}">
+                    <a16:rowId xmlns:a16="http://schemas.microsoft.com/office/drawing/2014/main" val="10000"/>
+                  </a:ext>
+                </a:extLst>
               </a:tr>
               <a:tr h="365760">
                 <a:tc>
                   <a:txBody>
-                    <a:bodyPr wrap="square"/>
+                    <a:bodyPr/>
                     <a:lstStyle/>
                     <a:p>
                       <a:pPr algn="l"/>
@@ -15286,23 +15136,11 @@
                     <a:solidFill>
                       <a:srgbClr val="FFFFFF"/>
                     </a:solidFill>
-                    <a:lnL w="0" cap="flat" cmpd="sng">
-                      <a:noFill/>
-                    </a:lnL>
-                    <a:lnR w="0" cap="flat" cmpd="sng">
-                      <a:noFill/>
-                    </a:lnR>
-                    <a:lnT w="0" cap="flat" cmpd="sng">
-                      <a:noFill/>
-                    </a:lnT>
-                    <a:lnB w="0" cap="flat" cmpd="sng">
-                      <a:noFill/>
-                    </a:lnB>
                   </a:tcPr>
                 </a:tc>
                 <a:tc>
                   <a:txBody>
-                    <a:bodyPr wrap="square"/>
+                    <a:bodyPr/>
                     <a:lstStyle/>
                     <a:p>
                       <a:pPr algn="l"/>
@@ -15321,23 +15159,11 @@
                     <a:solidFill>
                       <a:srgbClr val="FFFFFF"/>
                     </a:solidFill>
-                    <a:lnL w="0" cap="flat" cmpd="sng">
-                      <a:noFill/>
-                    </a:lnL>
-                    <a:lnR w="0" cap="flat" cmpd="sng">
-                      <a:noFill/>
-                    </a:lnR>
-                    <a:lnT w="0" cap="flat" cmpd="sng">
-                      <a:noFill/>
-                    </a:lnT>
-                    <a:lnB w="0" cap="flat" cmpd="sng">
-                      <a:noFill/>
-                    </a:lnB>
                   </a:tcPr>
                 </a:tc>
                 <a:tc>
                   <a:txBody>
-                    <a:bodyPr wrap="square"/>
+                    <a:bodyPr/>
                     <a:lstStyle/>
                     <a:p>
                       <a:pPr algn="l"/>
@@ -15356,23 +15182,11 @@
                     <a:solidFill>
                       <a:srgbClr val="FFFFFF"/>
                     </a:solidFill>
-                    <a:lnL w="0" cap="flat" cmpd="sng">
-                      <a:noFill/>
-                    </a:lnL>
-                    <a:lnR w="0" cap="flat" cmpd="sng">
-                      <a:noFill/>
-                    </a:lnR>
-                    <a:lnT w="0" cap="flat" cmpd="sng">
-                      <a:noFill/>
-                    </a:lnT>
-                    <a:lnB w="0" cap="flat" cmpd="sng">
-                      <a:noFill/>
-                    </a:lnB>
                   </a:tcPr>
                 </a:tc>
                 <a:tc>
                   <a:txBody>
-                    <a:bodyPr wrap="square"/>
+                    <a:bodyPr/>
                     <a:lstStyle/>
                     <a:p>
                       <a:pPr algn="l"/>
@@ -15391,23 +15205,11 @@
                     <a:solidFill>
                       <a:srgbClr val="FFFFFF"/>
                     </a:solidFill>
-                    <a:lnL w="0" cap="flat" cmpd="sng">
-                      <a:noFill/>
-                    </a:lnL>
-                    <a:lnR w="0" cap="flat" cmpd="sng">
-                      <a:noFill/>
-                    </a:lnR>
-                    <a:lnT w="0" cap="flat" cmpd="sng">
-                      <a:noFill/>
-                    </a:lnT>
-                    <a:lnB w="0" cap="flat" cmpd="sng">
-                      <a:noFill/>
-                    </a:lnB>
                   </a:tcPr>
                 </a:tc>
                 <a:tc>
                   <a:txBody>
-                    <a:bodyPr wrap="square"/>
+                    <a:bodyPr/>
                     <a:lstStyle/>
                     <a:p>
                       <a:pPr algn="l"/>
@@ -15426,23 +15228,11 @@
                     <a:solidFill>
                       <a:srgbClr val="FFFFFF"/>
                     </a:solidFill>
-                    <a:lnL w="0" cap="flat" cmpd="sng">
-                      <a:noFill/>
-                    </a:lnL>
-                    <a:lnR w="0" cap="flat" cmpd="sng">
-                      <a:noFill/>
-                    </a:lnR>
-                    <a:lnT w="0" cap="flat" cmpd="sng">
-                      <a:noFill/>
-                    </a:lnT>
-                    <a:lnB w="0" cap="flat" cmpd="sng">
-                      <a:noFill/>
-                    </a:lnB>
                   </a:tcPr>
                 </a:tc>
                 <a:tc>
                   <a:txBody>
-                    <a:bodyPr wrap="square"/>
+                    <a:bodyPr/>
                     <a:lstStyle/>
                     <a:p>
                       <a:pPr algn="l"/>
@@ -15461,25 +15251,18 @@
                     <a:solidFill>
                       <a:srgbClr val="FFFFFF"/>
                     </a:solidFill>
-                    <a:lnL w="0" cap="flat" cmpd="sng">
-                      <a:noFill/>
-                    </a:lnL>
-                    <a:lnR w="0" cap="flat" cmpd="sng">
-                      <a:noFill/>
-                    </a:lnR>
-                    <a:lnT w="0" cap="flat" cmpd="sng">
-                      <a:noFill/>
-                    </a:lnT>
-                    <a:lnB w="0" cap="flat" cmpd="sng">
-                      <a:noFill/>
-                    </a:lnB>
                   </a:tcPr>
                 </a:tc>
+                <a:extLst>
+                  <a:ext uri="{0D108BD9-81ED-4DB2-BD59-A6C34878D82A}">
+                    <a16:rowId xmlns:a16="http://schemas.microsoft.com/office/drawing/2014/main" val="10001"/>
+                  </a:ext>
+                </a:extLst>
               </a:tr>
               <a:tr h="365760">
                 <a:tc>
                   <a:txBody>
-                    <a:bodyPr wrap="square"/>
+                    <a:bodyPr/>
                     <a:lstStyle/>
                     <a:p>
                       <a:pPr algn="l"/>
@@ -15498,23 +15281,11 @@
                     <a:solidFill>
                       <a:srgbClr val="E8EDF9"/>
                     </a:solidFill>
-                    <a:lnL w="0" cap="flat" cmpd="sng">
-                      <a:noFill/>
-                    </a:lnL>
-                    <a:lnR w="0" cap="flat" cmpd="sng">
-                      <a:noFill/>
-                    </a:lnR>
-                    <a:lnT w="0" cap="flat" cmpd="sng">
-                      <a:noFill/>
-                    </a:lnT>
-                    <a:lnB w="0" cap="flat" cmpd="sng">
-                      <a:noFill/>
-                    </a:lnB>
                   </a:tcPr>
                 </a:tc>
                 <a:tc>
                   <a:txBody>
-                    <a:bodyPr wrap="square"/>
+                    <a:bodyPr/>
                     <a:lstStyle/>
                     <a:p>
                       <a:pPr algn="l"/>
@@ -15533,23 +15304,11 @@
                     <a:solidFill>
                       <a:srgbClr val="E8EDF9"/>
                     </a:solidFill>
-                    <a:lnL w="0" cap="flat" cmpd="sng">
-                      <a:noFill/>
-                    </a:lnL>
-                    <a:lnR w="0" cap="flat" cmpd="sng">
-                      <a:noFill/>
-                    </a:lnR>
-                    <a:lnT w="0" cap="flat" cmpd="sng">
-                      <a:noFill/>
-                    </a:lnT>
-                    <a:lnB w="0" cap="flat" cmpd="sng">
-                      <a:noFill/>
-                    </a:lnB>
                   </a:tcPr>
                 </a:tc>
                 <a:tc>
                   <a:txBody>
-                    <a:bodyPr wrap="square"/>
+                    <a:bodyPr/>
                     <a:lstStyle/>
                     <a:p>
                       <a:pPr algn="l"/>
@@ -15568,23 +15327,11 @@
                     <a:solidFill>
                       <a:srgbClr val="E8EDF9"/>
                     </a:solidFill>
-                    <a:lnL w="0" cap="flat" cmpd="sng">
-                      <a:noFill/>
-                    </a:lnL>
-                    <a:lnR w="0" cap="flat" cmpd="sng">
-                      <a:noFill/>
-                    </a:lnR>
-                    <a:lnT w="0" cap="flat" cmpd="sng">
-                      <a:noFill/>
-                    </a:lnT>
-                    <a:lnB w="0" cap="flat" cmpd="sng">
-                      <a:noFill/>
-                    </a:lnB>
                   </a:tcPr>
                 </a:tc>
                 <a:tc>
                   <a:txBody>
-                    <a:bodyPr wrap="square"/>
+                    <a:bodyPr/>
                     <a:lstStyle/>
                     <a:p>
                       <a:pPr algn="l"/>
@@ -15603,23 +15350,11 @@
                     <a:solidFill>
                       <a:srgbClr val="E8EDF9"/>
                     </a:solidFill>
-                    <a:lnL w="0" cap="flat" cmpd="sng">
-                      <a:noFill/>
-                    </a:lnL>
-                    <a:lnR w="0" cap="flat" cmpd="sng">
-                      <a:noFill/>
-                    </a:lnR>
-                    <a:lnT w="0" cap="flat" cmpd="sng">
-                      <a:noFill/>
-                    </a:lnT>
-                    <a:lnB w="0" cap="flat" cmpd="sng">
-                      <a:noFill/>
-                    </a:lnB>
                   </a:tcPr>
                 </a:tc>
                 <a:tc>
                   <a:txBody>
-                    <a:bodyPr wrap="square"/>
+                    <a:bodyPr/>
                     <a:lstStyle/>
                     <a:p>
                       <a:pPr algn="l"/>
@@ -15638,23 +15373,11 @@
                     <a:solidFill>
                       <a:srgbClr val="E8EDF9"/>
                     </a:solidFill>
-                    <a:lnL w="0" cap="flat" cmpd="sng">
-                      <a:noFill/>
-                    </a:lnL>
-                    <a:lnR w="0" cap="flat" cmpd="sng">
-                      <a:noFill/>
-                    </a:lnR>
-                    <a:lnT w="0" cap="flat" cmpd="sng">
-                      <a:noFill/>
-                    </a:lnT>
-                    <a:lnB w="0" cap="flat" cmpd="sng">
-                      <a:noFill/>
-                    </a:lnB>
                   </a:tcPr>
                 </a:tc>
                 <a:tc>
                   <a:txBody>
-                    <a:bodyPr wrap="square"/>
+                    <a:bodyPr/>
                     <a:lstStyle/>
                     <a:p>
                       <a:pPr algn="l"/>
@@ -15673,25 +15396,18 @@
                     <a:solidFill>
                       <a:srgbClr val="E8EDF9"/>
                     </a:solidFill>
-                    <a:lnL w="0" cap="flat" cmpd="sng">
-                      <a:noFill/>
-                    </a:lnL>
-                    <a:lnR w="0" cap="flat" cmpd="sng">
-                      <a:noFill/>
-                    </a:lnR>
-                    <a:lnT w="0" cap="flat" cmpd="sng">
-                      <a:noFill/>
-                    </a:lnT>
-                    <a:lnB w="0" cap="flat" cmpd="sng">
-                      <a:noFill/>
-                    </a:lnB>
                   </a:tcPr>
                 </a:tc>
+                <a:extLst>
+                  <a:ext uri="{0D108BD9-81ED-4DB2-BD59-A6C34878D82A}">
+                    <a16:rowId xmlns:a16="http://schemas.microsoft.com/office/drawing/2014/main" val="10002"/>
+                  </a:ext>
+                </a:extLst>
               </a:tr>
               <a:tr h="365760">
                 <a:tc>
                   <a:txBody>
-                    <a:bodyPr wrap="square"/>
+                    <a:bodyPr/>
                     <a:lstStyle/>
                     <a:p>
                       <a:pPr algn="l"/>
@@ -15710,23 +15426,11 @@
                     <a:solidFill>
                       <a:srgbClr val="FFFFFF"/>
                     </a:solidFill>
-                    <a:lnL w="0" cap="flat" cmpd="sng">
-                      <a:noFill/>
-                    </a:lnL>
-                    <a:lnR w="0" cap="flat" cmpd="sng">
-                      <a:noFill/>
-                    </a:lnR>
-                    <a:lnT w="0" cap="flat" cmpd="sng">
-                      <a:noFill/>
-                    </a:lnT>
-                    <a:lnB w="0" cap="flat" cmpd="sng">
-                      <a:noFill/>
-                    </a:lnB>
                   </a:tcPr>
                 </a:tc>
                 <a:tc>
                   <a:txBody>
-                    <a:bodyPr wrap="square"/>
+                    <a:bodyPr/>
                     <a:lstStyle/>
                     <a:p>
                       <a:pPr algn="l"/>
@@ -15745,23 +15449,11 @@
                     <a:solidFill>
                       <a:srgbClr val="FFFFFF"/>
                     </a:solidFill>
-                    <a:lnL w="0" cap="flat" cmpd="sng">
-                      <a:noFill/>
-                    </a:lnL>
-                    <a:lnR w="0" cap="flat" cmpd="sng">
-                      <a:noFill/>
-                    </a:lnR>
-                    <a:lnT w="0" cap="flat" cmpd="sng">
-                      <a:noFill/>
-                    </a:lnT>
-                    <a:lnB w="0" cap="flat" cmpd="sng">
-                      <a:noFill/>
-                    </a:lnB>
                   </a:tcPr>
                 </a:tc>
                 <a:tc>
                   <a:txBody>
-                    <a:bodyPr wrap="square"/>
+                    <a:bodyPr/>
                     <a:lstStyle/>
                     <a:p>
                       <a:pPr algn="l"/>
@@ -15780,23 +15472,11 @@
                     <a:solidFill>
                       <a:srgbClr val="FFFFFF"/>
                     </a:solidFill>
-                    <a:lnL w="0" cap="flat" cmpd="sng">
-                      <a:noFill/>
-                    </a:lnL>
-                    <a:lnR w="0" cap="flat" cmpd="sng">
-                      <a:noFill/>
-                    </a:lnR>
-                    <a:lnT w="0" cap="flat" cmpd="sng">
-                      <a:noFill/>
-                    </a:lnT>
-                    <a:lnB w="0" cap="flat" cmpd="sng">
-                      <a:noFill/>
-                    </a:lnB>
                   </a:tcPr>
                 </a:tc>
                 <a:tc>
                   <a:txBody>
-                    <a:bodyPr wrap="square"/>
+                    <a:bodyPr/>
                     <a:lstStyle/>
                     <a:p>
                       <a:pPr algn="l"/>
@@ -15815,23 +15495,11 @@
                     <a:solidFill>
                       <a:srgbClr val="FFFFFF"/>
                     </a:solidFill>
-                    <a:lnL w="0" cap="flat" cmpd="sng">
-                      <a:noFill/>
-                    </a:lnL>
-                    <a:lnR w="0" cap="flat" cmpd="sng">
-                      <a:noFill/>
-                    </a:lnR>
-                    <a:lnT w="0" cap="flat" cmpd="sng">
-                      <a:noFill/>
-                    </a:lnT>
-                    <a:lnB w="0" cap="flat" cmpd="sng">
-                      <a:noFill/>
-                    </a:lnB>
                   </a:tcPr>
                 </a:tc>
                 <a:tc>
                   <a:txBody>
-                    <a:bodyPr wrap="square"/>
+                    <a:bodyPr/>
                     <a:lstStyle/>
                     <a:p>
                       <a:pPr algn="l"/>
@@ -15850,23 +15518,11 @@
                     <a:solidFill>
                       <a:srgbClr val="FFFFFF"/>
                     </a:solidFill>
-                    <a:lnL w="0" cap="flat" cmpd="sng">
-                      <a:noFill/>
-                    </a:lnL>
-                    <a:lnR w="0" cap="flat" cmpd="sng">
-                      <a:noFill/>
-                    </a:lnR>
-                    <a:lnT w="0" cap="flat" cmpd="sng">
-                      <a:noFill/>
-                    </a:lnT>
-                    <a:lnB w="0" cap="flat" cmpd="sng">
-                      <a:noFill/>
-                    </a:lnB>
                   </a:tcPr>
                 </a:tc>
                 <a:tc>
                   <a:txBody>
-                    <a:bodyPr wrap="square"/>
+                    <a:bodyPr/>
                     <a:lstStyle/>
                     <a:p>
                       <a:pPr algn="l"/>
@@ -15885,20 +15541,13 @@
                     <a:solidFill>
                       <a:srgbClr val="FFFFFF"/>
                     </a:solidFill>
-                    <a:lnL w="0" cap="flat" cmpd="sng">
-                      <a:noFill/>
-                    </a:lnL>
-                    <a:lnR w="0" cap="flat" cmpd="sng">
-                      <a:noFill/>
-                    </a:lnR>
-                    <a:lnT w="0" cap="flat" cmpd="sng">
-                      <a:noFill/>
-                    </a:lnT>
-                    <a:lnB w="0" cap="flat" cmpd="sng">
-                      <a:noFill/>
-                    </a:lnB>
                   </a:tcPr>
                 </a:tc>
+                <a:extLst>
+                  <a:ext uri="{0D108BD9-81ED-4DB2-BD59-A6C34878D82A}">
+                    <a16:rowId xmlns:a16="http://schemas.microsoft.com/office/drawing/2014/main" val="10003"/>
+                  </a:ext>
+                </a:extLst>
               </a:tr>
             </a:tbl>
           </a:graphicData>
@@ -15944,6 +15593,7 @@
           <a:lstStyle/>
           <a:p>
             <a:pPr algn="ctr"/>
+            <a:endParaRPr/>
           </a:p>
         </p:txBody>
       </p:sp>
@@ -15994,7 +15644,7 @@
 </file>
 
 <file path=ppt/slides/slide4.xml><?xml version="1.0" encoding="utf-8"?>
-<p:sld xmlns:a="http://schemas.openxmlformats.org/drawingml/2006/main" xmlns:p="http://schemas.openxmlformats.org/presentationml/2006/main" xmlns:r="http://schemas.openxmlformats.org/officeDocument/2006/relationships">
+<p:sld xmlns:a="http://schemas.openxmlformats.org/drawingml/2006/main" xmlns:r="http://schemas.openxmlformats.org/officeDocument/2006/relationships" xmlns:p="http://schemas.openxmlformats.org/presentationml/2006/main">
   <p:cSld>
     <p:spTree>
       <p:nvGrpSpPr>
@@ -16002,7 +15652,14 @@
         <p:cNvGrpSpPr/>
         <p:nvPr/>
       </p:nvGrpSpPr>
-      <p:grpSpPr/>
+      <p:grpSpPr>
+        <a:xfrm>
+          <a:off x="0" y="0"/>
+          <a:ext cx="0" cy="0"/>
+          <a:chOff x="0" y="0"/>
+          <a:chExt cx="0" cy="0"/>
+        </a:xfrm>
+      </p:grpSpPr>
       <p:sp>
         <p:nvSpPr>
           <p:cNvPr id="2" name="Rectangle 1"/>
@@ -16043,6 +15700,7 @@
           <a:lstStyle/>
           <a:p>
             <a:pPr algn="ctr"/>
+            <a:endParaRPr/>
           </a:p>
         </p:txBody>
       </p:sp>
@@ -16086,6 +15744,7 @@
           <a:lstStyle/>
           <a:p>
             <a:pPr algn="ctr"/>
+            <a:endParaRPr/>
           </a:p>
         </p:txBody>
       </p:sp>
@@ -16129,6 +15788,7 @@
           <a:lstStyle/>
           <a:p>
             <a:pPr algn="ctr"/>
+            <a:endParaRPr/>
           </a:p>
         </p:txBody>
       </p:sp>
@@ -16303,13 +15963,25 @@
                 <a:tableStyleId>{5C22544A-7EE6-4342-B048-85BDC9FD1C3A}</a:tableStyleId>
               </a:tblPr>
               <a:tblGrid>
-                <a:gridCol w="3200400"/>
-                <a:gridCol w="1828800"/>
+                <a:gridCol w="3200400">
+                  <a:extLst>
+                    <a:ext uri="{9D8B030D-6E8A-4147-A177-3AD203B41FA5}">
+                      <a16:colId xmlns:a16="http://schemas.microsoft.com/office/drawing/2014/main" val="20000"/>
+                    </a:ext>
+                  </a:extLst>
+                </a:gridCol>
+                <a:gridCol w="1828800">
+                  <a:extLst>
+                    <a:ext uri="{9D8B030D-6E8A-4147-A177-3AD203B41FA5}">
+                      <a16:colId xmlns:a16="http://schemas.microsoft.com/office/drawing/2014/main" val="20001"/>
+                    </a:ext>
+                  </a:extLst>
+                </a:gridCol>
               </a:tblGrid>
               <a:tr h="365760">
                 <a:tc>
                   <a:txBody>
-                    <a:bodyPr wrap="square"/>
+                    <a:bodyPr/>
                     <a:lstStyle/>
                     <a:p>
                       <a:pPr algn="l"/>
@@ -16328,23 +16000,11 @@
                     <a:solidFill>
                       <a:srgbClr val="141B45"/>
                     </a:solidFill>
-                    <a:lnL w="0" cap="flat" cmpd="sng">
-                      <a:noFill/>
-                    </a:lnL>
-                    <a:lnR w="0" cap="flat" cmpd="sng">
-                      <a:noFill/>
-                    </a:lnR>
-                    <a:lnT w="0" cap="flat" cmpd="sng">
-                      <a:noFill/>
-                    </a:lnT>
-                    <a:lnB w="0" cap="flat" cmpd="sng">
-                      <a:noFill/>
-                    </a:lnB>
                   </a:tcPr>
                 </a:tc>
                 <a:tc>
                   <a:txBody>
-                    <a:bodyPr wrap="square"/>
+                    <a:bodyPr/>
                     <a:lstStyle/>
                     <a:p>
                       <a:pPr algn="l"/>
@@ -16363,25 +16023,18 @@
                     <a:solidFill>
                       <a:srgbClr val="141B45"/>
                     </a:solidFill>
-                    <a:lnL w="0" cap="flat" cmpd="sng">
-                      <a:noFill/>
-                    </a:lnL>
-                    <a:lnR w="0" cap="flat" cmpd="sng">
-                      <a:noFill/>
-                    </a:lnR>
-                    <a:lnT w="0" cap="flat" cmpd="sng">
-                      <a:noFill/>
-                    </a:lnT>
-                    <a:lnB w="0" cap="flat" cmpd="sng">
-                      <a:noFill/>
-                    </a:lnB>
                   </a:tcPr>
                 </a:tc>
+                <a:extLst>
+                  <a:ext uri="{0D108BD9-81ED-4DB2-BD59-A6C34878D82A}">
+                    <a16:rowId xmlns:a16="http://schemas.microsoft.com/office/drawing/2014/main" val="10000"/>
+                  </a:ext>
+                </a:extLst>
               </a:tr>
               <a:tr h="365760">
                 <a:tc>
                   <a:txBody>
-                    <a:bodyPr wrap="square"/>
+                    <a:bodyPr/>
                     <a:lstStyle/>
                     <a:p>
                       <a:pPr algn="l"/>
@@ -16400,23 +16053,11 @@
                     <a:solidFill>
                       <a:srgbClr val="FFFFFF"/>
                     </a:solidFill>
-                    <a:lnL w="0" cap="flat" cmpd="sng">
-                      <a:noFill/>
-                    </a:lnL>
-                    <a:lnR w="0" cap="flat" cmpd="sng">
-                      <a:noFill/>
-                    </a:lnR>
-                    <a:lnT w="0" cap="flat" cmpd="sng">
-                      <a:noFill/>
-                    </a:lnT>
-                    <a:lnB w="0" cap="flat" cmpd="sng">
-                      <a:noFill/>
-                    </a:lnB>
                   </a:tcPr>
                 </a:tc>
                 <a:tc>
                   <a:txBody>
-                    <a:bodyPr wrap="square"/>
+                    <a:bodyPr/>
                     <a:lstStyle/>
                     <a:p>
                       <a:pPr algn="l"/>
@@ -16435,25 +16076,18 @@
                     <a:solidFill>
                       <a:srgbClr val="FFFFFF"/>
                     </a:solidFill>
-                    <a:lnL w="0" cap="flat" cmpd="sng">
-                      <a:noFill/>
-                    </a:lnL>
-                    <a:lnR w="0" cap="flat" cmpd="sng">
-                      <a:noFill/>
-                    </a:lnR>
-                    <a:lnT w="0" cap="flat" cmpd="sng">
-                      <a:noFill/>
-                    </a:lnT>
-                    <a:lnB w="0" cap="flat" cmpd="sng">
-                      <a:noFill/>
-                    </a:lnB>
                   </a:tcPr>
                 </a:tc>
+                <a:extLst>
+                  <a:ext uri="{0D108BD9-81ED-4DB2-BD59-A6C34878D82A}">
+                    <a16:rowId xmlns:a16="http://schemas.microsoft.com/office/drawing/2014/main" val="10001"/>
+                  </a:ext>
+                </a:extLst>
               </a:tr>
               <a:tr h="365760">
                 <a:tc>
                   <a:txBody>
-                    <a:bodyPr wrap="square"/>
+                    <a:bodyPr/>
                     <a:lstStyle/>
                     <a:p>
                       <a:pPr algn="l"/>
@@ -16472,23 +16106,11 @@
                     <a:solidFill>
                       <a:srgbClr val="E8EDF9"/>
                     </a:solidFill>
-                    <a:lnL w="0" cap="flat" cmpd="sng">
-                      <a:noFill/>
-                    </a:lnL>
-                    <a:lnR w="0" cap="flat" cmpd="sng">
-                      <a:noFill/>
-                    </a:lnR>
-                    <a:lnT w="0" cap="flat" cmpd="sng">
-                      <a:noFill/>
-                    </a:lnT>
-                    <a:lnB w="0" cap="flat" cmpd="sng">
-                      <a:noFill/>
-                    </a:lnB>
                   </a:tcPr>
                 </a:tc>
                 <a:tc>
                   <a:txBody>
-                    <a:bodyPr wrap="square"/>
+                    <a:bodyPr/>
                     <a:lstStyle/>
                     <a:p>
                       <a:pPr algn="l"/>
@@ -16507,25 +16129,18 @@
                     <a:solidFill>
                       <a:srgbClr val="E8EDF9"/>
                     </a:solidFill>
-                    <a:lnL w="0" cap="flat" cmpd="sng">
-                      <a:noFill/>
-                    </a:lnL>
-                    <a:lnR w="0" cap="flat" cmpd="sng">
-                      <a:noFill/>
-                    </a:lnR>
-                    <a:lnT w="0" cap="flat" cmpd="sng">
-                      <a:noFill/>
-                    </a:lnT>
-                    <a:lnB w="0" cap="flat" cmpd="sng">
-                      <a:noFill/>
-                    </a:lnB>
                   </a:tcPr>
                 </a:tc>
+                <a:extLst>
+                  <a:ext uri="{0D108BD9-81ED-4DB2-BD59-A6C34878D82A}">
+                    <a16:rowId xmlns:a16="http://schemas.microsoft.com/office/drawing/2014/main" val="10002"/>
+                  </a:ext>
+                </a:extLst>
               </a:tr>
               <a:tr h="365760">
                 <a:tc>
                   <a:txBody>
-                    <a:bodyPr wrap="square"/>
+                    <a:bodyPr/>
                     <a:lstStyle/>
                     <a:p>
                       <a:pPr algn="l"/>
@@ -16544,23 +16159,11 @@
                     <a:solidFill>
                       <a:srgbClr val="FFFFFF"/>
                     </a:solidFill>
-                    <a:lnL w="0" cap="flat" cmpd="sng">
-                      <a:noFill/>
-                    </a:lnL>
-                    <a:lnR w="0" cap="flat" cmpd="sng">
-                      <a:noFill/>
-                    </a:lnR>
-                    <a:lnT w="0" cap="flat" cmpd="sng">
-                      <a:noFill/>
-                    </a:lnT>
-                    <a:lnB w="0" cap="flat" cmpd="sng">
-                      <a:noFill/>
-                    </a:lnB>
                   </a:tcPr>
                 </a:tc>
                 <a:tc>
                   <a:txBody>
-                    <a:bodyPr wrap="square"/>
+                    <a:bodyPr/>
                     <a:lstStyle/>
                     <a:p>
                       <a:pPr algn="l"/>
@@ -16579,25 +16182,18 @@
                     <a:solidFill>
                       <a:srgbClr val="FFFFFF"/>
                     </a:solidFill>
-                    <a:lnL w="0" cap="flat" cmpd="sng">
-                      <a:noFill/>
-                    </a:lnL>
-                    <a:lnR w="0" cap="flat" cmpd="sng">
-                      <a:noFill/>
-                    </a:lnR>
-                    <a:lnT w="0" cap="flat" cmpd="sng">
-                      <a:noFill/>
-                    </a:lnT>
-                    <a:lnB w="0" cap="flat" cmpd="sng">
-                      <a:noFill/>
-                    </a:lnB>
                   </a:tcPr>
                 </a:tc>
+                <a:extLst>
+                  <a:ext uri="{0D108BD9-81ED-4DB2-BD59-A6C34878D82A}">
+                    <a16:rowId xmlns:a16="http://schemas.microsoft.com/office/drawing/2014/main" val="10003"/>
+                  </a:ext>
+                </a:extLst>
               </a:tr>
               <a:tr h="365760">
                 <a:tc>
                   <a:txBody>
-                    <a:bodyPr wrap="square"/>
+                    <a:bodyPr/>
                     <a:lstStyle/>
                     <a:p>
                       <a:pPr algn="l"/>
@@ -16616,23 +16212,11 @@
                     <a:solidFill>
                       <a:srgbClr val="E8EDF9"/>
                     </a:solidFill>
-                    <a:lnL w="0" cap="flat" cmpd="sng">
-                      <a:noFill/>
-                    </a:lnL>
-                    <a:lnR w="0" cap="flat" cmpd="sng">
-                      <a:noFill/>
-                    </a:lnR>
-                    <a:lnT w="0" cap="flat" cmpd="sng">
-                      <a:noFill/>
-                    </a:lnT>
-                    <a:lnB w="0" cap="flat" cmpd="sng">
-                      <a:noFill/>
-                    </a:lnB>
                   </a:tcPr>
                 </a:tc>
                 <a:tc>
                   <a:txBody>
-                    <a:bodyPr wrap="square"/>
+                    <a:bodyPr/>
                     <a:lstStyle/>
                     <a:p>
                       <a:pPr algn="l"/>
@@ -16651,25 +16235,18 @@
                     <a:solidFill>
                       <a:srgbClr val="E8EDF9"/>
                     </a:solidFill>
-                    <a:lnL w="0" cap="flat" cmpd="sng">
-                      <a:noFill/>
-                    </a:lnL>
-                    <a:lnR w="0" cap="flat" cmpd="sng">
-                      <a:noFill/>
-                    </a:lnR>
-                    <a:lnT w="0" cap="flat" cmpd="sng">
-                      <a:noFill/>
-                    </a:lnT>
-                    <a:lnB w="0" cap="flat" cmpd="sng">
-                      <a:noFill/>
-                    </a:lnB>
                   </a:tcPr>
                 </a:tc>
+                <a:extLst>
+                  <a:ext uri="{0D108BD9-81ED-4DB2-BD59-A6C34878D82A}">
+                    <a16:rowId xmlns:a16="http://schemas.microsoft.com/office/drawing/2014/main" val="10004"/>
+                  </a:ext>
+                </a:extLst>
               </a:tr>
               <a:tr h="365760">
                 <a:tc>
                   <a:txBody>
-                    <a:bodyPr wrap="square"/>
+                    <a:bodyPr/>
                     <a:lstStyle/>
                     <a:p>
                       <a:pPr algn="l"/>
@@ -16688,23 +16265,11 @@
                     <a:solidFill>
                       <a:srgbClr val="FFFFFF"/>
                     </a:solidFill>
-                    <a:lnL w="0" cap="flat" cmpd="sng">
-                      <a:noFill/>
-                    </a:lnL>
-                    <a:lnR w="0" cap="flat" cmpd="sng">
-                      <a:noFill/>
-                    </a:lnR>
-                    <a:lnT w="0" cap="flat" cmpd="sng">
-                      <a:noFill/>
-                    </a:lnT>
-                    <a:lnB w="0" cap="flat" cmpd="sng">
-                      <a:noFill/>
-                    </a:lnB>
                   </a:tcPr>
                 </a:tc>
                 <a:tc>
                   <a:txBody>
-                    <a:bodyPr wrap="square"/>
+                    <a:bodyPr/>
                     <a:lstStyle/>
                     <a:p>
                       <a:pPr algn="l"/>
@@ -16723,25 +16288,18 @@
                     <a:solidFill>
                       <a:srgbClr val="FFFFFF"/>
                     </a:solidFill>
-                    <a:lnL w="0" cap="flat" cmpd="sng">
-                      <a:noFill/>
-                    </a:lnL>
-                    <a:lnR w="0" cap="flat" cmpd="sng">
-                      <a:noFill/>
-                    </a:lnR>
-                    <a:lnT w="0" cap="flat" cmpd="sng">
-                      <a:noFill/>
-                    </a:lnT>
-                    <a:lnB w="0" cap="flat" cmpd="sng">
-                      <a:noFill/>
-                    </a:lnB>
                   </a:tcPr>
                 </a:tc>
+                <a:extLst>
+                  <a:ext uri="{0D108BD9-81ED-4DB2-BD59-A6C34878D82A}">
+                    <a16:rowId xmlns:a16="http://schemas.microsoft.com/office/drawing/2014/main" val="10005"/>
+                  </a:ext>
+                </a:extLst>
               </a:tr>
               <a:tr h="365760">
                 <a:tc>
                   <a:txBody>
-                    <a:bodyPr wrap="square"/>
+                    <a:bodyPr/>
                     <a:lstStyle/>
                     <a:p>
                       <a:pPr algn="l"/>
@@ -16760,23 +16318,11 @@
                     <a:solidFill>
                       <a:srgbClr val="E8EDF9"/>
                     </a:solidFill>
-                    <a:lnL w="0" cap="flat" cmpd="sng">
-                      <a:noFill/>
-                    </a:lnL>
-                    <a:lnR w="0" cap="flat" cmpd="sng">
-                      <a:noFill/>
-                    </a:lnR>
-                    <a:lnT w="0" cap="flat" cmpd="sng">
-                      <a:noFill/>
-                    </a:lnT>
-                    <a:lnB w="0" cap="flat" cmpd="sng">
-                      <a:noFill/>
-                    </a:lnB>
                   </a:tcPr>
                 </a:tc>
                 <a:tc>
                   <a:txBody>
-                    <a:bodyPr wrap="square"/>
+                    <a:bodyPr/>
                     <a:lstStyle/>
                     <a:p>
                       <a:pPr algn="l"/>
@@ -16795,20 +16341,13 @@
                     <a:solidFill>
                       <a:srgbClr val="E8EDF9"/>
                     </a:solidFill>
-                    <a:lnL w="0" cap="flat" cmpd="sng">
-                      <a:noFill/>
-                    </a:lnL>
-                    <a:lnR w="0" cap="flat" cmpd="sng">
-                      <a:noFill/>
-                    </a:lnR>
-                    <a:lnT w="0" cap="flat" cmpd="sng">
-                      <a:noFill/>
-                    </a:lnT>
-                    <a:lnB w="0" cap="flat" cmpd="sng">
-                      <a:noFill/>
-                    </a:lnB>
                   </a:tcPr>
                 </a:tc>
+                <a:extLst>
+                  <a:ext uri="{0D108BD9-81ED-4DB2-BD59-A6C34878D82A}">
+                    <a16:rowId xmlns:a16="http://schemas.microsoft.com/office/drawing/2014/main" val="10006"/>
+                  </a:ext>
+                </a:extLst>
               </a:tr>
             </a:tbl>
           </a:graphicData>
@@ -16854,6 +16393,7 @@
           <a:lstStyle/>
           <a:p>
             <a:pPr algn="ctr"/>
+            <a:endParaRPr/>
           </a:p>
         </p:txBody>
       </p:sp>
@@ -16897,6 +16437,7 @@
           <a:lstStyle/>
           <a:p>
             <a:pPr algn="ctr"/>
+            <a:endParaRPr/>
           </a:p>
         </p:txBody>
       </p:sp>
@@ -17016,6 +16557,7 @@
           <a:lstStyle/>
           <a:p>
             <a:pPr algn="ctr"/>
+            <a:endParaRPr/>
           </a:p>
         </p:txBody>
       </p:sp>
@@ -17059,6 +16601,7 @@
           <a:lstStyle/>
           <a:p>
             <a:pPr algn="ctr"/>
+            <a:endParaRPr/>
           </a:p>
         </p:txBody>
       </p:sp>
@@ -17178,6 +16721,7 @@
           <a:lstStyle/>
           <a:p>
             <a:pPr algn="ctr"/>
+            <a:endParaRPr/>
           </a:p>
         </p:txBody>
       </p:sp>
@@ -17221,6 +16765,7 @@
           <a:lstStyle/>
           <a:p>
             <a:pPr algn="ctr"/>
+            <a:endParaRPr/>
           </a:p>
         </p:txBody>
       </p:sp>
@@ -17309,7 +16854,7 @@
 </file>
 
 <file path=ppt/slides/slide5.xml><?xml version="1.0" encoding="utf-8"?>
-<p:sld xmlns:a="http://schemas.openxmlformats.org/drawingml/2006/main" xmlns:p="http://schemas.openxmlformats.org/presentationml/2006/main" xmlns:r="http://schemas.openxmlformats.org/officeDocument/2006/relationships">
+<p:sld xmlns:a="http://schemas.openxmlformats.org/drawingml/2006/main" xmlns:r="http://schemas.openxmlformats.org/officeDocument/2006/relationships" xmlns:p="http://schemas.openxmlformats.org/presentationml/2006/main">
   <p:cSld>
     <p:spTree>
       <p:nvGrpSpPr>
@@ -17317,7 +16862,14 @@
         <p:cNvGrpSpPr/>
         <p:nvPr/>
       </p:nvGrpSpPr>
-      <p:grpSpPr/>
+      <p:grpSpPr>
+        <a:xfrm>
+          <a:off x="0" y="0"/>
+          <a:ext cx="0" cy="0"/>
+          <a:chOff x="0" y="0"/>
+          <a:chExt cx="0" cy="0"/>
+        </a:xfrm>
+      </p:grpSpPr>
       <p:sp>
         <p:nvSpPr>
           <p:cNvPr id="2" name="Rectangle 1"/>
@@ -17358,6 +16910,7 @@
           <a:lstStyle/>
           <a:p>
             <a:pPr algn="ctr"/>
+            <a:endParaRPr/>
           </a:p>
         </p:txBody>
       </p:sp>
@@ -17401,6 +16954,7 @@
           <a:lstStyle/>
           <a:p>
             <a:pPr algn="ctr"/>
+            <a:endParaRPr/>
           </a:p>
         </p:txBody>
       </p:sp>
@@ -17444,6 +16998,7 @@
           <a:lstStyle/>
           <a:p>
             <a:pPr algn="ctr"/>
+            <a:endParaRPr/>
           </a:p>
         </p:txBody>
       </p:sp>
@@ -17618,13 +17173,25 @@
                 <a:tableStyleId>{5C22544A-7EE6-4342-B048-85BDC9FD1C3A}</a:tableStyleId>
               </a:tblPr>
               <a:tblGrid>
-                <a:gridCol w="3657600"/>
-                <a:gridCol w="7589520"/>
+                <a:gridCol w="3657600">
+                  <a:extLst>
+                    <a:ext uri="{9D8B030D-6E8A-4147-A177-3AD203B41FA5}">
+                      <a16:colId xmlns:a16="http://schemas.microsoft.com/office/drawing/2014/main" val="20000"/>
+                    </a:ext>
+                  </a:extLst>
+                </a:gridCol>
+                <a:gridCol w="7589520">
+                  <a:extLst>
+                    <a:ext uri="{9D8B030D-6E8A-4147-A177-3AD203B41FA5}">
+                      <a16:colId xmlns:a16="http://schemas.microsoft.com/office/drawing/2014/main" val="20001"/>
+                    </a:ext>
+                  </a:extLst>
+                </a:gridCol>
               </a:tblGrid>
               <a:tr h="365760">
                 <a:tc>
                   <a:txBody>
-                    <a:bodyPr wrap="square"/>
+                    <a:bodyPr/>
                     <a:lstStyle/>
                     <a:p>
                       <a:pPr algn="l"/>
@@ -17643,23 +17210,11 @@
                     <a:solidFill>
                       <a:srgbClr val="141B45"/>
                     </a:solidFill>
-                    <a:lnL w="0" cap="flat" cmpd="sng">
-                      <a:noFill/>
-                    </a:lnL>
-                    <a:lnR w="0" cap="flat" cmpd="sng">
-                      <a:noFill/>
-                    </a:lnR>
-                    <a:lnT w="0" cap="flat" cmpd="sng">
-                      <a:noFill/>
-                    </a:lnT>
-                    <a:lnB w="0" cap="flat" cmpd="sng">
-                      <a:noFill/>
-                    </a:lnB>
                   </a:tcPr>
                 </a:tc>
                 <a:tc>
                   <a:txBody>
-                    <a:bodyPr wrap="square"/>
+                    <a:bodyPr/>
                     <a:lstStyle/>
                     <a:p>
                       <a:pPr algn="l"/>
@@ -17678,25 +17233,18 @@
                     <a:solidFill>
                       <a:srgbClr val="141B45"/>
                     </a:solidFill>
-                    <a:lnL w="0" cap="flat" cmpd="sng">
-                      <a:noFill/>
-                    </a:lnL>
-                    <a:lnR w="0" cap="flat" cmpd="sng">
-                      <a:noFill/>
-                    </a:lnR>
-                    <a:lnT w="0" cap="flat" cmpd="sng">
-                      <a:noFill/>
-                    </a:lnT>
-                    <a:lnB w="0" cap="flat" cmpd="sng">
-                      <a:noFill/>
-                    </a:lnB>
                   </a:tcPr>
                 </a:tc>
+                <a:extLst>
+                  <a:ext uri="{0D108BD9-81ED-4DB2-BD59-A6C34878D82A}">
+                    <a16:rowId xmlns:a16="http://schemas.microsoft.com/office/drawing/2014/main" val="10000"/>
+                  </a:ext>
+                </a:extLst>
               </a:tr>
               <a:tr h="365760">
                 <a:tc>
                   <a:txBody>
-                    <a:bodyPr wrap="square"/>
+                    <a:bodyPr/>
                     <a:lstStyle/>
                     <a:p>
                       <a:pPr algn="l"/>
@@ -17715,23 +17263,11 @@
                     <a:solidFill>
                       <a:srgbClr val="FFFFFF"/>
                     </a:solidFill>
-                    <a:lnL w="0" cap="flat" cmpd="sng">
-                      <a:noFill/>
-                    </a:lnL>
-                    <a:lnR w="0" cap="flat" cmpd="sng">
-                      <a:noFill/>
-                    </a:lnR>
-                    <a:lnT w="0" cap="flat" cmpd="sng">
-                      <a:noFill/>
-                    </a:lnT>
-                    <a:lnB w="0" cap="flat" cmpd="sng">
-                      <a:noFill/>
-                    </a:lnB>
                   </a:tcPr>
                 </a:tc>
                 <a:tc>
                   <a:txBody>
-                    <a:bodyPr wrap="square"/>
+                    <a:bodyPr/>
                     <a:lstStyle/>
                     <a:p>
                       <a:pPr algn="l"/>
@@ -17750,25 +17286,18 @@
                     <a:solidFill>
                       <a:srgbClr val="FFFFFF"/>
                     </a:solidFill>
-                    <a:lnL w="0" cap="flat" cmpd="sng">
-                      <a:noFill/>
-                    </a:lnL>
-                    <a:lnR w="0" cap="flat" cmpd="sng">
-                      <a:noFill/>
-                    </a:lnR>
-                    <a:lnT w="0" cap="flat" cmpd="sng">
-                      <a:noFill/>
-                    </a:lnT>
-                    <a:lnB w="0" cap="flat" cmpd="sng">
-                      <a:noFill/>
-                    </a:lnB>
                   </a:tcPr>
                 </a:tc>
+                <a:extLst>
+                  <a:ext uri="{0D108BD9-81ED-4DB2-BD59-A6C34878D82A}">
+                    <a16:rowId xmlns:a16="http://schemas.microsoft.com/office/drawing/2014/main" val="10001"/>
+                  </a:ext>
+                </a:extLst>
               </a:tr>
               <a:tr h="365760">
                 <a:tc>
                   <a:txBody>
-                    <a:bodyPr wrap="square"/>
+                    <a:bodyPr/>
                     <a:lstStyle/>
                     <a:p>
                       <a:pPr algn="l"/>
@@ -17787,23 +17316,11 @@
                     <a:solidFill>
                       <a:srgbClr val="E8EDF9"/>
                     </a:solidFill>
-                    <a:lnL w="0" cap="flat" cmpd="sng">
-                      <a:noFill/>
-                    </a:lnL>
-                    <a:lnR w="0" cap="flat" cmpd="sng">
-                      <a:noFill/>
-                    </a:lnR>
-                    <a:lnT w="0" cap="flat" cmpd="sng">
-                      <a:noFill/>
-                    </a:lnT>
-                    <a:lnB w="0" cap="flat" cmpd="sng">
-                      <a:noFill/>
-                    </a:lnB>
                   </a:tcPr>
                 </a:tc>
                 <a:tc>
                   <a:txBody>
-                    <a:bodyPr wrap="square"/>
+                    <a:bodyPr/>
                     <a:lstStyle/>
                     <a:p>
                       <a:pPr algn="l"/>
@@ -17822,25 +17339,18 @@
                     <a:solidFill>
                       <a:srgbClr val="E8EDF9"/>
                     </a:solidFill>
-                    <a:lnL w="0" cap="flat" cmpd="sng">
-                      <a:noFill/>
-                    </a:lnL>
-                    <a:lnR w="0" cap="flat" cmpd="sng">
-                      <a:noFill/>
-                    </a:lnR>
-                    <a:lnT w="0" cap="flat" cmpd="sng">
-                      <a:noFill/>
-                    </a:lnT>
-                    <a:lnB w="0" cap="flat" cmpd="sng">
-                      <a:noFill/>
-                    </a:lnB>
                   </a:tcPr>
                 </a:tc>
+                <a:extLst>
+                  <a:ext uri="{0D108BD9-81ED-4DB2-BD59-A6C34878D82A}">
+                    <a16:rowId xmlns:a16="http://schemas.microsoft.com/office/drawing/2014/main" val="10002"/>
+                  </a:ext>
+                </a:extLst>
               </a:tr>
               <a:tr h="365760">
                 <a:tc>
                   <a:txBody>
-                    <a:bodyPr wrap="square"/>
+                    <a:bodyPr/>
                     <a:lstStyle/>
                     <a:p>
                       <a:pPr algn="l"/>
@@ -17859,23 +17369,11 @@
                     <a:solidFill>
                       <a:srgbClr val="FFFFFF"/>
                     </a:solidFill>
-                    <a:lnL w="0" cap="flat" cmpd="sng">
-                      <a:noFill/>
-                    </a:lnL>
-                    <a:lnR w="0" cap="flat" cmpd="sng">
-                      <a:noFill/>
-                    </a:lnR>
-                    <a:lnT w="0" cap="flat" cmpd="sng">
-                      <a:noFill/>
-                    </a:lnT>
-                    <a:lnB w="0" cap="flat" cmpd="sng">
-                      <a:noFill/>
-                    </a:lnB>
                   </a:tcPr>
                 </a:tc>
                 <a:tc>
                   <a:txBody>
-                    <a:bodyPr wrap="square"/>
+                    <a:bodyPr/>
                     <a:lstStyle/>
                     <a:p>
                       <a:pPr algn="l"/>
@@ -17894,25 +17392,18 @@
                     <a:solidFill>
                       <a:srgbClr val="FFFFFF"/>
                     </a:solidFill>
-                    <a:lnL w="0" cap="flat" cmpd="sng">
-                      <a:noFill/>
-                    </a:lnL>
-                    <a:lnR w="0" cap="flat" cmpd="sng">
-                      <a:noFill/>
-                    </a:lnR>
-                    <a:lnT w="0" cap="flat" cmpd="sng">
-                      <a:noFill/>
-                    </a:lnT>
-                    <a:lnB w="0" cap="flat" cmpd="sng">
-                      <a:noFill/>
-                    </a:lnB>
                   </a:tcPr>
                 </a:tc>
+                <a:extLst>
+                  <a:ext uri="{0D108BD9-81ED-4DB2-BD59-A6C34878D82A}">
+                    <a16:rowId xmlns:a16="http://schemas.microsoft.com/office/drawing/2014/main" val="10003"/>
+                  </a:ext>
+                </a:extLst>
               </a:tr>
               <a:tr h="365760">
                 <a:tc>
                   <a:txBody>
-                    <a:bodyPr wrap="square"/>
+                    <a:bodyPr/>
                     <a:lstStyle/>
                     <a:p>
                       <a:pPr algn="l"/>
@@ -17931,23 +17422,11 @@
                     <a:solidFill>
                       <a:srgbClr val="E8EDF9"/>
                     </a:solidFill>
-                    <a:lnL w="0" cap="flat" cmpd="sng">
-                      <a:noFill/>
-                    </a:lnL>
-                    <a:lnR w="0" cap="flat" cmpd="sng">
-                      <a:noFill/>
-                    </a:lnR>
-                    <a:lnT w="0" cap="flat" cmpd="sng">
-                      <a:noFill/>
-                    </a:lnT>
-                    <a:lnB w="0" cap="flat" cmpd="sng">
-                      <a:noFill/>
-                    </a:lnB>
                   </a:tcPr>
                 </a:tc>
                 <a:tc>
                   <a:txBody>
-                    <a:bodyPr wrap="square"/>
+                    <a:bodyPr/>
                     <a:lstStyle/>
                     <a:p>
                       <a:pPr algn="l"/>
@@ -17966,25 +17445,18 @@
                     <a:solidFill>
                       <a:srgbClr val="E8EDF9"/>
                     </a:solidFill>
-                    <a:lnL w="0" cap="flat" cmpd="sng">
-                      <a:noFill/>
-                    </a:lnL>
-                    <a:lnR w="0" cap="flat" cmpd="sng">
-                      <a:noFill/>
-                    </a:lnR>
-                    <a:lnT w="0" cap="flat" cmpd="sng">
-                      <a:noFill/>
-                    </a:lnT>
-                    <a:lnB w="0" cap="flat" cmpd="sng">
-                      <a:noFill/>
-                    </a:lnB>
                   </a:tcPr>
                 </a:tc>
+                <a:extLst>
+                  <a:ext uri="{0D108BD9-81ED-4DB2-BD59-A6C34878D82A}">
+                    <a16:rowId xmlns:a16="http://schemas.microsoft.com/office/drawing/2014/main" val="10004"/>
+                  </a:ext>
+                </a:extLst>
               </a:tr>
               <a:tr h="365760">
                 <a:tc>
                   <a:txBody>
-                    <a:bodyPr wrap="square"/>
+                    <a:bodyPr/>
                     <a:lstStyle/>
                     <a:p>
                       <a:pPr algn="l"/>
@@ -18003,23 +17475,11 @@
                     <a:solidFill>
                       <a:srgbClr val="FFFFFF"/>
                     </a:solidFill>
-                    <a:lnL w="0" cap="flat" cmpd="sng">
-                      <a:noFill/>
-                    </a:lnL>
-                    <a:lnR w="0" cap="flat" cmpd="sng">
-                      <a:noFill/>
-                    </a:lnR>
-                    <a:lnT w="0" cap="flat" cmpd="sng">
-                      <a:noFill/>
-                    </a:lnT>
-                    <a:lnB w="0" cap="flat" cmpd="sng">
-                      <a:noFill/>
-                    </a:lnB>
                   </a:tcPr>
                 </a:tc>
                 <a:tc>
                   <a:txBody>
-                    <a:bodyPr wrap="square"/>
+                    <a:bodyPr/>
                     <a:lstStyle/>
                     <a:p>
                       <a:pPr algn="l"/>
@@ -18038,25 +17498,18 @@
                     <a:solidFill>
                       <a:srgbClr val="FFFFFF"/>
                     </a:solidFill>
-                    <a:lnL w="0" cap="flat" cmpd="sng">
-                      <a:noFill/>
-                    </a:lnL>
-                    <a:lnR w="0" cap="flat" cmpd="sng">
-                      <a:noFill/>
-                    </a:lnR>
-                    <a:lnT w="0" cap="flat" cmpd="sng">
-                      <a:noFill/>
-                    </a:lnT>
-                    <a:lnB w="0" cap="flat" cmpd="sng">
-                      <a:noFill/>
-                    </a:lnB>
                   </a:tcPr>
                 </a:tc>
+                <a:extLst>
+                  <a:ext uri="{0D108BD9-81ED-4DB2-BD59-A6C34878D82A}">
+                    <a16:rowId xmlns:a16="http://schemas.microsoft.com/office/drawing/2014/main" val="10005"/>
+                  </a:ext>
+                </a:extLst>
               </a:tr>
               <a:tr h="365760">
                 <a:tc>
                   <a:txBody>
-                    <a:bodyPr wrap="square"/>
+                    <a:bodyPr/>
                     <a:lstStyle/>
                     <a:p>
                       <a:pPr algn="l"/>
@@ -18075,23 +17528,11 @@
                     <a:solidFill>
                       <a:srgbClr val="E8EDF9"/>
                     </a:solidFill>
-                    <a:lnL w="0" cap="flat" cmpd="sng">
-                      <a:noFill/>
-                    </a:lnL>
-                    <a:lnR w="0" cap="flat" cmpd="sng">
-                      <a:noFill/>
-                    </a:lnR>
-                    <a:lnT w="0" cap="flat" cmpd="sng">
-                      <a:noFill/>
-                    </a:lnT>
-                    <a:lnB w="0" cap="flat" cmpd="sng">
-                      <a:noFill/>
-                    </a:lnB>
                   </a:tcPr>
                 </a:tc>
                 <a:tc>
                   <a:txBody>
-                    <a:bodyPr wrap="square"/>
+                    <a:bodyPr/>
                     <a:lstStyle/>
                     <a:p>
                       <a:pPr algn="l"/>
@@ -18110,25 +17551,18 @@
                     <a:solidFill>
                       <a:srgbClr val="E8EDF9"/>
                     </a:solidFill>
-                    <a:lnL w="0" cap="flat" cmpd="sng">
-                      <a:noFill/>
-                    </a:lnL>
-                    <a:lnR w="0" cap="flat" cmpd="sng">
-                      <a:noFill/>
-                    </a:lnR>
-                    <a:lnT w="0" cap="flat" cmpd="sng">
-                      <a:noFill/>
-                    </a:lnT>
-                    <a:lnB w="0" cap="flat" cmpd="sng">
-                      <a:noFill/>
-                    </a:lnB>
                   </a:tcPr>
                 </a:tc>
+                <a:extLst>
+                  <a:ext uri="{0D108BD9-81ED-4DB2-BD59-A6C34878D82A}">
+                    <a16:rowId xmlns:a16="http://schemas.microsoft.com/office/drawing/2014/main" val="10006"/>
+                  </a:ext>
+                </a:extLst>
               </a:tr>
               <a:tr h="365760">
                 <a:tc>
                   <a:txBody>
-                    <a:bodyPr wrap="square"/>
+                    <a:bodyPr/>
                     <a:lstStyle/>
                     <a:p>
                       <a:pPr algn="l"/>
@@ -18147,23 +17581,11 @@
                     <a:solidFill>
                       <a:srgbClr val="FFFFFF"/>
                     </a:solidFill>
-                    <a:lnL w="0" cap="flat" cmpd="sng">
-                      <a:noFill/>
-                    </a:lnL>
-                    <a:lnR w="0" cap="flat" cmpd="sng">
-                      <a:noFill/>
-                    </a:lnR>
-                    <a:lnT w="0" cap="flat" cmpd="sng">
-                      <a:noFill/>
-                    </a:lnT>
-                    <a:lnB w="0" cap="flat" cmpd="sng">
-                      <a:noFill/>
-                    </a:lnB>
                   </a:tcPr>
                 </a:tc>
                 <a:tc>
                   <a:txBody>
-                    <a:bodyPr wrap="square"/>
+                    <a:bodyPr/>
                     <a:lstStyle/>
                     <a:p>
                       <a:pPr algn="l"/>
@@ -18182,25 +17604,18 @@
                     <a:solidFill>
                       <a:srgbClr val="FFFFFF"/>
                     </a:solidFill>
-                    <a:lnL w="0" cap="flat" cmpd="sng">
-                      <a:noFill/>
-                    </a:lnL>
-                    <a:lnR w="0" cap="flat" cmpd="sng">
-                      <a:noFill/>
-                    </a:lnR>
-                    <a:lnT w="0" cap="flat" cmpd="sng">
-                      <a:noFill/>
-                    </a:lnT>
-                    <a:lnB w="0" cap="flat" cmpd="sng">
-                      <a:noFill/>
-                    </a:lnB>
                   </a:tcPr>
                 </a:tc>
+                <a:extLst>
+                  <a:ext uri="{0D108BD9-81ED-4DB2-BD59-A6C34878D82A}">
+                    <a16:rowId xmlns:a16="http://schemas.microsoft.com/office/drawing/2014/main" val="10007"/>
+                  </a:ext>
+                </a:extLst>
               </a:tr>
               <a:tr h="365760">
                 <a:tc>
                   <a:txBody>
-                    <a:bodyPr wrap="square"/>
+                    <a:bodyPr/>
                     <a:lstStyle/>
                     <a:p>
                       <a:pPr algn="l"/>
@@ -18219,23 +17634,11 @@
                     <a:solidFill>
                       <a:srgbClr val="E8EDF9"/>
                     </a:solidFill>
-                    <a:lnL w="0" cap="flat" cmpd="sng">
-                      <a:noFill/>
-                    </a:lnL>
-                    <a:lnR w="0" cap="flat" cmpd="sng">
-                      <a:noFill/>
-                    </a:lnR>
-                    <a:lnT w="0" cap="flat" cmpd="sng">
-                      <a:noFill/>
-                    </a:lnT>
-                    <a:lnB w="0" cap="flat" cmpd="sng">
-                      <a:noFill/>
-                    </a:lnB>
                   </a:tcPr>
                 </a:tc>
                 <a:tc>
                   <a:txBody>
-                    <a:bodyPr wrap="square"/>
+                    <a:bodyPr/>
                     <a:lstStyle/>
                     <a:p>
                       <a:pPr algn="l"/>
@@ -18254,25 +17657,18 @@
                     <a:solidFill>
                       <a:srgbClr val="E8EDF9"/>
                     </a:solidFill>
-                    <a:lnL w="0" cap="flat" cmpd="sng">
-                      <a:noFill/>
-                    </a:lnL>
-                    <a:lnR w="0" cap="flat" cmpd="sng">
-                      <a:noFill/>
-                    </a:lnR>
-                    <a:lnT w="0" cap="flat" cmpd="sng">
-                      <a:noFill/>
-                    </a:lnT>
-                    <a:lnB w="0" cap="flat" cmpd="sng">
-                      <a:noFill/>
-                    </a:lnB>
                   </a:tcPr>
                 </a:tc>
+                <a:extLst>
+                  <a:ext uri="{0D108BD9-81ED-4DB2-BD59-A6C34878D82A}">
+                    <a16:rowId xmlns:a16="http://schemas.microsoft.com/office/drawing/2014/main" val="10008"/>
+                  </a:ext>
+                </a:extLst>
               </a:tr>
               <a:tr h="365760">
                 <a:tc>
                   <a:txBody>
-                    <a:bodyPr wrap="square"/>
+                    <a:bodyPr/>
                     <a:lstStyle/>
                     <a:p>
                       <a:pPr algn="l"/>
@@ -18291,23 +17687,11 @@
                     <a:solidFill>
                       <a:srgbClr val="FFFFFF"/>
                     </a:solidFill>
-                    <a:lnL w="0" cap="flat" cmpd="sng">
-                      <a:noFill/>
-                    </a:lnL>
-                    <a:lnR w="0" cap="flat" cmpd="sng">
-                      <a:noFill/>
-                    </a:lnR>
-                    <a:lnT w="0" cap="flat" cmpd="sng">
-                      <a:noFill/>
-                    </a:lnT>
-                    <a:lnB w="0" cap="flat" cmpd="sng">
-                      <a:noFill/>
-                    </a:lnB>
                   </a:tcPr>
                 </a:tc>
                 <a:tc>
                   <a:txBody>
-                    <a:bodyPr wrap="square"/>
+                    <a:bodyPr/>
                     <a:lstStyle/>
                     <a:p>
                       <a:pPr algn="l"/>
@@ -18326,20 +17710,13 @@
                     <a:solidFill>
                       <a:srgbClr val="FFFFFF"/>
                     </a:solidFill>
-                    <a:lnL w="0" cap="flat" cmpd="sng">
-                      <a:noFill/>
-                    </a:lnL>
-                    <a:lnR w="0" cap="flat" cmpd="sng">
-                      <a:noFill/>
-                    </a:lnR>
-                    <a:lnT w="0" cap="flat" cmpd="sng">
-                      <a:noFill/>
-                    </a:lnT>
-                    <a:lnB w="0" cap="flat" cmpd="sng">
-                      <a:noFill/>
-                    </a:lnB>
                   </a:tcPr>
                 </a:tc>
+                <a:extLst>
+                  <a:ext uri="{0D108BD9-81ED-4DB2-BD59-A6C34878D82A}">
+                    <a16:rowId xmlns:a16="http://schemas.microsoft.com/office/drawing/2014/main" val="10009"/>
+                  </a:ext>
+                </a:extLst>
               </a:tr>
             </a:tbl>
           </a:graphicData>
@@ -18385,6 +17762,7 @@
           <a:lstStyle/>
           <a:p>
             <a:pPr algn="ctr"/>
+            <a:endParaRPr/>
           </a:p>
         </p:txBody>
       </p:sp>
@@ -18428,6 +17806,7 @@
           <a:lstStyle/>
           <a:p>
             <a:pPr algn="ctr"/>
+            <a:endParaRPr/>
           </a:p>
         </p:txBody>
       </p:sp>
@@ -18547,6 +17926,7 @@
           <a:lstStyle/>
           <a:p>
             <a:pPr algn="ctr"/>
+            <a:endParaRPr/>
           </a:p>
         </p:txBody>
       </p:sp>
@@ -18590,6 +17970,7 @@
           <a:lstStyle/>
           <a:p>
             <a:pPr algn="ctr"/>
+            <a:endParaRPr/>
           </a:p>
         </p:txBody>
       </p:sp>
@@ -18678,7 +18059,7 @@
 </file>
 
 <file path=ppt/slides/slide6.xml><?xml version="1.0" encoding="utf-8"?>
-<p:sld xmlns:a="http://schemas.openxmlformats.org/drawingml/2006/main" xmlns:p="http://schemas.openxmlformats.org/presentationml/2006/main" xmlns:r="http://schemas.openxmlformats.org/officeDocument/2006/relationships">
+<p:sld xmlns:a="http://schemas.openxmlformats.org/drawingml/2006/main" xmlns:r="http://schemas.openxmlformats.org/officeDocument/2006/relationships" xmlns:p="http://schemas.openxmlformats.org/presentationml/2006/main">
   <p:cSld>
     <p:spTree>
       <p:nvGrpSpPr>
@@ -18686,7 +18067,14 @@
         <p:cNvGrpSpPr/>
         <p:nvPr/>
       </p:nvGrpSpPr>
-      <p:grpSpPr/>
+      <p:grpSpPr>
+        <a:xfrm>
+          <a:off x="0" y="0"/>
+          <a:ext cx="0" cy="0"/>
+          <a:chOff x="0" y="0"/>
+          <a:chExt cx="0" cy="0"/>
+        </a:xfrm>
+      </p:grpSpPr>
       <p:sp>
         <p:nvSpPr>
           <p:cNvPr id="2" name="Rectangle 1"/>
@@ -18727,6 +18115,7 @@
           <a:lstStyle/>
           <a:p>
             <a:pPr algn="ctr"/>
+            <a:endParaRPr/>
           </a:p>
         </p:txBody>
       </p:sp>
@@ -18770,6 +18159,7 @@
           <a:lstStyle/>
           <a:p>
             <a:pPr algn="ctr"/>
+            <a:endParaRPr/>
           </a:p>
         </p:txBody>
       </p:sp>
@@ -18813,6 +18203,7 @@
           <a:lstStyle/>
           <a:p>
             <a:pPr algn="ctr"/>
+            <a:endParaRPr/>
           </a:p>
         </p:txBody>
       </p:sp>
@@ -18987,18 +18378,60 @@
                 <a:tableStyleId>{5C22544A-7EE6-4342-B048-85BDC9FD1C3A}</a:tableStyleId>
               </a:tblPr>
               <a:tblGrid>
-                <a:gridCol w="2560320"/>
-                <a:gridCol w="1371600"/>
-                <a:gridCol w="1371600"/>
-                <a:gridCol w="1371600"/>
-                <a:gridCol w="1371600"/>
-                <a:gridCol w="1828800"/>
-                <a:gridCol w="1554480"/>
+                <a:gridCol w="2560320">
+                  <a:extLst>
+                    <a:ext uri="{9D8B030D-6E8A-4147-A177-3AD203B41FA5}">
+                      <a16:colId xmlns:a16="http://schemas.microsoft.com/office/drawing/2014/main" val="20000"/>
+                    </a:ext>
+                  </a:extLst>
+                </a:gridCol>
+                <a:gridCol w="1371600">
+                  <a:extLst>
+                    <a:ext uri="{9D8B030D-6E8A-4147-A177-3AD203B41FA5}">
+                      <a16:colId xmlns:a16="http://schemas.microsoft.com/office/drawing/2014/main" val="20001"/>
+                    </a:ext>
+                  </a:extLst>
+                </a:gridCol>
+                <a:gridCol w="1371600">
+                  <a:extLst>
+                    <a:ext uri="{9D8B030D-6E8A-4147-A177-3AD203B41FA5}">
+                      <a16:colId xmlns:a16="http://schemas.microsoft.com/office/drawing/2014/main" val="20002"/>
+                    </a:ext>
+                  </a:extLst>
+                </a:gridCol>
+                <a:gridCol w="1371600">
+                  <a:extLst>
+                    <a:ext uri="{9D8B030D-6E8A-4147-A177-3AD203B41FA5}">
+                      <a16:colId xmlns:a16="http://schemas.microsoft.com/office/drawing/2014/main" val="20003"/>
+                    </a:ext>
+                  </a:extLst>
+                </a:gridCol>
+                <a:gridCol w="1371600">
+                  <a:extLst>
+                    <a:ext uri="{9D8B030D-6E8A-4147-A177-3AD203B41FA5}">
+                      <a16:colId xmlns:a16="http://schemas.microsoft.com/office/drawing/2014/main" val="20004"/>
+                    </a:ext>
+                  </a:extLst>
+                </a:gridCol>
+                <a:gridCol w="1828800">
+                  <a:extLst>
+                    <a:ext uri="{9D8B030D-6E8A-4147-A177-3AD203B41FA5}">
+                      <a16:colId xmlns:a16="http://schemas.microsoft.com/office/drawing/2014/main" val="20005"/>
+                    </a:ext>
+                  </a:extLst>
+                </a:gridCol>
+                <a:gridCol w="1554480">
+                  <a:extLst>
+                    <a:ext uri="{9D8B030D-6E8A-4147-A177-3AD203B41FA5}">
+                      <a16:colId xmlns:a16="http://schemas.microsoft.com/office/drawing/2014/main" val="20006"/>
+                    </a:ext>
+                  </a:extLst>
+                </a:gridCol>
               </a:tblGrid>
               <a:tr h="365760">
                 <a:tc>
                   <a:txBody>
-                    <a:bodyPr wrap="square"/>
+                    <a:bodyPr/>
                     <a:lstStyle/>
                     <a:p>
                       <a:pPr algn="l"/>
@@ -19017,23 +18450,11 @@
                     <a:solidFill>
                       <a:srgbClr val="141B45"/>
                     </a:solidFill>
-                    <a:lnL w="0" cap="flat" cmpd="sng">
-                      <a:noFill/>
-                    </a:lnL>
-                    <a:lnR w="0" cap="flat" cmpd="sng">
-                      <a:noFill/>
-                    </a:lnR>
-                    <a:lnT w="0" cap="flat" cmpd="sng">
-                      <a:noFill/>
-                    </a:lnT>
-                    <a:lnB w="0" cap="flat" cmpd="sng">
-                      <a:noFill/>
-                    </a:lnB>
                   </a:tcPr>
                 </a:tc>
                 <a:tc>
                   <a:txBody>
-                    <a:bodyPr wrap="square"/>
+                    <a:bodyPr/>
                     <a:lstStyle/>
                     <a:p>
                       <a:pPr algn="l"/>
@@ -19052,23 +18473,11 @@
                     <a:solidFill>
                       <a:srgbClr val="141B45"/>
                     </a:solidFill>
-                    <a:lnL w="0" cap="flat" cmpd="sng">
-                      <a:noFill/>
-                    </a:lnL>
-                    <a:lnR w="0" cap="flat" cmpd="sng">
-                      <a:noFill/>
-                    </a:lnR>
-                    <a:lnT w="0" cap="flat" cmpd="sng">
-                      <a:noFill/>
-                    </a:lnT>
-                    <a:lnB w="0" cap="flat" cmpd="sng">
-                      <a:noFill/>
-                    </a:lnB>
                   </a:tcPr>
                 </a:tc>
                 <a:tc>
                   <a:txBody>
-                    <a:bodyPr wrap="square"/>
+                    <a:bodyPr/>
                     <a:lstStyle/>
                     <a:p>
                       <a:pPr algn="l"/>
@@ -19087,23 +18496,11 @@
                     <a:solidFill>
                       <a:srgbClr val="141B45"/>
                     </a:solidFill>
-                    <a:lnL w="0" cap="flat" cmpd="sng">
-                      <a:noFill/>
-                    </a:lnL>
-                    <a:lnR w="0" cap="flat" cmpd="sng">
-                      <a:noFill/>
-                    </a:lnR>
-                    <a:lnT w="0" cap="flat" cmpd="sng">
-                      <a:noFill/>
-                    </a:lnT>
-                    <a:lnB w="0" cap="flat" cmpd="sng">
-                      <a:noFill/>
-                    </a:lnB>
                   </a:tcPr>
                 </a:tc>
                 <a:tc>
                   <a:txBody>
-                    <a:bodyPr wrap="square"/>
+                    <a:bodyPr/>
                     <a:lstStyle/>
                     <a:p>
                       <a:pPr algn="l"/>
@@ -19122,23 +18519,11 @@
                     <a:solidFill>
                       <a:srgbClr val="141B45"/>
                     </a:solidFill>
-                    <a:lnL w="0" cap="flat" cmpd="sng">
-                      <a:noFill/>
-                    </a:lnL>
-                    <a:lnR w="0" cap="flat" cmpd="sng">
-                      <a:noFill/>
-                    </a:lnR>
-                    <a:lnT w="0" cap="flat" cmpd="sng">
-                      <a:noFill/>
-                    </a:lnT>
-                    <a:lnB w="0" cap="flat" cmpd="sng">
-                      <a:noFill/>
-                    </a:lnB>
                   </a:tcPr>
                 </a:tc>
                 <a:tc>
                   <a:txBody>
-                    <a:bodyPr wrap="square"/>
+                    <a:bodyPr/>
                     <a:lstStyle/>
                     <a:p>
                       <a:pPr algn="l"/>
@@ -19157,23 +18542,11 @@
                     <a:solidFill>
                       <a:srgbClr val="141B45"/>
                     </a:solidFill>
-                    <a:lnL w="0" cap="flat" cmpd="sng">
-                      <a:noFill/>
-                    </a:lnL>
-                    <a:lnR w="0" cap="flat" cmpd="sng">
-                      <a:noFill/>
-                    </a:lnR>
-                    <a:lnT w="0" cap="flat" cmpd="sng">
-                      <a:noFill/>
-                    </a:lnT>
-                    <a:lnB w="0" cap="flat" cmpd="sng">
-                      <a:noFill/>
-                    </a:lnB>
                   </a:tcPr>
                 </a:tc>
                 <a:tc>
                   <a:txBody>
-                    <a:bodyPr wrap="square"/>
+                    <a:bodyPr/>
                     <a:lstStyle/>
                     <a:p>
                       <a:pPr algn="l"/>
@@ -19192,23 +18565,11 @@
                     <a:solidFill>
                       <a:srgbClr val="141B45"/>
                     </a:solidFill>
-                    <a:lnL w="0" cap="flat" cmpd="sng">
-                      <a:noFill/>
-                    </a:lnL>
-                    <a:lnR w="0" cap="flat" cmpd="sng">
-                      <a:noFill/>
-                    </a:lnR>
-                    <a:lnT w="0" cap="flat" cmpd="sng">
-                      <a:noFill/>
-                    </a:lnT>
-                    <a:lnB w="0" cap="flat" cmpd="sng">
-                      <a:noFill/>
-                    </a:lnB>
                   </a:tcPr>
                 </a:tc>
                 <a:tc>
                   <a:txBody>
-                    <a:bodyPr wrap="square"/>
+                    <a:bodyPr/>
                     <a:lstStyle/>
                     <a:p>
                       <a:pPr algn="l"/>
@@ -19227,25 +18588,18 @@
                     <a:solidFill>
                       <a:srgbClr val="141B45"/>
                     </a:solidFill>
-                    <a:lnL w="0" cap="flat" cmpd="sng">
-                      <a:noFill/>
-                    </a:lnL>
-                    <a:lnR w="0" cap="flat" cmpd="sng">
-                      <a:noFill/>
-                    </a:lnR>
-                    <a:lnT w="0" cap="flat" cmpd="sng">
-                      <a:noFill/>
-                    </a:lnT>
-                    <a:lnB w="0" cap="flat" cmpd="sng">
-                      <a:noFill/>
-                    </a:lnB>
                   </a:tcPr>
                 </a:tc>
+                <a:extLst>
+                  <a:ext uri="{0D108BD9-81ED-4DB2-BD59-A6C34878D82A}">
+                    <a16:rowId xmlns:a16="http://schemas.microsoft.com/office/drawing/2014/main" val="10000"/>
+                  </a:ext>
+                </a:extLst>
               </a:tr>
               <a:tr h="365760">
                 <a:tc>
                   <a:txBody>
-                    <a:bodyPr wrap="square"/>
+                    <a:bodyPr/>
                     <a:lstStyle/>
                     <a:p>
                       <a:pPr algn="l"/>
@@ -19264,23 +18618,11 @@
                     <a:solidFill>
                       <a:srgbClr val="FFFFFF"/>
                     </a:solidFill>
-                    <a:lnL w="0" cap="flat" cmpd="sng">
-                      <a:noFill/>
-                    </a:lnL>
-                    <a:lnR w="0" cap="flat" cmpd="sng">
-                      <a:noFill/>
-                    </a:lnR>
-                    <a:lnT w="0" cap="flat" cmpd="sng">
-                      <a:noFill/>
-                    </a:lnT>
-                    <a:lnB w="0" cap="flat" cmpd="sng">
-                      <a:noFill/>
-                    </a:lnB>
                   </a:tcPr>
                 </a:tc>
                 <a:tc>
                   <a:txBody>
-                    <a:bodyPr wrap="square"/>
+                    <a:bodyPr/>
                     <a:lstStyle/>
                     <a:p>
                       <a:pPr algn="l"/>
@@ -19299,23 +18641,11 @@
                     <a:solidFill>
                       <a:srgbClr val="FFFFFF"/>
                     </a:solidFill>
-                    <a:lnL w="0" cap="flat" cmpd="sng">
-                      <a:noFill/>
-                    </a:lnL>
-                    <a:lnR w="0" cap="flat" cmpd="sng">
-                      <a:noFill/>
-                    </a:lnR>
-                    <a:lnT w="0" cap="flat" cmpd="sng">
-                      <a:noFill/>
-                    </a:lnT>
-                    <a:lnB w="0" cap="flat" cmpd="sng">
-                      <a:noFill/>
-                    </a:lnB>
                   </a:tcPr>
                 </a:tc>
                 <a:tc>
                   <a:txBody>
-                    <a:bodyPr wrap="square"/>
+                    <a:bodyPr/>
                     <a:lstStyle/>
                     <a:p>
                       <a:pPr algn="l"/>
@@ -19334,23 +18664,11 @@
                     <a:solidFill>
                       <a:srgbClr val="FFFFFF"/>
                     </a:solidFill>
-                    <a:lnL w="0" cap="flat" cmpd="sng">
-                      <a:noFill/>
-                    </a:lnL>
-                    <a:lnR w="0" cap="flat" cmpd="sng">
-                      <a:noFill/>
-                    </a:lnR>
-                    <a:lnT w="0" cap="flat" cmpd="sng">
-                      <a:noFill/>
-                    </a:lnT>
-                    <a:lnB w="0" cap="flat" cmpd="sng">
-                      <a:noFill/>
-                    </a:lnB>
                   </a:tcPr>
                 </a:tc>
                 <a:tc>
                   <a:txBody>
-                    <a:bodyPr wrap="square"/>
+                    <a:bodyPr/>
                     <a:lstStyle/>
                     <a:p>
                       <a:pPr algn="l"/>
@@ -19369,23 +18687,11 @@
                     <a:solidFill>
                       <a:srgbClr val="FFFFFF"/>
                     </a:solidFill>
-                    <a:lnL w="0" cap="flat" cmpd="sng">
-                      <a:noFill/>
-                    </a:lnL>
-                    <a:lnR w="0" cap="flat" cmpd="sng">
-                      <a:noFill/>
-                    </a:lnR>
-                    <a:lnT w="0" cap="flat" cmpd="sng">
-                      <a:noFill/>
-                    </a:lnT>
-                    <a:lnB w="0" cap="flat" cmpd="sng">
-                      <a:noFill/>
-                    </a:lnB>
                   </a:tcPr>
                 </a:tc>
                 <a:tc>
                   <a:txBody>
-                    <a:bodyPr wrap="square"/>
+                    <a:bodyPr/>
                     <a:lstStyle/>
                     <a:p>
                       <a:pPr algn="l"/>
@@ -19404,23 +18710,11 @@
                     <a:solidFill>
                       <a:srgbClr val="FFFFFF"/>
                     </a:solidFill>
-                    <a:lnL w="0" cap="flat" cmpd="sng">
-                      <a:noFill/>
-                    </a:lnL>
-                    <a:lnR w="0" cap="flat" cmpd="sng">
-                      <a:noFill/>
-                    </a:lnR>
-                    <a:lnT w="0" cap="flat" cmpd="sng">
-                      <a:noFill/>
-                    </a:lnT>
-                    <a:lnB w="0" cap="flat" cmpd="sng">
-                      <a:noFill/>
-                    </a:lnB>
                   </a:tcPr>
                 </a:tc>
                 <a:tc>
                   <a:txBody>
-                    <a:bodyPr wrap="square"/>
+                    <a:bodyPr/>
                     <a:lstStyle/>
                     <a:p>
                       <a:pPr algn="l"/>
@@ -19439,23 +18733,11 @@
                     <a:solidFill>
                       <a:srgbClr val="FFFFFF"/>
                     </a:solidFill>
-                    <a:lnL w="0" cap="flat" cmpd="sng">
-                      <a:noFill/>
-                    </a:lnL>
-                    <a:lnR w="0" cap="flat" cmpd="sng">
-                      <a:noFill/>
-                    </a:lnR>
-                    <a:lnT w="0" cap="flat" cmpd="sng">
-                      <a:noFill/>
-                    </a:lnT>
-                    <a:lnB w="0" cap="flat" cmpd="sng">
-                      <a:noFill/>
-                    </a:lnB>
                   </a:tcPr>
                 </a:tc>
                 <a:tc>
                   <a:txBody>
-                    <a:bodyPr wrap="square"/>
+                    <a:bodyPr/>
                     <a:lstStyle/>
                     <a:p>
                       <a:pPr algn="l"/>
@@ -19474,25 +18756,18 @@
                     <a:solidFill>
                       <a:srgbClr val="FFFFFF"/>
                     </a:solidFill>
-                    <a:lnL w="0" cap="flat" cmpd="sng">
-                      <a:noFill/>
-                    </a:lnL>
-                    <a:lnR w="0" cap="flat" cmpd="sng">
-                      <a:noFill/>
-                    </a:lnR>
-                    <a:lnT w="0" cap="flat" cmpd="sng">
-                      <a:noFill/>
-                    </a:lnT>
-                    <a:lnB w="0" cap="flat" cmpd="sng">
-                      <a:noFill/>
-                    </a:lnB>
                   </a:tcPr>
                 </a:tc>
+                <a:extLst>
+                  <a:ext uri="{0D108BD9-81ED-4DB2-BD59-A6C34878D82A}">
+                    <a16:rowId xmlns:a16="http://schemas.microsoft.com/office/drawing/2014/main" val="10001"/>
+                  </a:ext>
+                </a:extLst>
               </a:tr>
               <a:tr h="365760">
                 <a:tc>
                   <a:txBody>
-                    <a:bodyPr wrap="square"/>
+                    <a:bodyPr/>
                     <a:lstStyle/>
                     <a:p>
                       <a:pPr algn="l"/>
@@ -19511,23 +18786,11 @@
                     <a:solidFill>
                       <a:srgbClr val="E8EDF9"/>
                     </a:solidFill>
-                    <a:lnL w="0" cap="flat" cmpd="sng">
-                      <a:noFill/>
-                    </a:lnL>
-                    <a:lnR w="0" cap="flat" cmpd="sng">
-                      <a:noFill/>
-                    </a:lnR>
-                    <a:lnT w="0" cap="flat" cmpd="sng">
-                      <a:noFill/>
-                    </a:lnT>
-                    <a:lnB w="0" cap="flat" cmpd="sng">
-                      <a:noFill/>
-                    </a:lnB>
                   </a:tcPr>
                 </a:tc>
                 <a:tc>
                   <a:txBody>
-                    <a:bodyPr wrap="square"/>
+                    <a:bodyPr/>
                     <a:lstStyle/>
                     <a:p>
                       <a:pPr algn="l"/>
@@ -19546,23 +18809,11 @@
                     <a:solidFill>
                       <a:srgbClr val="E8EDF9"/>
                     </a:solidFill>
-                    <a:lnL w="0" cap="flat" cmpd="sng">
-                      <a:noFill/>
-                    </a:lnL>
-                    <a:lnR w="0" cap="flat" cmpd="sng">
-                      <a:noFill/>
-                    </a:lnR>
-                    <a:lnT w="0" cap="flat" cmpd="sng">
-                      <a:noFill/>
-                    </a:lnT>
-                    <a:lnB w="0" cap="flat" cmpd="sng">
-                      <a:noFill/>
-                    </a:lnB>
                   </a:tcPr>
                 </a:tc>
                 <a:tc>
                   <a:txBody>
-                    <a:bodyPr wrap="square"/>
+                    <a:bodyPr/>
                     <a:lstStyle/>
                     <a:p>
                       <a:pPr algn="l"/>
@@ -19581,23 +18832,11 @@
                     <a:solidFill>
                       <a:srgbClr val="E8EDF9"/>
                     </a:solidFill>
-                    <a:lnL w="0" cap="flat" cmpd="sng">
-                      <a:noFill/>
-                    </a:lnL>
-                    <a:lnR w="0" cap="flat" cmpd="sng">
-                      <a:noFill/>
-                    </a:lnR>
-                    <a:lnT w="0" cap="flat" cmpd="sng">
-                      <a:noFill/>
-                    </a:lnT>
-                    <a:lnB w="0" cap="flat" cmpd="sng">
-                      <a:noFill/>
-                    </a:lnB>
                   </a:tcPr>
                 </a:tc>
                 <a:tc>
                   <a:txBody>
-                    <a:bodyPr wrap="square"/>
+                    <a:bodyPr/>
                     <a:lstStyle/>
                     <a:p>
                       <a:pPr algn="l"/>
@@ -19616,23 +18855,11 @@
                     <a:solidFill>
                       <a:srgbClr val="E8EDF9"/>
                     </a:solidFill>
-                    <a:lnL w="0" cap="flat" cmpd="sng">
-                      <a:noFill/>
-                    </a:lnL>
-                    <a:lnR w="0" cap="flat" cmpd="sng">
-                      <a:noFill/>
-                    </a:lnR>
-                    <a:lnT w="0" cap="flat" cmpd="sng">
-                      <a:noFill/>
-                    </a:lnT>
-                    <a:lnB w="0" cap="flat" cmpd="sng">
-                      <a:noFill/>
-                    </a:lnB>
                   </a:tcPr>
                 </a:tc>
                 <a:tc>
                   <a:txBody>
-                    <a:bodyPr wrap="square"/>
+                    <a:bodyPr/>
                     <a:lstStyle/>
                     <a:p>
                       <a:pPr algn="l"/>
@@ -19651,23 +18878,11 @@
                     <a:solidFill>
                       <a:srgbClr val="E8EDF9"/>
                     </a:solidFill>
-                    <a:lnL w="0" cap="flat" cmpd="sng">
-                      <a:noFill/>
-                    </a:lnL>
-                    <a:lnR w="0" cap="flat" cmpd="sng">
-                      <a:noFill/>
-                    </a:lnR>
-                    <a:lnT w="0" cap="flat" cmpd="sng">
-                      <a:noFill/>
-                    </a:lnT>
-                    <a:lnB w="0" cap="flat" cmpd="sng">
-                      <a:noFill/>
-                    </a:lnB>
                   </a:tcPr>
                 </a:tc>
                 <a:tc>
                   <a:txBody>
-                    <a:bodyPr wrap="square"/>
+                    <a:bodyPr/>
                     <a:lstStyle/>
                     <a:p>
                       <a:pPr algn="l"/>
@@ -19686,23 +18901,11 @@
                     <a:solidFill>
                       <a:srgbClr val="E8EDF9"/>
                     </a:solidFill>
-                    <a:lnL w="0" cap="flat" cmpd="sng">
-                      <a:noFill/>
-                    </a:lnL>
-                    <a:lnR w="0" cap="flat" cmpd="sng">
-                      <a:noFill/>
-                    </a:lnR>
-                    <a:lnT w="0" cap="flat" cmpd="sng">
-                      <a:noFill/>
-                    </a:lnT>
-                    <a:lnB w="0" cap="flat" cmpd="sng">
-                      <a:noFill/>
-                    </a:lnB>
                   </a:tcPr>
                 </a:tc>
                 <a:tc>
                   <a:txBody>
-                    <a:bodyPr wrap="square"/>
+                    <a:bodyPr/>
                     <a:lstStyle/>
                     <a:p>
                       <a:pPr algn="l"/>
@@ -19721,20 +18924,13 @@
                     <a:solidFill>
                       <a:srgbClr val="E8EDF9"/>
                     </a:solidFill>
-                    <a:lnL w="0" cap="flat" cmpd="sng">
-                      <a:noFill/>
-                    </a:lnL>
-                    <a:lnR w="0" cap="flat" cmpd="sng">
-                      <a:noFill/>
-                    </a:lnR>
-                    <a:lnT w="0" cap="flat" cmpd="sng">
-                      <a:noFill/>
-                    </a:lnT>
-                    <a:lnB w="0" cap="flat" cmpd="sng">
-                      <a:noFill/>
-                    </a:lnB>
                   </a:tcPr>
                 </a:tc>
+                <a:extLst>
+                  <a:ext uri="{0D108BD9-81ED-4DB2-BD59-A6C34878D82A}">
+                    <a16:rowId xmlns:a16="http://schemas.microsoft.com/office/drawing/2014/main" val="10002"/>
+                  </a:ext>
+                </a:extLst>
               </a:tr>
             </a:tbl>
           </a:graphicData>
@@ -19780,6 +18976,7 @@
           <a:lstStyle/>
           <a:p>
             <a:pPr algn="ctr"/>
+            <a:endParaRPr/>
           </a:p>
         </p:txBody>
       </p:sp>
@@ -19823,6 +19020,7 @@
           <a:lstStyle/>
           <a:p>
             <a:pPr algn="ctr"/>
+            <a:endParaRPr/>
           </a:p>
         </p:txBody>
       </p:sp>
@@ -19942,6 +19140,7 @@
           <a:lstStyle/>
           <a:p>
             <a:pPr algn="ctr"/>
+            <a:endParaRPr/>
           </a:p>
         </p:txBody>
       </p:sp>
@@ -19985,6 +19184,7 @@
           <a:lstStyle/>
           <a:p>
             <a:pPr algn="ctr"/>
+            <a:endParaRPr/>
           </a:p>
         </p:txBody>
       </p:sp>
@@ -20104,6 +19304,7 @@
           <a:lstStyle/>
           <a:p>
             <a:pPr algn="ctr"/>
+            <a:endParaRPr/>
           </a:p>
         </p:txBody>
       </p:sp>
@@ -20147,6 +19348,7 @@
           <a:lstStyle/>
           <a:p>
             <a:pPr algn="ctr"/>
+            <a:endParaRPr/>
           </a:p>
         </p:txBody>
       </p:sp>
@@ -20235,7 +19437,7 @@
 </file>
 
 <file path=ppt/slides/slide7.xml><?xml version="1.0" encoding="utf-8"?>
-<p:sld xmlns:a="http://schemas.openxmlformats.org/drawingml/2006/main" xmlns:p="http://schemas.openxmlformats.org/presentationml/2006/main" xmlns:r="http://schemas.openxmlformats.org/officeDocument/2006/relationships">
+<p:sld xmlns:a="http://schemas.openxmlformats.org/drawingml/2006/main" xmlns:r="http://schemas.openxmlformats.org/officeDocument/2006/relationships" xmlns:p="http://schemas.openxmlformats.org/presentationml/2006/main">
   <p:cSld>
     <p:spTree>
       <p:nvGrpSpPr>
@@ -20243,7 +19445,14 @@
         <p:cNvGrpSpPr/>
         <p:nvPr/>
       </p:nvGrpSpPr>
-      <p:grpSpPr/>
+      <p:grpSpPr>
+        <a:xfrm>
+          <a:off x="0" y="0"/>
+          <a:ext cx="0" cy="0"/>
+          <a:chOff x="0" y="0"/>
+          <a:chExt cx="0" cy="0"/>
+        </a:xfrm>
+      </p:grpSpPr>
       <p:sp>
         <p:nvSpPr>
           <p:cNvPr id="2" name="Rectangle 1"/>
@@ -20284,6 +19493,7 @@
           <a:lstStyle/>
           <a:p>
             <a:pPr algn="ctr"/>
+            <a:endParaRPr/>
           </a:p>
         </p:txBody>
       </p:sp>
@@ -20327,6 +19537,7 @@
           <a:lstStyle/>
           <a:p>
             <a:pPr algn="ctr"/>
+            <a:endParaRPr/>
           </a:p>
         </p:txBody>
       </p:sp>
@@ -20370,6 +19581,7 @@
           <a:lstStyle/>
           <a:p>
             <a:pPr algn="ctr"/>
+            <a:endParaRPr/>
           </a:p>
         </p:txBody>
       </p:sp>
@@ -20565,6 +19777,7 @@
           <a:lstStyle/>
           <a:p>
             <a:pPr algn="ctr"/>
+            <a:endParaRPr/>
           </a:p>
         </p:txBody>
       </p:sp>
@@ -20608,6 +19821,7 @@
           <a:lstStyle/>
           <a:p>
             <a:pPr algn="ctr"/>
+            <a:endParaRPr/>
           </a:p>
         </p:txBody>
       </p:sp>
@@ -20689,6 +19903,7 @@
           <a:lstStyle/>
           <a:p>
             <a:pPr algn="ctr"/>
+            <a:endParaRPr/>
           </a:p>
         </p:txBody>
       </p:sp>
@@ -20732,6 +19947,7 @@
           <a:lstStyle/>
           <a:p>
             <a:pPr algn="ctr"/>
+            <a:endParaRPr/>
           </a:p>
         </p:txBody>
       </p:sp>
@@ -20851,6 +20067,7 @@
           <a:lstStyle/>
           <a:p>
             <a:pPr algn="ctr"/>
+            <a:endParaRPr/>
           </a:p>
         </p:txBody>
       </p:sp>
@@ -20894,6 +20111,7 @@
           <a:lstStyle/>
           <a:p>
             <a:pPr algn="ctr"/>
+            <a:endParaRPr/>
           </a:p>
         </p:txBody>
       </p:sp>
@@ -21013,6 +20231,7 @@
           <a:lstStyle/>
           <a:p>
             <a:pPr algn="ctr"/>
+            <a:endParaRPr/>
           </a:p>
         </p:txBody>
       </p:sp>
@@ -21056,6 +20275,7 @@
           <a:lstStyle/>
           <a:p>
             <a:pPr algn="ctr"/>
+            <a:endParaRPr/>
           </a:p>
         </p:txBody>
       </p:sp>
@@ -21175,6 +20395,7 @@
           <a:lstStyle/>
           <a:p>
             <a:pPr algn="ctr"/>
+            <a:endParaRPr/>
           </a:p>
         </p:txBody>
       </p:sp>
@@ -21218,6 +20439,7 @@
           <a:lstStyle/>
           <a:p>
             <a:pPr algn="ctr"/>
+            <a:endParaRPr/>
           </a:p>
         </p:txBody>
       </p:sp>
@@ -21337,6 +20559,7 @@
           <a:lstStyle/>
           <a:p>
             <a:pPr algn="ctr"/>
+            <a:endParaRPr/>
           </a:p>
         </p:txBody>
       </p:sp>
@@ -21526,6 +20749,7 @@
           <a:lstStyle/>
           <a:p>
             <a:pPr algn="ctr"/>
+            <a:endParaRPr/>
           </a:p>
         </p:txBody>
       </p:sp>
@@ -21695,7 +20919,7 @@
 </file>
 
 <file path=ppt/slides/slide8.xml><?xml version="1.0" encoding="utf-8"?>
-<p:sld xmlns:a="http://schemas.openxmlformats.org/drawingml/2006/main" xmlns:p="http://schemas.openxmlformats.org/presentationml/2006/main" xmlns:r="http://schemas.openxmlformats.org/officeDocument/2006/relationships">
+<p:sld xmlns:a="http://schemas.openxmlformats.org/drawingml/2006/main" xmlns:r="http://schemas.openxmlformats.org/officeDocument/2006/relationships" xmlns:p="http://schemas.openxmlformats.org/presentationml/2006/main">
   <p:cSld>
     <p:spTree>
       <p:nvGrpSpPr>
@@ -21703,7 +20927,14 @@
         <p:cNvGrpSpPr/>
         <p:nvPr/>
       </p:nvGrpSpPr>
-      <p:grpSpPr/>
+      <p:grpSpPr>
+        <a:xfrm>
+          <a:off x="0" y="0"/>
+          <a:ext cx="0" cy="0"/>
+          <a:chOff x="0" y="0"/>
+          <a:chExt cx="0" cy="0"/>
+        </a:xfrm>
+      </p:grpSpPr>
       <p:sp>
         <p:nvSpPr>
           <p:cNvPr id="2" name="Rectangle 1"/>
@@ -21744,6 +20975,7 @@
           <a:lstStyle/>
           <a:p>
             <a:pPr algn="ctr"/>
+            <a:endParaRPr/>
           </a:p>
         </p:txBody>
       </p:sp>
@@ -21787,6 +21019,7 @@
           <a:lstStyle/>
           <a:p>
             <a:pPr algn="ctr"/>
+            <a:endParaRPr/>
           </a:p>
         </p:txBody>
       </p:sp>
@@ -21830,6 +21063,7 @@
           <a:lstStyle/>
           <a:p>
             <a:pPr algn="ctr"/>
+            <a:endParaRPr/>
           </a:p>
         </p:txBody>
       </p:sp>
@@ -22004,17 +21238,53 @@
                 <a:tableStyleId>{5C22544A-7EE6-4342-B048-85BDC9FD1C3A}</a:tableStyleId>
               </a:tblPr>
               <a:tblGrid>
-                <a:gridCol w="3474720"/>
-                <a:gridCol w="1371600"/>
-                <a:gridCol w="1371600"/>
-                <a:gridCol w="1371600"/>
-                <a:gridCol w="1371600"/>
-                <a:gridCol w="2468880"/>
+                <a:gridCol w="3474720">
+                  <a:extLst>
+                    <a:ext uri="{9D8B030D-6E8A-4147-A177-3AD203B41FA5}">
+                      <a16:colId xmlns:a16="http://schemas.microsoft.com/office/drawing/2014/main" val="20000"/>
+                    </a:ext>
+                  </a:extLst>
+                </a:gridCol>
+                <a:gridCol w="1371600">
+                  <a:extLst>
+                    <a:ext uri="{9D8B030D-6E8A-4147-A177-3AD203B41FA5}">
+                      <a16:colId xmlns:a16="http://schemas.microsoft.com/office/drawing/2014/main" val="20001"/>
+                    </a:ext>
+                  </a:extLst>
+                </a:gridCol>
+                <a:gridCol w="1371600">
+                  <a:extLst>
+                    <a:ext uri="{9D8B030D-6E8A-4147-A177-3AD203B41FA5}">
+                      <a16:colId xmlns:a16="http://schemas.microsoft.com/office/drawing/2014/main" val="20002"/>
+                    </a:ext>
+                  </a:extLst>
+                </a:gridCol>
+                <a:gridCol w="1371600">
+                  <a:extLst>
+                    <a:ext uri="{9D8B030D-6E8A-4147-A177-3AD203B41FA5}">
+                      <a16:colId xmlns:a16="http://schemas.microsoft.com/office/drawing/2014/main" val="20003"/>
+                    </a:ext>
+                  </a:extLst>
+                </a:gridCol>
+                <a:gridCol w="1371600">
+                  <a:extLst>
+                    <a:ext uri="{9D8B030D-6E8A-4147-A177-3AD203B41FA5}">
+                      <a16:colId xmlns:a16="http://schemas.microsoft.com/office/drawing/2014/main" val="20004"/>
+                    </a:ext>
+                  </a:extLst>
+                </a:gridCol>
+                <a:gridCol w="2468880">
+                  <a:extLst>
+                    <a:ext uri="{9D8B030D-6E8A-4147-A177-3AD203B41FA5}">
+                      <a16:colId xmlns:a16="http://schemas.microsoft.com/office/drawing/2014/main" val="20005"/>
+                    </a:ext>
+                  </a:extLst>
+                </a:gridCol>
               </a:tblGrid>
               <a:tr h="365760">
                 <a:tc>
                   <a:txBody>
-                    <a:bodyPr wrap="square"/>
+                    <a:bodyPr/>
                     <a:lstStyle/>
                     <a:p>
                       <a:pPr algn="l"/>
@@ -22033,23 +21303,11 @@
                     <a:solidFill>
                       <a:srgbClr val="141B45"/>
                     </a:solidFill>
-                    <a:lnL w="0" cap="flat" cmpd="sng">
-                      <a:noFill/>
-                    </a:lnL>
-                    <a:lnR w="0" cap="flat" cmpd="sng">
-                      <a:noFill/>
-                    </a:lnR>
-                    <a:lnT w="0" cap="flat" cmpd="sng">
-                      <a:noFill/>
-                    </a:lnT>
-                    <a:lnB w="0" cap="flat" cmpd="sng">
-                      <a:noFill/>
-                    </a:lnB>
                   </a:tcPr>
                 </a:tc>
                 <a:tc>
                   <a:txBody>
-                    <a:bodyPr wrap="square"/>
+                    <a:bodyPr/>
                     <a:lstStyle/>
                     <a:p>
                       <a:pPr algn="l"/>
@@ -22068,23 +21326,11 @@
                     <a:solidFill>
                       <a:srgbClr val="141B45"/>
                     </a:solidFill>
-                    <a:lnL w="0" cap="flat" cmpd="sng">
-                      <a:noFill/>
-                    </a:lnL>
-                    <a:lnR w="0" cap="flat" cmpd="sng">
-                      <a:noFill/>
-                    </a:lnR>
-                    <a:lnT w="0" cap="flat" cmpd="sng">
-                      <a:noFill/>
-                    </a:lnT>
-                    <a:lnB w="0" cap="flat" cmpd="sng">
-                      <a:noFill/>
-                    </a:lnB>
                   </a:tcPr>
                 </a:tc>
                 <a:tc>
                   <a:txBody>
-                    <a:bodyPr wrap="square"/>
+                    <a:bodyPr/>
                     <a:lstStyle/>
                     <a:p>
                       <a:pPr algn="l"/>
@@ -22103,23 +21349,11 @@
                     <a:solidFill>
                       <a:srgbClr val="141B45"/>
                     </a:solidFill>
-                    <a:lnL w="0" cap="flat" cmpd="sng">
-                      <a:noFill/>
-                    </a:lnL>
-                    <a:lnR w="0" cap="flat" cmpd="sng">
-                      <a:noFill/>
-                    </a:lnR>
-                    <a:lnT w="0" cap="flat" cmpd="sng">
-                      <a:noFill/>
-                    </a:lnT>
-                    <a:lnB w="0" cap="flat" cmpd="sng">
-                      <a:noFill/>
-                    </a:lnB>
                   </a:tcPr>
                 </a:tc>
                 <a:tc>
                   <a:txBody>
-                    <a:bodyPr wrap="square"/>
+                    <a:bodyPr/>
                     <a:lstStyle/>
                     <a:p>
                       <a:pPr algn="l"/>
@@ -22138,23 +21372,11 @@
                     <a:solidFill>
                       <a:srgbClr val="141B45"/>
                     </a:solidFill>
-                    <a:lnL w="0" cap="flat" cmpd="sng">
-                      <a:noFill/>
-                    </a:lnL>
-                    <a:lnR w="0" cap="flat" cmpd="sng">
-                      <a:noFill/>
-                    </a:lnR>
-                    <a:lnT w="0" cap="flat" cmpd="sng">
-                      <a:noFill/>
-                    </a:lnT>
-                    <a:lnB w="0" cap="flat" cmpd="sng">
-                      <a:noFill/>
-                    </a:lnB>
                   </a:tcPr>
                 </a:tc>
                 <a:tc>
                   <a:txBody>
-                    <a:bodyPr wrap="square"/>
+                    <a:bodyPr/>
                     <a:lstStyle/>
                     <a:p>
                       <a:pPr algn="l"/>
@@ -22173,23 +21395,11 @@
                     <a:solidFill>
                       <a:srgbClr val="141B45"/>
                     </a:solidFill>
-                    <a:lnL w="0" cap="flat" cmpd="sng">
-                      <a:noFill/>
-                    </a:lnL>
-                    <a:lnR w="0" cap="flat" cmpd="sng">
-                      <a:noFill/>
-                    </a:lnR>
-                    <a:lnT w="0" cap="flat" cmpd="sng">
-                      <a:noFill/>
-                    </a:lnT>
-                    <a:lnB w="0" cap="flat" cmpd="sng">
-                      <a:noFill/>
-                    </a:lnB>
                   </a:tcPr>
                 </a:tc>
                 <a:tc>
                   <a:txBody>
-                    <a:bodyPr wrap="square"/>
+                    <a:bodyPr/>
                     <a:lstStyle/>
                     <a:p>
                       <a:pPr algn="l"/>
@@ -22208,25 +21418,18 @@
                     <a:solidFill>
                       <a:srgbClr val="141B45"/>
                     </a:solidFill>
-                    <a:lnL w="0" cap="flat" cmpd="sng">
-                      <a:noFill/>
-                    </a:lnL>
-                    <a:lnR w="0" cap="flat" cmpd="sng">
-                      <a:noFill/>
-                    </a:lnR>
-                    <a:lnT w="0" cap="flat" cmpd="sng">
-                      <a:noFill/>
-                    </a:lnT>
-                    <a:lnB w="0" cap="flat" cmpd="sng">
-                      <a:noFill/>
-                    </a:lnB>
                   </a:tcPr>
                 </a:tc>
+                <a:extLst>
+                  <a:ext uri="{0D108BD9-81ED-4DB2-BD59-A6C34878D82A}">
+                    <a16:rowId xmlns:a16="http://schemas.microsoft.com/office/drawing/2014/main" val="10000"/>
+                  </a:ext>
+                </a:extLst>
               </a:tr>
               <a:tr h="365760">
                 <a:tc>
                   <a:txBody>
-                    <a:bodyPr wrap="square"/>
+                    <a:bodyPr/>
                     <a:lstStyle/>
                     <a:p>
                       <a:pPr algn="l"/>
@@ -22245,23 +21448,11 @@
                     <a:solidFill>
                       <a:srgbClr val="FFFFFF"/>
                     </a:solidFill>
-                    <a:lnL w="0" cap="flat" cmpd="sng">
-                      <a:noFill/>
-                    </a:lnL>
-                    <a:lnR w="0" cap="flat" cmpd="sng">
-                      <a:noFill/>
-                    </a:lnR>
-                    <a:lnT w="0" cap="flat" cmpd="sng">
-                      <a:noFill/>
-                    </a:lnT>
-                    <a:lnB w="0" cap="flat" cmpd="sng">
-                      <a:noFill/>
-                    </a:lnB>
                   </a:tcPr>
                 </a:tc>
                 <a:tc>
                   <a:txBody>
-                    <a:bodyPr wrap="square"/>
+                    <a:bodyPr/>
                     <a:lstStyle/>
                     <a:p>
                       <a:pPr algn="l"/>
@@ -22280,23 +21471,11 @@
                     <a:solidFill>
                       <a:srgbClr val="FFFFFF"/>
                     </a:solidFill>
-                    <a:lnL w="0" cap="flat" cmpd="sng">
-                      <a:noFill/>
-                    </a:lnL>
-                    <a:lnR w="0" cap="flat" cmpd="sng">
-                      <a:noFill/>
-                    </a:lnR>
-                    <a:lnT w="0" cap="flat" cmpd="sng">
-                      <a:noFill/>
-                    </a:lnT>
-                    <a:lnB w="0" cap="flat" cmpd="sng">
-                      <a:noFill/>
-                    </a:lnB>
                   </a:tcPr>
                 </a:tc>
                 <a:tc>
                   <a:txBody>
-                    <a:bodyPr wrap="square"/>
+                    <a:bodyPr/>
                     <a:lstStyle/>
                     <a:p>
                       <a:pPr algn="l"/>
@@ -22315,23 +21494,11 @@
                     <a:solidFill>
                       <a:srgbClr val="FFFFFF"/>
                     </a:solidFill>
-                    <a:lnL w="0" cap="flat" cmpd="sng">
-                      <a:noFill/>
-                    </a:lnL>
-                    <a:lnR w="0" cap="flat" cmpd="sng">
-                      <a:noFill/>
-                    </a:lnR>
-                    <a:lnT w="0" cap="flat" cmpd="sng">
-                      <a:noFill/>
-                    </a:lnT>
-                    <a:lnB w="0" cap="flat" cmpd="sng">
-                      <a:noFill/>
-                    </a:lnB>
                   </a:tcPr>
                 </a:tc>
                 <a:tc>
                   <a:txBody>
-                    <a:bodyPr wrap="square"/>
+                    <a:bodyPr/>
                     <a:lstStyle/>
                     <a:p>
                       <a:pPr algn="l"/>
@@ -22350,23 +21517,11 @@
                     <a:solidFill>
                       <a:srgbClr val="FFFFFF"/>
                     </a:solidFill>
-                    <a:lnL w="0" cap="flat" cmpd="sng">
-                      <a:noFill/>
-                    </a:lnL>
-                    <a:lnR w="0" cap="flat" cmpd="sng">
-                      <a:noFill/>
-                    </a:lnR>
-                    <a:lnT w="0" cap="flat" cmpd="sng">
-                      <a:noFill/>
-                    </a:lnT>
-                    <a:lnB w="0" cap="flat" cmpd="sng">
-                      <a:noFill/>
-                    </a:lnB>
                   </a:tcPr>
                 </a:tc>
                 <a:tc>
                   <a:txBody>
-                    <a:bodyPr wrap="square"/>
+                    <a:bodyPr/>
                     <a:lstStyle/>
                     <a:p>
                       <a:pPr algn="l"/>
@@ -22385,23 +21540,11 @@
                     <a:solidFill>
                       <a:srgbClr val="FFFFFF"/>
                     </a:solidFill>
-                    <a:lnL w="0" cap="flat" cmpd="sng">
-                      <a:noFill/>
-                    </a:lnL>
-                    <a:lnR w="0" cap="flat" cmpd="sng">
-                      <a:noFill/>
-                    </a:lnR>
-                    <a:lnT w="0" cap="flat" cmpd="sng">
-                      <a:noFill/>
-                    </a:lnT>
-                    <a:lnB w="0" cap="flat" cmpd="sng">
-                      <a:noFill/>
-                    </a:lnB>
                   </a:tcPr>
                 </a:tc>
                 <a:tc>
                   <a:txBody>
-                    <a:bodyPr wrap="square"/>
+                    <a:bodyPr/>
                     <a:lstStyle/>
                     <a:p>
                       <a:pPr algn="l"/>
@@ -22420,25 +21563,18 @@
                     <a:solidFill>
                       <a:srgbClr val="FFFFFF"/>
                     </a:solidFill>
-                    <a:lnL w="0" cap="flat" cmpd="sng">
-                      <a:noFill/>
-                    </a:lnL>
-                    <a:lnR w="0" cap="flat" cmpd="sng">
-                      <a:noFill/>
-                    </a:lnR>
-                    <a:lnT w="0" cap="flat" cmpd="sng">
-                      <a:noFill/>
-                    </a:lnT>
-                    <a:lnB w="0" cap="flat" cmpd="sng">
-                      <a:noFill/>
-                    </a:lnB>
                   </a:tcPr>
                 </a:tc>
+                <a:extLst>
+                  <a:ext uri="{0D108BD9-81ED-4DB2-BD59-A6C34878D82A}">
+                    <a16:rowId xmlns:a16="http://schemas.microsoft.com/office/drawing/2014/main" val="10001"/>
+                  </a:ext>
+                </a:extLst>
               </a:tr>
               <a:tr h="365760">
                 <a:tc>
                   <a:txBody>
-                    <a:bodyPr wrap="square"/>
+                    <a:bodyPr/>
                     <a:lstStyle/>
                     <a:p>
                       <a:pPr algn="l"/>
@@ -22457,23 +21593,11 @@
                     <a:solidFill>
                       <a:srgbClr val="E8EDF9"/>
                     </a:solidFill>
-                    <a:lnL w="0" cap="flat" cmpd="sng">
-                      <a:noFill/>
-                    </a:lnL>
-                    <a:lnR w="0" cap="flat" cmpd="sng">
-                      <a:noFill/>
-                    </a:lnR>
-                    <a:lnT w="0" cap="flat" cmpd="sng">
-                      <a:noFill/>
-                    </a:lnT>
-                    <a:lnB w="0" cap="flat" cmpd="sng">
-                      <a:noFill/>
-                    </a:lnB>
                   </a:tcPr>
                 </a:tc>
                 <a:tc>
                   <a:txBody>
-                    <a:bodyPr wrap="square"/>
+                    <a:bodyPr/>
                     <a:lstStyle/>
                     <a:p>
                       <a:pPr algn="l"/>
@@ -22492,23 +21616,11 @@
                     <a:solidFill>
                       <a:srgbClr val="E8EDF9"/>
                     </a:solidFill>
-                    <a:lnL w="0" cap="flat" cmpd="sng">
-                      <a:noFill/>
-                    </a:lnL>
-                    <a:lnR w="0" cap="flat" cmpd="sng">
-                      <a:noFill/>
-                    </a:lnR>
-                    <a:lnT w="0" cap="flat" cmpd="sng">
-                      <a:noFill/>
-                    </a:lnT>
-                    <a:lnB w="0" cap="flat" cmpd="sng">
-                      <a:noFill/>
-                    </a:lnB>
                   </a:tcPr>
                 </a:tc>
                 <a:tc>
                   <a:txBody>
-                    <a:bodyPr wrap="square"/>
+                    <a:bodyPr/>
                     <a:lstStyle/>
                     <a:p>
                       <a:pPr algn="l"/>
@@ -22527,23 +21639,11 @@
                     <a:solidFill>
                       <a:srgbClr val="E8EDF9"/>
                     </a:solidFill>
-                    <a:lnL w="0" cap="flat" cmpd="sng">
-                      <a:noFill/>
-                    </a:lnL>
-                    <a:lnR w="0" cap="flat" cmpd="sng">
-                      <a:noFill/>
-                    </a:lnR>
-                    <a:lnT w="0" cap="flat" cmpd="sng">
-                      <a:noFill/>
-                    </a:lnT>
-                    <a:lnB w="0" cap="flat" cmpd="sng">
-                      <a:noFill/>
-                    </a:lnB>
                   </a:tcPr>
                 </a:tc>
                 <a:tc>
                   <a:txBody>
-                    <a:bodyPr wrap="square"/>
+                    <a:bodyPr/>
                     <a:lstStyle/>
                     <a:p>
                       <a:pPr algn="l"/>
@@ -22562,23 +21662,11 @@
                     <a:solidFill>
                       <a:srgbClr val="E8EDF9"/>
                     </a:solidFill>
-                    <a:lnL w="0" cap="flat" cmpd="sng">
-                      <a:noFill/>
-                    </a:lnL>
-                    <a:lnR w="0" cap="flat" cmpd="sng">
-                      <a:noFill/>
-                    </a:lnR>
-                    <a:lnT w="0" cap="flat" cmpd="sng">
-                      <a:noFill/>
-                    </a:lnT>
-                    <a:lnB w="0" cap="flat" cmpd="sng">
-                      <a:noFill/>
-                    </a:lnB>
                   </a:tcPr>
                 </a:tc>
                 <a:tc>
                   <a:txBody>
-                    <a:bodyPr wrap="square"/>
+                    <a:bodyPr/>
                     <a:lstStyle/>
                     <a:p>
                       <a:pPr algn="l"/>
@@ -22597,23 +21685,11 @@
                     <a:solidFill>
                       <a:srgbClr val="E8EDF9"/>
                     </a:solidFill>
-                    <a:lnL w="0" cap="flat" cmpd="sng">
-                      <a:noFill/>
-                    </a:lnL>
-                    <a:lnR w="0" cap="flat" cmpd="sng">
-                      <a:noFill/>
-                    </a:lnR>
-                    <a:lnT w="0" cap="flat" cmpd="sng">
-                      <a:noFill/>
-                    </a:lnT>
-                    <a:lnB w="0" cap="flat" cmpd="sng">
-                      <a:noFill/>
-                    </a:lnB>
                   </a:tcPr>
                 </a:tc>
                 <a:tc>
                   <a:txBody>
-                    <a:bodyPr wrap="square"/>
+                    <a:bodyPr/>
                     <a:lstStyle/>
                     <a:p>
                       <a:pPr algn="l"/>
@@ -22632,20 +21708,13 @@
                     <a:solidFill>
                       <a:srgbClr val="E8EDF9"/>
                     </a:solidFill>
-                    <a:lnL w="0" cap="flat" cmpd="sng">
-                      <a:noFill/>
-                    </a:lnL>
-                    <a:lnR w="0" cap="flat" cmpd="sng">
-                      <a:noFill/>
-                    </a:lnR>
-                    <a:lnT w="0" cap="flat" cmpd="sng">
-                      <a:noFill/>
-                    </a:lnT>
-                    <a:lnB w="0" cap="flat" cmpd="sng">
-                      <a:noFill/>
-                    </a:lnB>
                   </a:tcPr>
                 </a:tc>
+                <a:extLst>
+                  <a:ext uri="{0D108BD9-81ED-4DB2-BD59-A6C34878D82A}">
+                    <a16:rowId xmlns:a16="http://schemas.microsoft.com/office/drawing/2014/main" val="10002"/>
+                  </a:ext>
+                </a:extLst>
               </a:tr>
             </a:tbl>
           </a:graphicData>
@@ -22691,6 +21760,7 @@
           <a:lstStyle/>
           <a:p>
             <a:pPr algn="ctr"/>
+            <a:endParaRPr/>
           </a:p>
         </p:txBody>
       </p:sp>
@@ -22734,6 +21804,7 @@
           <a:lstStyle/>
           <a:p>
             <a:pPr algn="ctr"/>
+            <a:endParaRPr/>
           </a:p>
         </p:txBody>
       </p:sp>
@@ -22853,6 +21924,7 @@
           <a:lstStyle/>
           <a:p>
             <a:pPr algn="ctr"/>
+            <a:endParaRPr/>
           </a:p>
         </p:txBody>
       </p:sp>
@@ -22896,6 +21968,7 @@
           <a:lstStyle/>
           <a:p>
             <a:pPr algn="ctr"/>
+            <a:endParaRPr/>
           </a:p>
         </p:txBody>
       </p:sp>
@@ -23015,6 +22088,7 @@
           <a:lstStyle/>
           <a:p>
             <a:pPr algn="ctr"/>
+            <a:endParaRPr/>
           </a:p>
         </p:txBody>
       </p:sp>
@@ -23058,6 +22132,7 @@
           <a:lstStyle/>
           <a:p>
             <a:pPr algn="ctr"/>
+            <a:endParaRPr/>
           </a:p>
         </p:txBody>
       </p:sp>
@@ -23177,6 +22252,7 @@
           <a:lstStyle/>
           <a:p>
             <a:pPr algn="ctr"/>
+            <a:endParaRPr/>
           </a:p>
         </p:txBody>
       </p:sp>
@@ -23220,6 +22296,7 @@
           <a:lstStyle/>
           <a:p>
             <a:pPr algn="ctr"/>
+            <a:endParaRPr/>
           </a:p>
         </p:txBody>
       </p:sp>
@@ -23308,7 +22385,7 @@
 </file>
 
 <file path=ppt/slides/slide9.xml><?xml version="1.0" encoding="utf-8"?>
-<p:sld xmlns:a="http://schemas.openxmlformats.org/drawingml/2006/main" xmlns:p="http://schemas.openxmlformats.org/presentationml/2006/main" xmlns:r="http://schemas.openxmlformats.org/officeDocument/2006/relationships">
+<p:sld xmlns:a="http://schemas.openxmlformats.org/drawingml/2006/main" xmlns:r="http://schemas.openxmlformats.org/officeDocument/2006/relationships" xmlns:p="http://schemas.openxmlformats.org/presentationml/2006/main">
   <p:cSld>
     <p:spTree>
       <p:nvGrpSpPr>
@@ -23316,7 +22393,14 @@
         <p:cNvGrpSpPr/>
         <p:nvPr/>
       </p:nvGrpSpPr>
-      <p:grpSpPr/>
+      <p:grpSpPr>
+        <a:xfrm>
+          <a:off x="0" y="0"/>
+          <a:ext cx="0" cy="0"/>
+          <a:chOff x="0" y="0"/>
+          <a:chExt cx="0" cy="0"/>
+        </a:xfrm>
+      </p:grpSpPr>
       <p:sp>
         <p:nvSpPr>
           <p:cNvPr id="2" name="Rectangle 1"/>
@@ -23357,6 +22441,7 @@
           <a:lstStyle/>
           <a:p>
             <a:pPr algn="ctr"/>
+            <a:endParaRPr/>
           </a:p>
         </p:txBody>
       </p:sp>
@@ -23400,6 +22485,7 @@
           <a:lstStyle/>
           <a:p>
             <a:pPr algn="ctr"/>
+            <a:endParaRPr/>
           </a:p>
         </p:txBody>
       </p:sp>
@@ -23443,6 +22529,7 @@
           <a:lstStyle/>
           <a:p>
             <a:pPr algn="ctr"/>
+            <a:endParaRPr/>
           </a:p>
         </p:txBody>
       </p:sp>
@@ -23662,6 +22749,7 @@
           <a:lstStyle/>
           <a:p>
             <a:pPr algn="ctr"/>
+            <a:endParaRPr/>
           </a:p>
         </p:txBody>
       </p:sp>
@@ -23705,6 +22793,7 @@
           <a:lstStyle/>
           <a:p>
             <a:pPr algn="ctr"/>
+            <a:endParaRPr/>
           </a:p>
         </p:txBody>
       </p:sp>
@@ -23824,6 +22913,7 @@
           <a:lstStyle/>
           <a:p>
             <a:pPr algn="ctr"/>
+            <a:endParaRPr/>
           </a:p>
         </p:txBody>
       </p:sp>
@@ -23867,6 +22957,7 @@
           <a:lstStyle/>
           <a:p>
             <a:pPr algn="ctr"/>
+            <a:endParaRPr/>
           </a:p>
         </p:txBody>
       </p:sp>
@@ -23986,6 +23077,7 @@
           <a:lstStyle/>
           <a:p>
             <a:pPr algn="ctr"/>
+            <a:endParaRPr/>
           </a:p>
         </p:txBody>
       </p:sp>
@@ -24029,6 +23121,7 @@
           <a:lstStyle/>
           <a:p>
             <a:pPr algn="ctr"/>
+            <a:endParaRPr/>
           </a:p>
         </p:txBody>
       </p:sp>
